--- a/ProjectVREXP.pptx
+++ b/ProjectVREXP.pptx
@@ -4,6 +4,9 @@
   <p:sldMasterIdLst>
     <p:sldMasterId id="2147483648" r:id="rId1"/>
   </p:sldMasterIdLst>
+  <p:notesMasterIdLst>
+    <p:notesMasterId r:id="rId20"/>
+  </p:notesMasterIdLst>
   <p:sldIdLst>
     <p:sldId id="256" r:id="rId2"/>
     <p:sldId id="257" r:id="rId3"/>
@@ -22,6 +25,7 @@
     <p:sldId id="264" r:id="rId16"/>
     <p:sldId id="265" r:id="rId17"/>
     <p:sldId id="266" r:id="rId18"/>
+    <p:sldId id="273" r:id="rId19"/>
   </p:sldIdLst>
   <p:sldSz cx="12192000" cy="6858000"/>
   <p:notesSz cx="6858000" cy="9144000"/>
@@ -120,6 +124,11 @@
       </a:defRPr>
     </a:lvl9pPr>
   </p:defaultTextStyle>
+  <p:extLst>
+    <p:ext uri="{EFAFB233-063F-42B5-8137-9DF3F51BA10A}">
+      <p15:sldGuideLst xmlns:p15="http://schemas.microsoft.com/office/powerpoint/2012/main"/>
+    </p:ext>
+  </p:extLst>
 </p:presentation>
 </file>
 
@@ -2983,6 +2992,440 @@
 </dgm:styleDef>
 </file>
 
+<file path=ppt/notesMasters/notesMaster1.xml><?xml version="1.0" encoding="utf-8"?>
+<p:notesMaster xmlns:a="http://schemas.openxmlformats.org/drawingml/2006/main" xmlns:r="http://schemas.openxmlformats.org/officeDocument/2006/relationships" xmlns:p="http://schemas.openxmlformats.org/presentationml/2006/main">
+  <p:cSld>
+    <p:bg>
+      <p:bgRef idx="1001">
+        <a:schemeClr val="bg1"/>
+      </p:bgRef>
+    </p:bg>
+    <p:spTree>
+      <p:nvGrpSpPr>
+        <p:cNvPr id="1" name=""/>
+        <p:cNvGrpSpPr/>
+        <p:nvPr/>
+      </p:nvGrpSpPr>
+      <p:grpSpPr>
+        <a:xfrm>
+          <a:off x="0" y="0"/>
+          <a:ext cx="0" cy="0"/>
+          <a:chOff x="0" y="0"/>
+          <a:chExt cx="0" cy="0"/>
+        </a:xfrm>
+      </p:grpSpPr>
+      <p:sp>
+        <p:nvSpPr>
+          <p:cNvPr id="2" name="Tijdelijke aanduiding voor koptekst 1"/>
+          <p:cNvSpPr>
+            <a:spLocks noGrp="1"/>
+          </p:cNvSpPr>
+          <p:nvPr>
+            <p:ph type="hdr" sz="quarter"/>
+          </p:nvPr>
+        </p:nvSpPr>
+        <p:spPr>
+          <a:xfrm>
+            <a:off x="0" y="0"/>
+            <a:ext cx="2971800" cy="458788"/>
+          </a:xfrm>
+          <a:prstGeom prst="rect">
+            <a:avLst/>
+          </a:prstGeom>
+        </p:spPr>
+        <p:txBody>
+          <a:bodyPr vert="horz" lIns="91440" tIns="45720" rIns="91440" bIns="45720" rtlCol="0"/>
+          <a:lstStyle>
+            <a:lvl1pPr algn="l">
+              <a:defRPr sz="1200"/>
+            </a:lvl1pPr>
+          </a:lstStyle>
+          <a:p>
+            <a:endParaRPr lang="nl-BE"/>
+          </a:p>
+        </p:txBody>
+      </p:sp>
+      <p:sp>
+        <p:nvSpPr>
+          <p:cNvPr id="3" name="Tijdelijke aanduiding voor datum 2"/>
+          <p:cNvSpPr>
+            <a:spLocks noGrp="1"/>
+          </p:cNvSpPr>
+          <p:nvPr>
+            <p:ph type="dt" idx="1"/>
+          </p:nvPr>
+        </p:nvSpPr>
+        <p:spPr>
+          <a:xfrm>
+            <a:off x="3884613" y="0"/>
+            <a:ext cx="2971800" cy="458788"/>
+          </a:xfrm>
+          <a:prstGeom prst="rect">
+            <a:avLst/>
+          </a:prstGeom>
+        </p:spPr>
+        <p:txBody>
+          <a:bodyPr vert="horz" lIns="91440" tIns="45720" rIns="91440" bIns="45720" rtlCol="0"/>
+          <a:lstStyle>
+            <a:lvl1pPr algn="r">
+              <a:defRPr sz="1200"/>
+            </a:lvl1pPr>
+          </a:lstStyle>
+          <a:p>
+            <a:fld id="{0BBB19E0-67B5-40A7-B4EB-669C938C49F0}" type="datetimeFigureOut">
+              <a:rPr lang="nl-BE" smtClean="0"/>
+              <a:t>27/05/2026</a:t>
+            </a:fld>
+            <a:endParaRPr lang="nl-BE"/>
+          </a:p>
+        </p:txBody>
+      </p:sp>
+      <p:sp>
+        <p:nvSpPr>
+          <p:cNvPr id="4" name="Tijdelijke aanduiding voor dia-afbeelding 3"/>
+          <p:cNvSpPr>
+            <a:spLocks noGrp="1" noRot="1" noChangeAspect="1"/>
+          </p:cNvSpPr>
+          <p:nvPr>
+            <p:ph type="sldImg" idx="2"/>
+          </p:nvPr>
+        </p:nvSpPr>
+        <p:spPr>
+          <a:xfrm>
+            <a:off x="685800" y="1143000"/>
+            <a:ext cx="5486400" cy="3086100"/>
+          </a:xfrm>
+          <a:prstGeom prst="rect">
+            <a:avLst/>
+          </a:prstGeom>
+          <a:noFill/>
+          <a:ln w="12700">
+            <a:solidFill>
+              <a:prstClr val="black"/>
+            </a:solidFill>
+          </a:ln>
+        </p:spPr>
+        <p:txBody>
+          <a:bodyPr vert="horz" lIns="91440" tIns="45720" rIns="91440" bIns="45720" rtlCol="0" anchor="ctr"/>
+          <a:lstStyle/>
+          <a:p>
+            <a:endParaRPr lang="nl-BE"/>
+          </a:p>
+        </p:txBody>
+      </p:sp>
+      <p:sp>
+        <p:nvSpPr>
+          <p:cNvPr id="5" name="Tijdelijke aanduiding voor notities 4"/>
+          <p:cNvSpPr>
+            <a:spLocks noGrp="1"/>
+          </p:cNvSpPr>
+          <p:nvPr>
+            <p:ph type="body" sz="quarter" idx="3"/>
+          </p:nvPr>
+        </p:nvSpPr>
+        <p:spPr>
+          <a:xfrm>
+            <a:off x="685800" y="4400550"/>
+            <a:ext cx="5486400" cy="3600450"/>
+          </a:xfrm>
+          <a:prstGeom prst="rect">
+            <a:avLst/>
+          </a:prstGeom>
+        </p:spPr>
+        <p:txBody>
+          <a:bodyPr vert="horz" lIns="91440" tIns="45720" rIns="91440" bIns="45720" rtlCol="0"/>
+          <a:lstStyle/>
+          <a:p>
+            <a:pPr lvl="0"/>
+            <a:r>
+              <a:rPr lang="nl-NL"/>
+              <a:t>Klikken om de tekststijl van het model te bewerken</a:t>
+            </a:r>
+          </a:p>
+          <a:p>
+            <a:pPr lvl="1"/>
+            <a:r>
+              <a:rPr lang="nl-NL"/>
+              <a:t>Tweede niveau</a:t>
+            </a:r>
+          </a:p>
+          <a:p>
+            <a:pPr lvl="2"/>
+            <a:r>
+              <a:rPr lang="nl-NL"/>
+              <a:t>Derde niveau</a:t>
+            </a:r>
+          </a:p>
+          <a:p>
+            <a:pPr lvl="3"/>
+            <a:r>
+              <a:rPr lang="nl-NL"/>
+              <a:t>Vierde niveau</a:t>
+            </a:r>
+          </a:p>
+          <a:p>
+            <a:pPr lvl="4"/>
+            <a:r>
+              <a:rPr lang="nl-NL"/>
+              <a:t>Vijfde niveau</a:t>
+            </a:r>
+            <a:endParaRPr lang="nl-BE"/>
+          </a:p>
+        </p:txBody>
+      </p:sp>
+      <p:sp>
+        <p:nvSpPr>
+          <p:cNvPr id="6" name="Tijdelijke aanduiding voor voettekst 5"/>
+          <p:cNvSpPr>
+            <a:spLocks noGrp="1"/>
+          </p:cNvSpPr>
+          <p:nvPr>
+            <p:ph type="ftr" sz="quarter" idx="4"/>
+          </p:nvPr>
+        </p:nvSpPr>
+        <p:spPr>
+          <a:xfrm>
+            <a:off x="0" y="8685213"/>
+            <a:ext cx="2971800" cy="458787"/>
+          </a:xfrm>
+          <a:prstGeom prst="rect">
+            <a:avLst/>
+          </a:prstGeom>
+        </p:spPr>
+        <p:txBody>
+          <a:bodyPr vert="horz" lIns="91440" tIns="45720" rIns="91440" bIns="45720" rtlCol="0" anchor="b"/>
+          <a:lstStyle>
+            <a:lvl1pPr algn="l">
+              <a:defRPr sz="1200"/>
+            </a:lvl1pPr>
+          </a:lstStyle>
+          <a:p>
+            <a:endParaRPr lang="nl-BE"/>
+          </a:p>
+        </p:txBody>
+      </p:sp>
+      <p:sp>
+        <p:nvSpPr>
+          <p:cNvPr id="7" name="Tijdelijke aanduiding voor dianummer 6"/>
+          <p:cNvSpPr>
+            <a:spLocks noGrp="1"/>
+          </p:cNvSpPr>
+          <p:nvPr>
+            <p:ph type="sldNum" sz="quarter" idx="5"/>
+          </p:nvPr>
+        </p:nvSpPr>
+        <p:spPr>
+          <a:xfrm>
+            <a:off x="3884613" y="8685213"/>
+            <a:ext cx="2971800" cy="458787"/>
+          </a:xfrm>
+          <a:prstGeom prst="rect">
+            <a:avLst/>
+          </a:prstGeom>
+        </p:spPr>
+        <p:txBody>
+          <a:bodyPr vert="horz" lIns="91440" tIns="45720" rIns="91440" bIns="45720" rtlCol="0" anchor="b"/>
+          <a:lstStyle>
+            <a:lvl1pPr algn="r">
+              <a:defRPr sz="1200"/>
+            </a:lvl1pPr>
+          </a:lstStyle>
+          <a:p>
+            <a:fld id="{964CB4EC-9112-42CF-A1F4-24A2A9075661}" type="slidenum">
+              <a:rPr lang="nl-BE" smtClean="0"/>
+              <a:t>‹nr.›</a:t>
+            </a:fld>
+            <a:endParaRPr lang="nl-BE"/>
+          </a:p>
+        </p:txBody>
+      </p:sp>
+    </p:spTree>
+    <p:extLst>
+      <p:ext uri="{BB962C8B-B14F-4D97-AF65-F5344CB8AC3E}">
+        <p14:creationId xmlns:p14="http://schemas.microsoft.com/office/powerpoint/2010/main" val="4288790106"/>
+      </p:ext>
+    </p:extLst>
+  </p:cSld>
+  <p:clrMap bg1="lt1" tx1="dk1" bg2="lt2" tx2="dk2" accent1="accent1" accent2="accent2" accent3="accent3" accent4="accent4" accent5="accent5" accent6="accent6" hlink="hlink" folHlink="folHlink"/>
+  <p:notesStyle>
+    <a:lvl1pPr marL="0" algn="l" defTabSz="914400" rtl="0" eaLnBrk="1" latinLnBrk="0" hangingPunct="1">
+      <a:defRPr sz="1200" kern="1200">
+        <a:solidFill>
+          <a:schemeClr val="tx1"/>
+        </a:solidFill>
+        <a:latin typeface="+mn-lt"/>
+        <a:ea typeface="+mn-ea"/>
+        <a:cs typeface="+mn-cs"/>
+      </a:defRPr>
+    </a:lvl1pPr>
+    <a:lvl2pPr marL="457200" algn="l" defTabSz="914400" rtl="0" eaLnBrk="1" latinLnBrk="0" hangingPunct="1">
+      <a:defRPr sz="1200" kern="1200">
+        <a:solidFill>
+          <a:schemeClr val="tx1"/>
+        </a:solidFill>
+        <a:latin typeface="+mn-lt"/>
+        <a:ea typeface="+mn-ea"/>
+        <a:cs typeface="+mn-cs"/>
+      </a:defRPr>
+    </a:lvl2pPr>
+    <a:lvl3pPr marL="914400" algn="l" defTabSz="914400" rtl="0" eaLnBrk="1" latinLnBrk="0" hangingPunct="1">
+      <a:defRPr sz="1200" kern="1200">
+        <a:solidFill>
+          <a:schemeClr val="tx1"/>
+        </a:solidFill>
+        <a:latin typeface="+mn-lt"/>
+        <a:ea typeface="+mn-ea"/>
+        <a:cs typeface="+mn-cs"/>
+      </a:defRPr>
+    </a:lvl3pPr>
+    <a:lvl4pPr marL="1371600" algn="l" defTabSz="914400" rtl="0" eaLnBrk="1" latinLnBrk="0" hangingPunct="1">
+      <a:defRPr sz="1200" kern="1200">
+        <a:solidFill>
+          <a:schemeClr val="tx1"/>
+        </a:solidFill>
+        <a:latin typeface="+mn-lt"/>
+        <a:ea typeface="+mn-ea"/>
+        <a:cs typeface="+mn-cs"/>
+      </a:defRPr>
+    </a:lvl4pPr>
+    <a:lvl5pPr marL="1828800" algn="l" defTabSz="914400" rtl="0" eaLnBrk="1" latinLnBrk="0" hangingPunct="1">
+      <a:defRPr sz="1200" kern="1200">
+        <a:solidFill>
+          <a:schemeClr val="tx1"/>
+        </a:solidFill>
+        <a:latin typeface="+mn-lt"/>
+        <a:ea typeface="+mn-ea"/>
+        <a:cs typeface="+mn-cs"/>
+      </a:defRPr>
+    </a:lvl5pPr>
+    <a:lvl6pPr marL="2286000" algn="l" defTabSz="914400" rtl="0" eaLnBrk="1" latinLnBrk="0" hangingPunct="1">
+      <a:defRPr sz="1200" kern="1200">
+        <a:solidFill>
+          <a:schemeClr val="tx1"/>
+        </a:solidFill>
+        <a:latin typeface="+mn-lt"/>
+        <a:ea typeface="+mn-ea"/>
+        <a:cs typeface="+mn-cs"/>
+      </a:defRPr>
+    </a:lvl6pPr>
+    <a:lvl7pPr marL="2743200" algn="l" defTabSz="914400" rtl="0" eaLnBrk="1" latinLnBrk="0" hangingPunct="1">
+      <a:defRPr sz="1200" kern="1200">
+        <a:solidFill>
+          <a:schemeClr val="tx1"/>
+        </a:solidFill>
+        <a:latin typeface="+mn-lt"/>
+        <a:ea typeface="+mn-ea"/>
+        <a:cs typeface="+mn-cs"/>
+      </a:defRPr>
+    </a:lvl7pPr>
+    <a:lvl8pPr marL="3200400" algn="l" defTabSz="914400" rtl="0" eaLnBrk="1" latinLnBrk="0" hangingPunct="1">
+      <a:defRPr sz="1200" kern="1200">
+        <a:solidFill>
+          <a:schemeClr val="tx1"/>
+        </a:solidFill>
+        <a:latin typeface="+mn-lt"/>
+        <a:ea typeface="+mn-ea"/>
+        <a:cs typeface="+mn-cs"/>
+      </a:defRPr>
+    </a:lvl8pPr>
+    <a:lvl9pPr marL="3657600" algn="l" defTabSz="914400" rtl="0" eaLnBrk="1" latinLnBrk="0" hangingPunct="1">
+      <a:defRPr sz="1200" kern="1200">
+        <a:solidFill>
+          <a:schemeClr val="tx1"/>
+        </a:solidFill>
+        <a:latin typeface="+mn-lt"/>
+        <a:ea typeface="+mn-ea"/>
+        <a:cs typeface="+mn-cs"/>
+      </a:defRPr>
+    </a:lvl9pPr>
+  </p:notesStyle>
+</p:notesMaster>
+</file>
+
+<file path=ppt/notesSlides/notesSlide1.xml><?xml version="1.0" encoding="utf-8"?>
+<p:notes xmlns:a="http://schemas.openxmlformats.org/drawingml/2006/main" xmlns:r="http://schemas.openxmlformats.org/officeDocument/2006/relationships" xmlns:p="http://schemas.openxmlformats.org/presentationml/2006/main">
+  <p:cSld>
+    <p:spTree>
+      <p:nvGrpSpPr>
+        <p:cNvPr id="1" name=""/>
+        <p:cNvGrpSpPr/>
+        <p:nvPr/>
+      </p:nvGrpSpPr>
+      <p:grpSpPr>
+        <a:xfrm>
+          <a:off x="0" y="0"/>
+          <a:ext cx="0" cy="0"/>
+          <a:chOff x="0" y="0"/>
+          <a:chExt cx="0" cy="0"/>
+        </a:xfrm>
+      </p:grpSpPr>
+      <p:sp>
+        <p:nvSpPr>
+          <p:cNvPr id="2" name="Tijdelijke aanduiding voor dia-afbeelding 1"/>
+          <p:cNvSpPr>
+            <a:spLocks noGrp="1" noRot="1" noChangeAspect="1"/>
+          </p:cNvSpPr>
+          <p:nvPr>
+            <p:ph type="sldImg"/>
+          </p:nvPr>
+        </p:nvSpPr>
+        <p:spPr/>
+      </p:sp>
+      <p:sp>
+        <p:nvSpPr>
+          <p:cNvPr id="3" name="Tijdelijke aanduiding voor notities 2"/>
+          <p:cNvSpPr>
+            <a:spLocks noGrp="1"/>
+          </p:cNvSpPr>
+          <p:nvPr>
+            <p:ph type="body" idx="1"/>
+          </p:nvPr>
+        </p:nvSpPr>
+        <p:spPr/>
+        <p:txBody>
+          <a:bodyPr/>
+          <a:lstStyle/>
+          <a:p>
+            <a:endParaRPr lang="nl-BE" dirty="0"/>
+          </a:p>
+        </p:txBody>
+      </p:sp>
+      <p:sp>
+        <p:nvSpPr>
+          <p:cNvPr id="4" name="Tijdelijke aanduiding voor dianummer 3"/>
+          <p:cNvSpPr>
+            <a:spLocks noGrp="1"/>
+          </p:cNvSpPr>
+          <p:nvPr>
+            <p:ph type="sldNum" sz="quarter" idx="5"/>
+          </p:nvPr>
+        </p:nvSpPr>
+        <p:spPr/>
+        <p:txBody>
+          <a:bodyPr/>
+          <a:lstStyle/>
+          <a:p>
+            <a:fld id="{964CB4EC-9112-42CF-A1F4-24A2A9075661}" type="slidenum">
+              <a:rPr lang="nl-BE" smtClean="0"/>
+              <a:t>1</a:t>
+            </a:fld>
+            <a:endParaRPr lang="nl-BE"/>
+          </a:p>
+        </p:txBody>
+      </p:sp>
+    </p:spTree>
+    <p:extLst>
+      <p:ext uri="{BB962C8B-B14F-4D97-AF65-F5344CB8AC3E}">
+        <p14:creationId xmlns:p14="http://schemas.microsoft.com/office/powerpoint/2010/main" val="1222259577"/>
+      </p:ext>
+    </p:extLst>
+  </p:cSld>
+  <p:clrMapOvr>
+    <a:masterClrMapping/>
+  </p:clrMapOvr>
+</p:notes>
+</file>
+
 <file path=ppt/slideLayouts/slideLayout1.xml><?xml version="1.0" encoding="utf-8"?>
 <p:sldLayout xmlns:a="http://schemas.openxmlformats.org/drawingml/2006/main" xmlns:r="http://schemas.openxmlformats.org/officeDocument/2006/relationships" xmlns:p="http://schemas.openxmlformats.org/presentationml/2006/main" type="title" preserve="1">
   <p:cSld name="Titeldia">
@@ -3132,7 +3575,7 @@
           <a:p>
             <a:fld id="{A0E83518-544F-44ED-8570-2B568E629D94}" type="datetimeFigureOut">
               <a:rPr lang="nl-BE" smtClean="0"/>
-              <a:t>26/05/2026</a:t>
+              <a:t>27/05/2026</a:t>
             </a:fld>
             <a:endParaRPr lang="nl-BE"/>
           </a:p>
@@ -3332,7 +3775,7 @@
           <a:p>
             <a:fld id="{A0E83518-544F-44ED-8570-2B568E629D94}" type="datetimeFigureOut">
               <a:rPr lang="nl-BE" smtClean="0"/>
-              <a:t>26/05/2026</a:t>
+              <a:t>27/05/2026</a:t>
             </a:fld>
             <a:endParaRPr lang="nl-BE"/>
           </a:p>
@@ -3542,7 +3985,7 @@
           <a:p>
             <a:fld id="{A0E83518-544F-44ED-8570-2B568E629D94}" type="datetimeFigureOut">
               <a:rPr lang="nl-BE" smtClean="0"/>
-              <a:t>26/05/2026</a:t>
+              <a:t>27/05/2026</a:t>
             </a:fld>
             <a:endParaRPr lang="nl-BE"/>
           </a:p>
@@ -3742,7 +4185,7 @@
           <a:p>
             <a:fld id="{A0E83518-544F-44ED-8570-2B568E629D94}" type="datetimeFigureOut">
               <a:rPr lang="nl-BE" smtClean="0"/>
-              <a:t>26/05/2026</a:t>
+              <a:t>27/05/2026</a:t>
             </a:fld>
             <a:endParaRPr lang="nl-BE"/>
           </a:p>
@@ -4018,7 +4461,7 @@
           <a:p>
             <a:fld id="{A0E83518-544F-44ED-8570-2B568E629D94}" type="datetimeFigureOut">
               <a:rPr lang="nl-BE" smtClean="0"/>
-              <a:t>26/05/2026</a:t>
+              <a:t>27/05/2026</a:t>
             </a:fld>
             <a:endParaRPr lang="nl-BE"/>
           </a:p>
@@ -4286,7 +4729,7 @@
           <a:p>
             <a:fld id="{A0E83518-544F-44ED-8570-2B568E629D94}" type="datetimeFigureOut">
               <a:rPr lang="nl-BE" smtClean="0"/>
-              <a:t>26/05/2026</a:t>
+              <a:t>27/05/2026</a:t>
             </a:fld>
             <a:endParaRPr lang="nl-BE"/>
           </a:p>
@@ -4701,7 +5144,7 @@
           <a:p>
             <a:fld id="{A0E83518-544F-44ED-8570-2B568E629D94}" type="datetimeFigureOut">
               <a:rPr lang="nl-BE" smtClean="0"/>
-              <a:t>26/05/2026</a:t>
+              <a:t>27/05/2026</a:t>
             </a:fld>
             <a:endParaRPr lang="nl-BE"/>
           </a:p>
@@ -4843,7 +5286,7 @@
           <a:p>
             <a:fld id="{A0E83518-544F-44ED-8570-2B568E629D94}" type="datetimeFigureOut">
               <a:rPr lang="nl-BE" smtClean="0"/>
-              <a:t>26/05/2026</a:t>
+              <a:t>27/05/2026</a:t>
             </a:fld>
             <a:endParaRPr lang="nl-BE"/>
           </a:p>
@@ -4956,7 +5399,7 @@
           <a:p>
             <a:fld id="{A0E83518-544F-44ED-8570-2B568E629D94}" type="datetimeFigureOut">
               <a:rPr lang="nl-BE" smtClean="0"/>
-              <a:t>26/05/2026</a:t>
+              <a:t>27/05/2026</a:t>
             </a:fld>
             <a:endParaRPr lang="nl-BE"/>
           </a:p>
@@ -5269,7 +5712,7 @@
           <a:p>
             <a:fld id="{A0E83518-544F-44ED-8570-2B568E629D94}" type="datetimeFigureOut">
               <a:rPr lang="nl-BE" smtClean="0"/>
-              <a:t>26/05/2026</a:t>
+              <a:t>27/05/2026</a:t>
             </a:fld>
             <a:endParaRPr lang="nl-BE"/>
           </a:p>
@@ -5558,7 +6001,7 @@
           <a:p>
             <a:fld id="{A0E83518-544F-44ED-8570-2B568E629D94}" type="datetimeFigureOut">
               <a:rPr lang="nl-BE" smtClean="0"/>
-              <a:t>26/05/2026</a:t>
+              <a:t>27/05/2026</a:t>
             </a:fld>
             <a:endParaRPr lang="nl-BE"/>
           </a:p>
@@ -5801,7 +6244,7 @@
           <a:p>
             <a:fld id="{A0E83518-544F-44ED-8570-2B568E629D94}" type="datetimeFigureOut">
               <a:rPr lang="nl-BE" smtClean="0"/>
-              <a:t>26/05/2026</a:t>
+              <a:t>27/05/2026</a:t>
             </a:fld>
             <a:endParaRPr lang="nl-BE"/>
           </a:p>
@@ -6220,71 +6663,148 @@
       </p:grpSpPr>
       <p:sp>
         <p:nvSpPr>
-          <p:cNvPr id="2" name="Titel 1">
+          <p:cNvPr id="23" name="Rechthoek 22">
             <a:extLst>
               <a:ext uri="{FF2B5EF4-FFF2-40B4-BE49-F238E27FC236}">
-                <a16:creationId xmlns:a16="http://schemas.microsoft.com/office/drawing/2014/main" id="{534AC4B9-1203-9BB9-B3C3-8CDD8DCC087A}"/>
+                <a16:creationId xmlns:a16="http://schemas.microsoft.com/office/drawing/2014/main" id="{78D064B1-3A55-B4B0-BF54-7E88534DF538}"/>
               </a:ext>
             </a:extLst>
           </p:cNvPr>
-          <p:cNvSpPr>
-            <a:spLocks noGrp="1"/>
-          </p:cNvSpPr>
-          <p:nvPr>
-            <p:ph type="ctrTitle"/>
-          </p:nvPr>
+          <p:cNvSpPr/>
+          <p:nvPr/>
         </p:nvSpPr>
-        <p:spPr/>
+        <p:spPr>
+          <a:xfrm>
+            <a:off x="0" y="0"/>
+            <a:ext cx="8621486" cy="1325880"/>
+          </a:xfrm>
+          <a:prstGeom prst="rect">
+            <a:avLst/>
+          </a:prstGeom>
+          <a:gradFill>
+            <a:gsLst>
+              <a:gs pos="0">
+                <a:schemeClr val="accent1">
+                  <a:lumMod val="75000"/>
+                </a:schemeClr>
+              </a:gs>
+              <a:gs pos="51000">
+                <a:schemeClr val="accent1">
+                  <a:lumMod val="75000"/>
+                </a:schemeClr>
+              </a:gs>
+              <a:gs pos="100000">
+                <a:schemeClr val="accent1">
+                  <a:lumMod val="50000"/>
+                </a:schemeClr>
+              </a:gs>
+            </a:gsLst>
+            <a:lin ang="0" scaled="1"/>
+          </a:gradFill>
+          <a:ln>
+            <a:noFill/>
+          </a:ln>
+        </p:spPr>
+        <p:style>
+          <a:lnRef idx="2">
+            <a:schemeClr val="accent1">
+              <a:shade val="15000"/>
+            </a:schemeClr>
+          </a:lnRef>
+          <a:fillRef idx="1">
+            <a:schemeClr val="accent1"/>
+          </a:fillRef>
+          <a:effectRef idx="0">
+            <a:schemeClr val="accent1"/>
+          </a:effectRef>
+          <a:fontRef idx="minor">
+            <a:schemeClr val="lt1"/>
+          </a:fontRef>
+        </p:style>
         <p:txBody>
-          <a:bodyPr/>
+          <a:bodyPr rtlCol="0" anchor="ctr"/>
           <a:lstStyle/>
           <a:p>
-            <a:r>
-              <a:rPr lang="nl-BE" dirty="0"/>
-              <a:t>VR </a:t>
-            </a:r>
-            <a:r>
-              <a:rPr lang="nl-BE" dirty="0" err="1"/>
-              <a:t>Experience</a:t>
-            </a:r>
-            <a:endParaRPr lang="nl-BE" dirty="0"/>
+            <a:pPr algn="ctr"/>
+            <a:endParaRPr lang="nl-BE"/>
           </a:p>
         </p:txBody>
       </p:sp>
       <p:sp>
         <p:nvSpPr>
-          <p:cNvPr id="3" name="Ondertitel 2">
+          <p:cNvPr id="24" name="Rechthoek 23">
             <a:extLst>
               <a:ext uri="{FF2B5EF4-FFF2-40B4-BE49-F238E27FC236}">
-                <a16:creationId xmlns:a16="http://schemas.microsoft.com/office/drawing/2014/main" id="{B4C018DB-5204-266F-EDAE-73A85BB4FBF8}"/>
+                <a16:creationId xmlns:a16="http://schemas.microsoft.com/office/drawing/2014/main" id="{146EBB48-8025-9C66-6A51-7EB3482CBF0A}"/>
               </a:ext>
             </a:extLst>
           </p:cNvPr>
-          <p:cNvSpPr>
-            <a:spLocks noGrp="1"/>
-          </p:cNvSpPr>
-          <p:nvPr>
-            <p:ph type="subTitle" idx="1"/>
-          </p:nvPr>
+          <p:cNvSpPr/>
+          <p:nvPr/>
         </p:nvSpPr>
-        <p:spPr/>
+        <p:spPr>
+          <a:xfrm>
+            <a:off x="8621486" y="0"/>
+            <a:ext cx="3570514" cy="1325880"/>
+          </a:xfrm>
+          <a:prstGeom prst="rect">
+            <a:avLst/>
+          </a:prstGeom>
+          <a:gradFill>
+            <a:gsLst>
+              <a:gs pos="0">
+                <a:schemeClr val="accent1">
+                  <a:lumMod val="75000"/>
+                </a:schemeClr>
+              </a:gs>
+              <a:gs pos="51000">
+                <a:schemeClr val="accent1">
+                  <a:lumMod val="75000"/>
+                </a:schemeClr>
+              </a:gs>
+              <a:gs pos="100000">
+                <a:schemeClr val="accent1">
+                  <a:lumMod val="50000"/>
+                </a:schemeClr>
+              </a:gs>
+            </a:gsLst>
+            <a:lin ang="0" scaled="1"/>
+          </a:gradFill>
+          <a:ln>
+            <a:noFill/>
+          </a:ln>
+        </p:spPr>
+        <p:style>
+          <a:lnRef idx="2">
+            <a:schemeClr val="accent1">
+              <a:shade val="15000"/>
+            </a:schemeClr>
+          </a:lnRef>
+          <a:fillRef idx="1">
+            <a:schemeClr val="accent1"/>
+          </a:fillRef>
+          <a:effectRef idx="0">
+            <a:schemeClr val="accent1"/>
+          </a:effectRef>
+          <a:fontRef idx="minor">
+            <a:schemeClr val="lt1"/>
+          </a:fontRef>
+        </p:style>
         <p:txBody>
-          <a:bodyPr/>
+          <a:bodyPr rtlCol="0" anchor="ctr"/>
           <a:lstStyle/>
           <a:p>
-            <a:r>
-              <a:rPr lang="nl-BE" dirty="0"/>
-              <a:t>Space Escape</a:t>
-            </a:r>
+            <a:pPr algn="ctr"/>
+            <a:endParaRPr lang="nl-BE"/>
           </a:p>
         </p:txBody>
       </p:sp>
       <p:sp>
         <p:nvSpPr>
-          <p:cNvPr id="4" name="Tekstvak 3">
+          <p:cNvPr id="22" name="Tekstvak 21">
             <a:extLst>
               <a:ext uri="{FF2B5EF4-FFF2-40B4-BE49-F238E27FC236}">
-                <a16:creationId xmlns:a16="http://schemas.microsoft.com/office/drawing/2014/main" id="{294FEB0D-B034-1617-9CE4-882B509EC443}"/>
+                <a16:creationId xmlns:a16="http://schemas.microsoft.com/office/drawing/2014/main" id="{D3FB4C15-83A9-23E3-9314-F23B0EA17D3F}"/>
               </a:ext>
             </a:extLst>
           </p:cNvPr>
@@ -6293,8 +6813,8 @@
         </p:nvSpPr>
         <p:spPr>
           <a:xfrm>
-            <a:off x="0" y="6515100"/>
-            <a:ext cx="5468815" cy="369332"/>
+            <a:off x="0" y="6498771"/>
+            <a:ext cx="3842786" cy="369332"/>
           </a:xfrm>
           <a:prstGeom prst="rect">
             <a:avLst/>
@@ -6318,6 +6838,2465 @@
           </a:p>
         </p:txBody>
       </p:sp>
+      <p:pic>
+        <p:nvPicPr>
+          <p:cNvPr id="38" name="Afbeelding 37" descr="Afbeeldingen over Space – Blader in stockfoto's, vectoren en video's over  81,206,461 | Adobe Stock">
+            <a:extLst>
+              <a:ext uri="{FF2B5EF4-FFF2-40B4-BE49-F238E27FC236}">
+                <a16:creationId xmlns:a16="http://schemas.microsoft.com/office/drawing/2014/main" id="{90A7BFF3-EB6B-DAA6-7348-B5430E6351DE}"/>
+              </a:ext>
+            </a:extLst>
+          </p:cNvPr>
+          <p:cNvPicPr>
+            <a:picLocks noChangeAspect="1"/>
+          </p:cNvPicPr>
+          <p:nvPr/>
+        </p:nvPicPr>
+        <p:blipFill>
+          <a:blip r:embed="rId3"/>
+          <a:srcRect l="151" t="27534" r="3094" b="19698"/>
+          <a:stretch>
+            <a:fillRect/>
+          </a:stretch>
+        </p:blipFill>
+        <p:spPr>
+          <a:xfrm>
+            <a:off x="2431254" y="3208161"/>
+            <a:ext cx="7315199" cy="1653927"/>
+          </a:xfrm>
+          <a:custGeom>
+            <a:avLst/>
+            <a:gdLst/>
+            <a:ahLst/>
+            <a:cxnLst/>
+            <a:rect l="l" t="t" r="r" b="b"/>
+            <a:pathLst>
+              <a:path w="7315199" h="1653927">
+                <a:moveTo>
+                  <a:pt x="3494261" y="1382911"/>
+                </a:moveTo>
+                <a:cubicBezTo>
+                  <a:pt x="3478336" y="1382911"/>
+                  <a:pt x="3464904" y="1387153"/>
+                  <a:pt x="3453965" y="1395636"/>
+                </a:cubicBezTo>
+                <a:cubicBezTo>
+                  <a:pt x="3443027" y="1404119"/>
+                  <a:pt x="3434506" y="1414016"/>
+                  <a:pt x="3428404" y="1425327"/>
+                </a:cubicBezTo>
+                <a:lnTo>
+                  <a:pt x="3428404" y="1509266"/>
+                </a:lnTo>
+                <a:cubicBezTo>
+                  <a:pt x="3434357" y="1520577"/>
+                  <a:pt x="3442394" y="1529767"/>
+                  <a:pt x="3452514" y="1536836"/>
+                </a:cubicBezTo>
+                <a:cubicBezTo>
+                  <a:pt x="3462635" y="1543906"/>
+                  <a:pt x="3475062" y="1547440"/>
+                  <a:pt x="3489796" y="1547440"/>
+                </a:cubicBezTo>
+                <a:cubicBezTo>
+                  <a:pt x="3509590" y="1547440"/>
+                  <a:pt x="3524510" y="1540334"/>
+                  <a:pt x="3534556" y="1526121"/>
+                </a:cubicBezTo>
+                <a:cubicBezTo>
+                  <a:pt x="3544602" y="1511908"/>
+                  <a:pt x="3549625" y="1491630"/>
+                  <a:pt x="3549625" y="1465287"/>
+                </a:cubicBezTo>
+                <a:cubicBezTo>
+                  <a:pt x="3549625" y="1438647"/>
+                  <a:pt x="3544937" y="1418258"/>
+                  <a:pt x="3535561" y="1404119"/>
+                </a:cubicBezTo>
+                <a:cubicBezTo>
+                  <a:pt x="3526184" y="1389980"/>
+                  <a:pt x="3512418" y="1382911"/>
+                  <a:pt x="3494261" y="1382911"/>
+                </a:cubicBezTo>
+                <a:close/>
+                <a:moveTo>
+                  <a:pt x="4953446" y="1381348"/>
+                </a:moveTo>
+                <a:cubicBezTo>
+                  <a:pt x="4935289" y="1381348"/>
+                  <a:pt x="4921038" y="1386669"/>
+                  <a:pt x="4910695" y="1397310"/>
+                </a:cubicBezTo>
+                <a:cubicBezTo>
+                  <a:pt x="4900351" y="1407951"/>
+                  <a:pt x="4894361" y="1423467"/>
+                  <a:pt x="4892724" y="1443856"/>
+                </a:cubicBezTo>
+                <a:lnTo>
+                  <a:pt x="5011489" y="1443856"/>
+                </a:lnTo>
+                <a:cubicBezTo>
+                  <a:pt x="5011042" y="1423615"/>
+                  <a:pt x="5005759" y="1408137"/>
+                  <a:pt x="4995639" y="1397422"/>
+                </a:cubicBezTo>
+                <a:cubicBezTo>
+                  <a:pt x="4985518" y="1386706"/>
+                  <a:pt x="4971454" y="1381348"/>
+                  <a:pt x="4953446" y="1381348"/>
+                </a:cubicBezTo>
+                <a:close/>
+                <a:moveTo>
+                  <a:pt x="4229546" y="1381348"/>
+                </a:moveTo>
+                <a:cubicBezTo>
+                  <a:pt x="4211389" y="1381348"/>
+                  <a:pt x="4197138" y="1386669"/>
+                  <a:pt x="4186795" y="1397310"/>
+                </a:cubicBezTo>
+                <a:cubicBezTo>
+                  <a:pt x="4176451" y="1407951"/>
+                  <a:pt x="4170461" y="1423467"/>
+                  <a:pt x="4168824" y="1443856"/>
+                </a:cubicBezTo>
+                <a:lnTo>
+                  <a:pt x="4287589" y="1443856"/>
+                </a:lnTo>
+                <a:cubicBezTo>
+                  <a:pt x="4287142" y="1423615"/>
+                  <a:pt x="4281859" y="1408137"/>
+                  <a:pt x="4271739" y="1397422"/>
+                </a:cubicBezTo>
+                <a:cubicBezTo>
+                  <a:pt x="4261618" y="1386706"/>
+                  <a:pt x="4247554" y="1381348"/>
+                  <a:pt x="4229546" y="1381348"/>
+                </a:cubicBezTo>
+                <a:close/>
+                <a:moveTo>
+                  <a:pt x="3734246" y="1381348"/>
+                </a:moveTo>
+                <a:cubicBezTo>
+                  <a:pt x="3716089" y="1381348"/>
+                  <a:pt x="3701839" y="1386669"/>
+                  <a:pt x="3691495" y="1397310"/>
+                </a:cubicBezTo>
+                <a:cubicBezTo>
+                  <a:pt x="3681152" y="1407951"/>
+                  <a:pt x="3675161" y="1423467"/>
+                  <a:pt x="3673524" y="1443856"/>
+                </a:cubicBezTo>
+                <a:lnTo>
+                  <a:pt x="3792289" y="1443856"/>
+                </a:lnTo>
+                <a:cubicBezTo>
+                  <a:pt x="3791843" y="1423615"/>
+                  <a:pt x="3786559" y="1408137"/>
+                  <a:pt x="3776439" y="1397422"/>
+                </a:cubicBezTo>
+                <a:cubicBezTo>
+                  <a:pt x="3766319" y="1386706"/>
+                  <a:pt x="3752254" y="1381348"/>
+                  <a:pt x="3734246" y="1381348"/>
+                </a:cubicBezTo>
+                <a:close/>
+                <a:moveTo>
+                  <a:pt x="4038823" y="1356568"/>
+                </a:moveTo>
+                <a:lnTo>
+                  <a:pt x="4076104" y="1356568"/>
+                </a:lnTo>
+                <a:lnTo>
+                  <a:pt x="4076104" y="1574006"/>
+                </a:lnTo>
+                <a:lnTo>
+                  <a:pt x="4038823" y="1574006"/>
+                </a:lnTo>
+                <a:close/>
+                <a:moveTo>
+                  <a:pt x="3164309" y="1356568"/>
+                </a:moveTo>
+                <a:lnTo>
+                  <a:pt x="3204269" y="1356568"/>
+                </a:lnTo>
+                <a:lnTo>
+                  <a:pt x="3256179" y="1438532"/>
+                </a:lnTo>
+                <a:lnTo>
+                  <a:pt x="3308300" y="1356568"/>
+                </a:lnTo>
+                <a:lnTo>
+                  <a:pt x="3348260" y="1356568"/>
+                </a:lnTo>
+                <a:lnTo>
+                  <a:pt x="3277904" y="1459785"/>
+                </a:lnTo>
+                <a:lnTo>
+                  <a:pt x="3355404" y="1574006"/>
+                </a:lnTo>
+                <a:lnTo>
+                  <a:pt x="3315667" y="1574006"/>
+                </a:lnTo>
+                <a:lnTo>
+                  <a:pt x="3256067" y="1482916"/>
+                </a:lnTo>
+                <a:lnTo>
+                  <a:pt x="3196679" y="1574006"/>
+                </a:lnTo>
+                <a:lnTo>
+                  <a:pt x="3157165" y="1574006"/>
+                </a:lnTo>
+                <a:lnTo>
+                  <a:pt x="3234071" y="1460366"/>
+                </a:lnTo>
+                <a:close/>
+                <a:moveTo>
+                  <a:pt x="3990677" y="1353889"/>
+                </a:moveTo>
+                <a:lnTo>
+                  <a:pt x="3995142" y="1353889"/>
+                </a:lnTo>
+                <a:lnTo>
+                  <a:pt x="3995142" y="1388045"/>
+                </a:lnTo>
+                <a:lnTo>
+                  <a:pt x="3990007" y="1388045"/>
+                </a:lnTo>
+                <a:cubicBezTo>
+                  <a:pt x="3979143" y="1388045"/>
+                  <a:pt x="3969618" y="1389459"/>
+                  <a:pt x="3961432" y="1392287"/>
+                </a:cubicBezTo>
+                <a:cubicBezTo>
+                  <a:pt x="3953247" y="1395115"/>
+                  <a:pt x="3946103" y="1399022"/>
+                  <a:pt x="3940001" y="1404007"/>
+                </a:cubicBezTo>
+                <a:cubicBezTo>
+                  <a:pt x="3933899" y="1408993"/>
+                  <a:pt x="3928467" y="1414760"/>
+                  <a:pt x="3923704" y="1421309"/>
+                </a:cubicBezTo>
+                <a:lnTo>
+                  <a:pt x="3923704" y="1574006"/>
+                </a:lnTo>
+                <a:lnTo>
+                  <a:pt x="3886423" y="1574006"/>
+                </a:lnTo>
+                <a:lnTo>
+                  <a:pt x="3886423" y="1356568"/>
+                </a:lnTo>
+                <a:lnTo>
+                  <a:pt x="3921472" y="1356568"/>
+                </a:lnTo>
+                <a:lnTo>
+                  <a:pt x="3922811" y="1393627"/>
+                </a:lnTo>
+                <a:cubicBezTo>
+                  <a:pt x="3928913" y="1382316"/>
+                  <a:pt x="3937396" y="1372865"/>
+                  <a:pt x="3948261" y="1365275"/>
+                </a:cubicBezTo>
+                <a:cubicBezTo>
+                  <a:pt x="3959125" y="1357685"/>
+                  <a:pt x="3973264" y="1353889"/>
+                  <a:pt x="3990677" y="1353889"/>
+                </a:cubicBezTo>
+                <a:close/>
+                <a:moveTo>
+                  <a:pt x="4495576" y="1353443"/>
+                </a:moveTo>
+                <a:cubicBezTo>
+                  <a:pt x="4519389" y="1353443"/>
+                  <a:pt x="4536727" y="1360475"/>
+                  <a:pt x="4547591" y="1374539"/>
+                </a:cubicBezTo>
+                <a:cubicBezTo>
+                  <a:pt x="4558456" y="1388604"/>
+                  <a:pt x="4563888" y="1408361"/>
+                  <a:pt x="4563888" y="1433810"/>
+                </a:cubicBezTo>
+                <a:lnTo>
+                  <a:pt x="4563888" y="1574006"/>
+                </a:lnTo>
+                <a:lnTo>
+                  <a:pt x="4526607" y="1574006"/>
+                </a:lnTo>
+                <a:lnTo>
+                  <a:pt x="4526607" y="1439168"/>
+                </a:lnTo>
+                <a:cubicBezTo>
+                  <a:pt x="4526607" y="1428601"/>
+                  <a:pt x="4525491" y="1419225"/>
+                  <a:pt x="4523258" y="1411039"/>
+                </a:cubicBezTo>
+                <a:cubicBezTo>
+                  <a:pt x="4521026" y="1402854"/>
+                  <a:pt x="4517045" y="1396417"/>
+                  <a:pt x="4511315" y="1391729"/>
+                </a:cubicBezTo>
+                <a:cubicBezTo>
+                  <a:pt x="4505585" y="1387041"/>
+                  <a:pt x="4497288" y="1384697"/>
+                  <a:pt x="4486423" y="1384697"/>
+                </a:cubicBezTo>
+                <a:cubicBezTo>
+                  <a:pt x="4470201" y="1384697"/>
+                  <a:pt x="4456583" y="1388380"/>
+                  <a:pt x="4445570" y="1395747"/>
+                </a:cubicBezTo>
+                <a:cubicBezTo>
+                  <a:pt x="4434557" y="1403114"/>
+                  <a:pt x="4425701" y="1411188"/>
+                  <a:pt x="4419004" y="1419969"/>
+                </a:cubicBezTo>
+                <a:lnTo>
+                  <a:pt x="4419004" y="1574006"/>
+                </a:lnTo>
+                <a:lnTo>
+                  <a:pt x="4381723" y="1574006"/>
+                </a:lnTo>
+                <a:lnTo>
+                  <a:pt x="4381723" y="1356568"/>
+                </a:lnTo>
+                <a:lnTo>
+                  <a:pt x="4417441" y="1356568"/>
+                </a:lnTo>
+                <a:lnTo>
+                  <a:pt x="4418781" y="1390055"/>
+                </a:lnTo>
+                <a:cubicBezTo>
+                  <a:pt x="4425478" y="1381274"/>
+                  <a:pt x="4435077" y="1372977"/>
+                  <a:pt x="4447579" y="1365163"/>
+                </a:cubicBezTo>
+                <a:cubicBezTo>
+                  <a:pt x="4460081" y="1357350"/>
+                  <a:pt x="4476080" y="1353443"/>
+                  <a:pt x="4495576" y="1353443"/>
+                </a:cubicBezTo>
+                <a:close/>
+                <a:moveTo>
+                  <a:pt x="4953446" y="1352773"/>
+                </a:moveTo>
+                <a:cubicBezTo>
+                  <a:pt x="4983063" y="1352773"/>
+                  <a:pt x="5006280" y="1361703"/>
+                  <a:pt x="5023097" y="1379562"/>
+                </a:cubicBezTo>
+                <a:cubicBezTo>
+                  <a:pt x="5039915" y="1397422"/>
+                  <a:pt x="5048324" y="1423094"/>
+                  <a:pt x="5048324" y="1456581"/>
+                </a:cubicBezTo>
+                <a:cubicBezTo>
+                  <a:pt x="5048324" y="1458813"/>
+                  <a:pt x="5048249" y="1461455"/>
+                  <a:pt x="5048100" y="1464506"/>
+                </a:cubicBezTo>
+                <a:cubicBezTo>
+                  <a:pt x="5047952" y="1467557"/>
+                  <a:pt x="5047728" y="1469752"/>
+                  <a:pt x="5047431" y="1471092"/>
+                </a:cubicBezTo>
+                <a:lnTo>
+                  <a:pt x="4892501" y="1471092"/>
+                </a:lnTo>
+                <a:cubicBezTo>
+                  <a:pt x="4892649" y="1485230"/>
+                  <a:pt x="4894919" y="1498215"/>
+                  <a:pt x="4899310" y="1510047"/>
+                </a:cubicBezTo>
+                <a:cubicBezTo>
+                  <a:pt x="4903700" y="1521879"/>
+                  <a:pt x="4910658" y="1531367"/>
+                  <a:pt x="4920183" y="1538511"/>
+                </a:cubicBezTo>
+                <a:cubicBezTo>
+                  <a:pt x="4929708" y="1545654"/>
+                  <a:pt x="4942284" y="1549226"/>
+                  <a:pt x="4957911" y="1549226"/>
+                </a:cubicBezTo>
+                <a:cubicBezTo>
+                  <a:pt x="4974579" y="1549226"/>
+                  <a:pt x="4987602" y="1545320"/>
+                  <a:pt x="4996978" y="1537506"/>
+                </a:cubicBezTo>
+                <a:cubicBezTo>
+                  <a:pt x="5006354" y="1529693"/>
+                  <a:pt x="5011266" y="1518419"/>
+                  <a:pt x="5011712" y="1503685"/>
+                </a:cubicBezTo>
+                <a:lnTo>
+                  <a:pt x="5048547" y="1503685"/>
+                </a:lnTo>
+                <a:cubicBezTo>
+                  <a:pt x="5048100" y="1519014"/>
+                  <a:pt x="5044157" y="1532223"/>
+                  <a:pt x="5036715" y="1543310"/>
+                </a:cubicBezTo>
+                <a:cubicBezTo>
+                  <a:pt x="5029274" y="1554398"/>
+                  <a:pt x="5018856" y="1562956"/>
+                  <a:pt x="5005461" y="1568983"/>
+                </a:cubicBezTo>
+                <a:cubicBezTo>
+                  <a:pt x="4992067" y="1575011"/>
+                  <a:pt x="4976216" y="1578025"/>
+                  <a:pt x="4957911" y="1578025"/>
+                </a:cubicBezTo>
+                <a:cubicBezTo>
+                  <a:pt x="4934247" y="1578025"/>
+                  <a:pt x="4914862" y="1573076"/>
+                  <a:pt x="4899756" y="1563179"/>
+                </a:cubicBezTo>
+                <a:cubicBezTo>
+                  <a:pt x="4884650" y="1553282"/>
+                  <a:pt x="4873451" y="1539813"/>
+                  <a:pt x="4866158" y="1522772"/>
+                </a:cubicBezTo>
+                <a:cubicBezTo>
+                  <a:pt x="4858866" y="1505731"/>
+                  <a:pt x="4855219" y="1486570"/>
+                  <a:pt x="4855219" y="1465287"/>
+                </a:cubicBezTo>
+                <a:cubicBezTo>
+                  <a:pt x="4855219" y="1443112"/>
+                  <a:pt x="4858754" y="1423578"/>
+                  <a:pt x="4865823" y="1406686"/>
+                </a:cubicBezTo>
+                <a:cubicBezTo>
+                  <a:pt x="4872893" y="1389794"/>
+                  <a:pt x="4883683" y="1376586"/>
+                  <a:pt x="4898193" y="1367061"/>
+                </a:cubicBezTo>
+                <a:cubicBezTo>
+                  <a:pt x="4912704" y="1357536"/>
+                  <a:pt x="4931122" y="1352773"/>
+                  <a:pt x="4953446" y="1352773"/>
+                </a:cubicBezTo>
+                <a:close/>
+                <a:moveTo>
+                  <a:pt x="4717776" y="1352773"/>
+                </a:moveTo>
+                <a:cubicBezTo>
+                  <a:pt x="4734594" y="1352773"/>
+                  <a:pt x="4749737" y="1355527"/>
+                  <a:pt x="4763206" y="1361033"/>
+                </a:cubicBezTo>
+                <a:cubicBezTo>
+                  <a:pt x="4776675" y="1366540"/>
+                  <a:pt x="4787428" y="1374837"/>
+                  <a:pt x="4795465" y="1385925"/>
+                </a:cubicBezTo>
+                <a:cubicBezTo>
+                  <a:pt x="4803501" y="1397012"/>
+                  <a:pt x="4807743" y="1411039"/>
+                  <a:pt x="4808190" y="1428006"/>
+                </a:cubicBezTo>
+                <a:lnTo>
+                  <a:pt x="4771355" y="1428006"/>
+                </a:lnTo>
+                <a:cubicBezTo>
+                  <a:pt x="4770462" y="1414016"/>
+                  <a:pt x="4765401" y="1403003"/>
+                  <a:pt x="4756174" y="1394966"/>
+                </a:cubicBezTo>
+                <a:cubicBezTo>
+                  <a:pt x="4746947" y="1386929"/>
+                  <a:pt x="4734371" y="1382911"/>
+                  <a:pt x="4718446" y="1382911"/>
+                </a:cubicBezTo>
+                <a:cubicBezTo>
+                  <a:pt x="4697313" y="1382911"/>
+                  <a:pt x="4681537" y="1390166"/>
+                  <a:pt x="4671119" y="1404677"/>
+                </a:cubicBezTo>
+                <a:cubicBezTo>
+                  <a:pt x="4660701" y="1419188"/>
+                  <a:pt x="4655492" y="1439540"/>
+                  <a:pt x="4655492" y="1465734"/>
+                </a:cubicBezTo>
+                <a:cubicBezTo>
+                  <a:pt x="4655492" y="1483147"/>
+                  <a:pt x="4657799" y="1497918"/>
+                  <a:pt x="4662412" y="1510047"/>
+                </a:cubicBezTo>
+                <a:cubicBezTo>
+                  <a:pt x="4667026" y="1522177"/>
+                  <a:pt x="4674021" y="1531479"/>
+                  <a:pt x="4683397" y="1537953"/>
+                </a:cubicBezTo>
+                <a:cubicBezTo>
+                  <a:pt x="4692773" y="1544427"/>
+                  <a:pt x="4704456" y="1547664"/>
+                  <a:pt x="4718446" y="1547664"/>
+                </a:cubicBezTo>
+                <a:cubicBezTo>
+                  <a:pt x="4734371" y="1547664"/>
+                  <a:pt x="4747319" y="1543534"/>
+                  <a:pt x="4757290" y="1535274"/>
+                </a:cubicBezTo>
+                <a:cubicBezTo>
+                  <a:pt x="4767262" y="1527014"/>
+                  <a:pt x="4772471" y="1514921"/>
+                  <a:pt x="4772917" y="1498997"/>
+                </a:cubicBezTo>
+                <a:lnTo>
+                  <a:pt x="4809752" y="1498997"/>
+                </a:lnTo>
+                <a:cubicBezTo>
+                  <a:pt x="4809306" y="1516559"/>
+                  <a:pt x="4805027" y="1531181"/>
+                  <a:pt x="4796916" y="1542864"/>
+                </a:cubicBezTo>
+                <a:cubicBezTo>
+                  <a:pt x="4788805" y="1554547"/>
+                  <a:pt x="4777866" y="1563291"/>
+                  <a:pt x="4764099" y="1569095"/>
+                </a:cubicBezTo>
+                <a:cubicBezTo>
+                  <a:pt x="4750333" y="1574899"/>
+                  <a:pt x="4734892" y="1577801"/>
+                  <a:pt x="4717776" y="1577801"/>
+                </a:cubicBezTo>
+                <a:cubicBezTo>
+                  <a:pt x="4698131" y="1577801"/>
+                  <a:pt x="4680718" y="1573671"/>
+                  <a:pt x="4665538" y="1565411"/>
+                </a:cubicBezTo>
+                <a:cubicBezTo>
+                  <a:pt x="4650357" y="1557151"/>
+                  <a:pt x="4638488" y="1544724"/>
+                  <a:pt x="4629931" y="1528130"/>
+                </a:cubicBezTo>
+                <a:cubicBezTo>
+                  <a:pt x="4621373" y="1511536"/>
+                  <a:pt x="4617094" y="1490737"/>
+                  <a:pt x="4617094" y="1465734"/>
+                </a:cubicBezTo>
+                <a:cubicBezTo>
+                  <a:pt x="4617094" y="1440731"/>
+                  <a:pt x="4621299" y="1419857"/>
+                  <a:pt x="4629707" y="1403114"/>
+                </a:cubicBezTo>
+                <a:cubicBezTo>
+                  <a:pt x="4638116" y="1386371"/>
+                  <a:pt x="4649874" y="1373795"/>
+                  <a:pt x="4664980" y="1365386"/>
+                </a:cubicBezTo>
+                <a:cubicBezTo>
+                  <a:pt x="4680086" y="1356978"/>
+                  <a:pt x="4697685" y="1352773"/>
+                  <a:pt x="4717776" y="1352773"/>
+                </a:cubicBezTo>
+                <a:close/>
+                <a:moveTo>
+                  <a:pt x="4229546" y="1352773"/>
+                </a:moveTo>
+                <a:cubicBezTo>
+                  <a:pt x="4259163" y="1352773"/>
+                  <a:pt x="4282380" y="1361703"/>
+                  <a:pt x="4299197" y="1379562"/>
+                </a:cubicBezTo>
+                <a:cubicBezTo>
+                  <a:pt x="4316015" y="1397422"/>
+                  <a:pt x="4324424" y="1423094"/>
+                  <a:pt x="4324424" y="1456581"/>
+                </a:cubicBezTo>
+                <a:cubicBezTo>
+                  <a:pt x="4324424" y="1458813"/>
+                  <a:pt x="4324349" y="1461455"/>
+                  <a:pt x="4324200" y="1464506"/>
+                </a:cubicBezTo>
+                <a:cubicBezTo>
+                  <a:pt x="4324052" y="1467557"/>
+                  <a:pt x="4323828" y="1469752"/>
+                  <a:pt x="4323531" y="1471092"/>
+                </a:cubicBezTo>
+                <a:lnTo>
+                  <a:pt x="4168601" y="1471092"/>
+                </a:lnTo>
+                <a:cubicBezTo>
+                  <a:pt x="4168749" y="1485230"/>
+                  <a:pt x="4171019" y="1498215"/>
+                  <a:pt x="4175410" y="1510047"/>
+                </a:cubicBezTo>
+                <a:cubicBezTo>
+                  <a:pt x="4179800" y="1521879"/>
+                  <a:pt x="4186758" y="1531367"/>
+                  <a:pt x="4196283" y="1538511"/>
+                </a:cubicBezTo>
+                <a:cubicBezTo>
+                  <a:pt x="4205808" y="1545654"/>
+                  <a:pt x="4218384" y="1549226"/>
+                  <a:pt x="4234011" y="1549226"/>
+                </a:cubicBezTo>
+                <a:cubicBezTo>
+                  <a:pt x="4250679" y="1549226"/>
+                  <a:pt x="4263702" y="1545320"/>
+                  <a:pt x="4273078" y="1537506"/>
+                </a:cubicBezTo>
+                <a:cubicBezTo>
+                  <a:pt x="4282454" y="1529693"/>
+                  <a:pt x="4287366" y="1518419"/>
+                  <a:pt x="4287812" y="1503685"/>
+                </a:cubicBezTo>
+                <a:lnTo>
+                  <a:pt x="4324647" y="1503685"/>
+                </a:lnTo>
+                <a:cubicBezTo>
+                  <a:pt x="4324200" y="1519014"/>
+                  <a:pt x="4320257" y="1532223"/>
+                  <a:pt x="4312815" y="1543310"/>
+                </a:cubicBezTo>
+                <a:cubicBezTo>
+                  <a:pt x="4305374" y="1554398"/>
+                  <a:pt x="4294956" y="1562956"/>
+                  <a:pt x="4281561" y="1568983"/>
+                </a:cubicBezTo>
+                <a:cubicBezTo>
+                  <a:pt x="4268167" y="1575011"/>
+                  <a:pt x="4252316" y="1578025"/>
+                  <a:pt x="4234011" y="1578025"/>
+                </a:cubicBezTo>
+                <a:cubicBezTo>
+                  <a:pt x="4210347" y="1578025"/>
+                  <a:pt x="4190962" y="1573076"/>
+                  <a:pt x="4175856" y="1563179"/>
+                </a:cubicBezTo>
+                <a:cubicBezTo>
+                  <a:pt x="4160750" y="1553282"/>
+                  <a:pt x="4149551" y="1539813"/>
+                  <a:pt x="4142258" y="1522772"/>
+                </a:cubicBezTo>
+                <a:cubicBezTo>
+                  <a:pt x="4134966" y="1505731"/>
+                  <a:pt x="4131320" y="1486570"/>
+                  <a:pt x="4131320" y="1465287"/>
+                </a:cubicBezTo>
+                <a:cubicBezTo>
+                  <a:pt x="4131320" y="1443112"/>
+                  <a:pt x="4134854" y="1423578"/>
+                  <a:pt x="4141924" y="1406686"/>
+                </a:cubicBezTo>
+                <a:cubicBezTo>
+                  <a:pt x="4148993" y="1389794"/>
+                  <a:pt x="4159783" y="1376586"/>
+                  <a:pt x="4174293" y="1367061"/>
+                </a:cubicBezTo>
+                <a:cubicBezTo>
+                  <a:pt x="4188804" y="1357536"/>
+                  <a:pt x="4207222" y="1352773"/>
+                  <a:pt x="4229546" y="1352773"/>
+                </a:cubicBezTo>
+                <a:close/>
+                <a:moveTo>
+                  <a:pt x="3734246" y="1352773"/>
+                </a:moveTo>
+                <a:cubicBezTo>
+                  <a:pt x="3763863" y="1352773"/>
+                  <a:pt x="3787080" y="1361703"/>
+                  <a:pt x="3803898" y="1379562"/>
+                </a:cubicBezTo>
+                <a:cubicBezTo>
+                  <a:pt x="3820715" y="1397422"/>
+                  <a:pt x="3829124" y="1423094"/>
+                  <a:pt x="3829124" y="1456581"/>
+                </a:cubicBezTo>
+                <a:cubicBezTo>
+                  <a:pt x="3829124" y="1458813"/>
+                  <a:pt x="3829050" y="1461455"/>
+                  <a:pt x="3828901" y="1464506"/>
+                </a:cubicBezTo>
+                <a:cubicBezTo>
+                  <a:pt x="3828752" y="1467557"/>
+                  <a:pt x="3828529" y="1469752"/>
+                  <a:pt x="3828231" y="1471092"/>
+                </a:cubicBezTo>
+                <a:lnTo>
+                  <a:pt x="3673301" y="1471092"/>
+                </a:lnTo>
+                <a:cubicBezTo>
+                  <a:pt x="3673450" y="1485230"/>
+                  <a:pt x="3675719" y="1498215"/>
+                  <a:pt x="3680110" y="1510047"/>
+                </a:cubicBezTo>
+                <a:cubicBezTo>
+                  <a:pt x="3684500" y="1521879"/>
+                  <a:pt x="3691458" y="1531367"/>
+                  <a:pt x="3700983" y="1538511"/>
+                </a:cubicBezTo>
+                <a:cubicBezTo>
+                  <a:pt x="3710508" y="1545654"/>
+                  <a:pt x="3723084" y="1549226"/>
+                  <a:pt x="3738711" y="1549226"/>
+                </a:cubicBezTo>
+                <a:cubicBezTo>
+                  <a:pt x="3755380" y="1549226"/>
+                  <a:pt x="3768402" y="1545320"/>
+                  <a:pt x="3777778" y="1537506"/>
+                </a:cubicBezTo>
+                <a:cubicBezTo>
+                  <a:pt x="3787154" y="1529693"/>
+                  <a:pt x="3792066" y="1518419"/>
+                  <a:pt x="3792512" y="1503685"/>
+                </a:cubicBezTo>
+                <a:lnTo>
+                  <a:pt x="3829347" y="1503685"/>
+                </a:lnTo>
+                <a:cubicBezTo>
+                  <a:pt x="3828901" y="1519014"/>
+                  <a:pt x="3824957" y="1532223"/>
+                  <a:pt x="3817515" y="1543310"/>
+                </a:cubicBezTo>
+                <a:cubicBezTo>
+                  <a:pt x="3810074" y="1554398"/>
+                  <a:pt x="3799656" y="1562956"/>
+                  <a:pt x="3786262" y="1568983"/>
+                </a:cubicBezTo>
+                <a:cubicBezTo>
+                  <a:pt x="3772867" y="1575011"/>
+                  <a:pt x="3757017" y="1578025"/>
+                  <a:pt x="3738711" y="1578025"/>
+                </a:cubicBezTo>
+                <a:cubicBezTo>
+                  <a:pt x="3715047" y="1578025"/>
+                  <a:pt x="3695662" y="1573076"/>
+                  <a:pt x="3680556" y="1563179"/>
+                </a:cubicBezTo>
+                <a:cubicBezTo>
+                  <a:pt x="3665450" y="1553282"/>
+                  <a:pt x="3654251" y="1539813"/>
+                  <a:pt x="3646958" y="1522772"/>
+                </a:cubicBezTo>
+                <a:cubicBezTo>
+                  <a:pt x="3639666" y="1505731"/>
+                  <a:pt x="3636020" y="1486570"/>
+                  <a:pt x="3636020" y="1465287"/>
+                </a:cubicBezTo>
+                <a:cubicBezTo>
+                  <a:pt x="3636020" y="1443112"/>
+                  <a:pt x="3639554" y="1423578"/>
+                  <a:pt x="3646624" y="1406686"/>
+                </a:cubicBezTo>
+                <a:cubicBezTo>
+                  <a:pt x="3653693" y="1389794"/>
+                  <a:pt x="3664483" y="1376586"/>
+                  <a:pt x="3678994" y="1367061"/>
+                </a:cubicBezTo>
+                <a:cubicBezTo>
+                  <a:pt x="3693504" y="1357536"/>
+                  <a:pt x="3711922" y="1352773"/>
+                  <a:pt x="3734246" y="1352773"/>
+                </a:cubicBezTo>
+                <a:close/>
+                <a:moveTo>
+                  <a:pt x="3501181" y="1352773"/>
+                </a:moveTo>
+                <a:cubicBezTo>
+                  <a:pt x="3519041" y="1352773"/>
+                  <a:pt x="3534444" y="1356978"/>
+                  <a:pt x="3547392" y="1365386"/>
+                </a:cubicBezTo>
+                <a:cubicBezTo>
+                  <a:pt x="3560340" y="1373795"/>
+                  <a:pt x="3570349" y="1386334"/>
+                  <a:pt x="3577418" y="1403003"/>
+                </a:cubicBezTo>
+                <a:cubicBezTo>
+                  <a:pt x="3584488" y="1419671"/>
+                  <a:pt x="3588022" y="1440433"/>
+                  <a:pt x="3588022" y="1465287"/>
+                </a:cubicBezTo>
+                <a:cubicBezTo>
+                  <a:pt x="3588022" y="1489844"/>
+                  <a:pt x="3584265" y="1510494"/>
+                  <a:pt x="3576749" y="1527237"/>
+                </a:cubicBezTo>
+                <a:cubicBezTo>
+                  <a:pt x="3569233" y="1543980"/>
+                  <a:pt x="3558629" y="1556631"/>
+                  <a:pt x="3544937" y="1565188"/>
+                </a:cubicBezTo>
+                <a:cubicBezTo>
+                  <a:pt x="3531245" y="1573746"/>
+                  <a:pt x="3515171" y="1578025"/>
+                  <a:pt x="3496716" y="1578025"/>
+                </a:cubicBezTo>
+                <a:cubicBezTo>
+                  <a:pt x="3481238" y="1578025"/>
+                  <a:pt x="3467695" y="1574936"/>
+                  <a:pt x="3456086" y="1568760"/>
+                </a:cubicBezTo>
+                <a:cubicBezTo>
+                  <a:pt x="3444478" y="1562584"/>
+                  <a:pt x="3435176" y="1554138"/>
+                  <a:pt x="3428181" y="1543422"/>
+                </a:cubicBezTo>
+                <a:lnTo>
+                  <a:pt x="3428181" y="1653927"/>
+                </a:lnTo>
+                <a:lnTo>
+                  <a:pt x="3391123" y="1653927"/>
+                </a:lnTo>
+                <a:lnTo>
+                  <a:pt x="3391123" y="1356568"/>
+                </a:lnTo>
+                <a:lnTo>
+                  <a:pt x="3427288" y="1356568"/>
+                </a:lnTo>
+                <a:lnTo>
+                  <a:pt x="3428404" y="1392064"/>
+                </a:lnTo>
+                <a:cubicBezTo>
+                  <a:pt x="3436143" y="1380455"/>
+                  <a:pt x="3446152" y="1371005"/>
+                  <a:pt x="3458430" y="1363712"/>
+                </a:cubicBezTo>
+                <a:cubicBezTo>
+                  <a:pt x="3470709" y="1356419"/>
+                  <a:pt x="3484959" y="1352773"/>
+                  <a:pt x="3501181" y="1352773"/>
+                </a:cubicBezTo>
+                <a:close/>
+                <a:moveTo>
+                  <a:pt x="2605980" y="1307009"/>
+                </a:moveTo>
+                <a:lnTo>
+                  <a:pt x="2605980" y="1413272"/>
+                </a:lnTo>
+                <a:lnTo>
+                  <a:pt x="2674292" y="1413272"/>
+                </a:lnTo>
+                <a:cubicBezTo>
+                  <a:pt x="2685305" y="1413272"/>
+                  <a:pt x="2695277" y="1411188"/>
+                  <a:pt x="2704206" y="1407021"/>
+                </a:cubicBezTo>
+                <a:cubicBezTo>
+                  <a:pt x="2713136" y="1402854"/>
+                  <a:pt x="2720243" y="1396826"/>
+                  <a:pt x="2725526" y="1388938"/>
+                </a:cubicBezTo>
+                <a:cubicBezTo>
+                  <a:pt x="2730810" y="1381051"/>
+                  <a:pt x="2733451" y="1371526"/>
+                  <a:pt x="2733451" y="1360363"/>
+                </a:cubicBezTo>
+                <a:cubicBezTo>
+                  <a:pt x="2733451" y="1343546"/>
+                  <a:pt x="2728503" y="1330449"/>
+                  <a:pt x="2718606" y="1321073"/>
+                </a:cubicBezTo>
+                <a:cubicBezTo>
+                  <a:pt x="2708709" y="1311697"/>
+                  <a:pt x="2694309" y="1307009"/>
+                  <a:pt x="2675408" y="1307009"/>
+                </a:cubicBezTo>
+                <a:close/>
+                <a:moveTo>
+                  <a:pt x="2937271" y="1273522"/>
+                </a:moveTo>
+                <a:lnTo>
+                  <a:pt x="3129036" y="1273522"/>
+                </a:lnTo>
+                <a:lnTo>
+                  <a:pt x="3129036" y="1307009"/>
+                </a:lnTo>
+                <a:lnTo>
+                  <a:pt x="2977455" y="1307009"/>
+                </a:lnTo>
+                <a:lnTo>
+                  <a:pt x="2977455" y="1402779"/>
+                </a:lnTo>
+                <a:lnTo>
+                  <a:pt x="3116981" y="1402779"/>
+                </a:lnTo>
+                <a:lnTo>
+                  <a:pt x="3116981" y="1435819"/>
+                </a:lnTo>
+                <a:lnTo>
+                  <a:pt x="2977455" y="1435819"/>
+                </a:lnTo>
+                <a:lnTo>
+                  <a:pt x="2977455" y="1540520"/>
+                </a:lnTo>
+                <a:lnTo>
+                  <a:pt x="3129036" y="1540520"/>
+                </a:lnTo>
+                <a:lnTo>
+                  <a:pt x="3129036" y="1574006"/>
+                </a:lnTo>
+                <a:lnTo>
+                  <a:pt x="2937271" y="1574006"/>
+                </a:lnTo>
+                <a:close/>
+                <a:moveTo>
+                  <a:pt x="2565796" y="1273522"/>
+                </a:moveTo>
+                <a:lnTo>
+                  <a:pt x="2679427" y="1273522"/>
+                </a:lnTo>
+                <a:cubicBezTo>
+                  <a:pt x="2696840" y="1273522"/>
+                  <a:pt x="2712652" y="1276276"/>
+                  <a:pt x="2726866" y="1281782"/>
+                </a:cubicBezTo>
+                <a:cubicBezTo>
+                  <a:pt x="2741079" y="1287289"/>
+                  <a:pt x="2752427" y="1295921"/>
+                  <a:pt x="2760910" y="1307678"/>
+                </a:cubicBezTo>
+                <a:cubicBezTo>
+                  <a:pt x="2769393" y="1319436"/>
+                  <a:pt x="2773635" y="1334691"/>
+                  <a:pt x="2773635" y="1353443"/>
+                </a:cubicBezTo>
+                <a:cubicBezTo>
+                  <a:pt x="2773635" y="1372493"/>
+                  <a:pt x="2768314" y="1388715"/>
+                  <a:pt x="2757673" y="1402110"/>
+                </a:cubicBezTo>
+                <a:cubicBezTo>
+                  <a:pt x="2747032" y="1415504"/>
+                  <a:pt x="2731442" y="1424583"/>
+                  <a:pt x="2710904" y="1429345"/>
+                </a:cubicBezTo>
+                <a:cubicBezTo>
+                  <a:pt x="2722215" y="1430982"/>
+                  <a:pt x="2731516" y="1434629"/>
+                  <a:pt x="2738809" y="1440284"/>
+                </a:cubicBezTo>
+                <a:cubicBezTo>
+                  <a:pt x="2746102" y="1445940"/>
+                  <a:pt x="2752166" y="1453567"/>
+                  <a:pt x="2757003" y="1463166"/>
+                </a:cubicBezTo>
+                <a:cubicBezTo>
+                  <a:pt x="2761840" y="1472766"/>
+                  <a:pt x="2766045" y="1484635"/>
+                  <a:pt x="2769616" y="1498774"/>
+                </a:cubicBezTo>
+                <a:lnTo>
+                  <a:pt x="2789262" y="1574006"/>
+                </a:lnTo>
+                <a:lnTo>
+                  <a:pt x="2748185" y="1574006"/>
+                </a:lnTo>
+                <a:lnTo>
+                  <a:pt x="2730996" y="1505024"/>
+                </a:lnTo>
+                <a:cubicBezTo>
+                  <a:pt x="2728019" y="1492672"/>
+                  <a:pt x="2724484" y="1482142"/>
+                  <a:pt x="2720392" y="1473436"/>
+                </a:cubicBezTo>
+                <a:cubicBezTo>
+                  <a:pt x="2716299" y="1464729"/>
+                  <a:pt x="2710829" y="1458106"/>
+                  <a:pt x="2703983" y="1453567"/>
+                </a:cubicBezTo>
+                <a:cubicBezTo>
+                  <a:pt x="2697137" y="1449028"/>
+                  <a:pt x="2687984" y="1446758"/>
+                  <a:pt x="2676524" y="1446758"/>
+                </a:cubicBezTo>
+                <a:lnTo>
+                  <a:pt x="2605980" y="1446758"/>
+                </a:lnTo>
+                <a:lnTo>
+                  <a:pt x="2605980" y="1574006"/>
+                </a:lnTo>
+                <a:lnTo>
+                  <a:pt x="2565796" y="1574006"/>
+                </a:lnTo>
+                <a:close/>
+                <a:moveTo>
+                  <a:pt x="2261592" y="1273522"/>
+                </a:moveTo>
+                <a:lnTo>
+                  <a:pt x="2304231" y="1273522"/>
+                </a:lnTo>
+                <a:lnTo>
+                  <a:pt x="2393528" y="1531590"/>
+                </a:lnTo>
+                <a:lnTo>
+                  <a:pt x="2483271" y="1273522"/>
+                </a:lnTo>
+                <a:lnTo>
+                  <a:pt x="2525687" y="1273522"/>
+                </a:lnTo>
+                <a:lnTo>
+                  <a:pt x="2416522" y="1574006"/>
+                </a:lnTo>
+                <a:lnTo>
+                  <a:pt x="2369641" y="1574006"/>
+                </a:lnTo>
+                <a:close/>
+                <a:moveTo>
+                  <a:pt x="4057352" y="1272406"/>
+                </a:moveTo>
+                <a:cubicBezTo>
+                  <a:pt x="4064347" y="1272406"/>
+                  <a:pt x="4070002" y="1274452"/>
+                  <a:pt x="4074318" y="1278545"/>
+                </a:cubicBezTo>
+                <a:cubicBezTo>
+                  <a:pt x="4078634" y="1282638"/>
+                  <a:pt x="4080792" y="1287810"/>
+                  <a:pt x="4080792" y="1294061"/>
+                </a:cubicBezTo>
+                <a:cubicBezTo>
+                  <a:pt x="4080792" y="1300311"/>
+                  <a:pt x="4078634" y="1305483"/>
+                  <a:pt x="4074318" y="1309576"/>
+                </a:cubicBezTo>
+                <a:cubicBezTo>
+                  <a:pt x="4070002" y="1313669"/>
+                  <a:pt x="4064347" y="1315715"/>
+                  <a:pt x="4057352" y="1315715"/>
+                </a:cubicBezTo>
+                <a:cubicBezTo>
+                  <a:pt x="4050357" y="1315715"/>
+                  <a:pt x="4044739" y="1313669"/>
+                  <a:pt x="4040497" y="1309576"/>
+                </a:cubicBezTo>
+                <a:cubicBezTo>
+                  <a:pt x="4036256" y="1305483"/>
+                  <a:pt x="4034135" y="1300311"/>
+                  <a:pt x="4034135" y="1294061"/>
+                </a:cubicBezTo>
+                <a:cubicBezTo>
+                  <a:pt x="4034135" y="1287810"/>
+                  <a:pt x="4036256" y="1282638"/>
+                  <a:pt x="4040497" y="1278545"/>
+                </a:cubicBezTo>
+                <a:cubicBezTo>
+                  <a:pt x="4044739" y="1274452"/>
+                  <a:pt x="4050357" y="1272406"/>
+                  <a:pt x="4057352" y="1272406"/>
+                </a:cubicBezTo>
+                <a:close/>
+                <a:moveTo>
+                  <a:pt x="5861446" y="529828"/>
+                </a:moveTo>
+                <a:cubicBezTo>
+                  <a:pt x="5755878" y="531019"/>
+                  <a:pt x="5680174" y="540941"/>
+                  <a:pt x="5634334" y="559594"/>
+                </a:cubicBezTo>
+                <a:cubicBezTo>
+                  <a:pt x="5588495" y="578247"/>
+                  <a:pt x="5565576" y="608806"/>
+                  <a:pt x="5565576" y="651272"/>
+                </a:cubicBezTo>
+                <a:cubicBezTo>
+                  <a:pt x="5565576" y="680244"/>
+                  <a:pt x="5574803" y="703362"/>
+                  <a:pt x="5593258" y="720626"/>
+                </a:cubicBezTo>
+                <a:cubicBezTo>
+                  <a:pt x="5611713" y="737890"/>
+                  <a:pt x="5638799" y="746522"/>
+                  <a:pt x="5674518" y="746522"/>
+                </a:cubicBezTo>
+                <a:cubicBezTo>
+                  <a:pt x="5714206" y="746522"/>
+                  <a:pt x="5749924" y="737195"/>
+                  <a:pt x="5781674" y="718542"/>
+                </a:cubicBezTo>
+                <a:cubicBezTo>
+                  <a:pt x="5813424" y="699889"/>
+                  <a:pt x="5840015" y="676275"/>
+                  <a:pt x="5861446" y="647700"/>
+                </a:cubicBezTo>
+                <a:close/>
+                <a:moveTo>
+                  <a:pt x="1784746" y="529828"/>
+                </a:moveTo>
+                <a:cubicBezTo>
+                  <a:pt x="1679178" y="531019"/>
+                  <a:pt x="1603474" y="540941"/>
+                  <a:pt x="1557635" y="559594"/>
+                </a:cubicBezTo>
+                <a:cubicBezTo>
+                  <a:pt x="1511795" y="578247"/>
+                  <a:pt x="1488876" y="608806"/>
+                  <a:pt x="1488876" y="651272"/>
+                </a:cubicBezTo>
+                <a:cubicBezTo>
+                  <a:pt x="1488876" y="680244"/>
+                  <a:pt x="1498103" y="703362"/>
+                  <a:pt x="1516558" y="720626"/>
+                </a:cubicBezTo>
+                <a:cubicBezTo>
+                  <a:pt x="1535013" y="737890"/>
+                  <a:pt x="1562100" y="746522"/>
+                  <a:pt x="1597818" y="746522"/>
+                </a:cubicBezTo>
+                <a:cubicBezTo>
+                  <a:pt x="1637506" y="746522"/>
+                  <a:pt x="1673225" y="737195"/>
+                  <a:pt x="1704975" y="718542"/>
+                </a:cubicBezTo>
+                <a:cubicBezTo>
+                  <a:pt x="1736725" y="699889"/>
+                  <a:pt x="1763315" y="676275"/>
+                  <a:pt x="1784746" y="647700"/>
+                </a:cubicBezTo>
+                <a:close/>
+                <a:moveTo>
+                  <a:pt x="6421635" y="302419"/>
+                </a:moveTo>
+                <a:cubicBezTo>
+                  <a:pt x="6379170" y="302419"/>
+                  <a:pt x="6343352" y="313730"/>
+                  <a:pt x="6314181" y="336351"/>
+                </a:cubicBezTo>
+                <a:cubicBezTo>
+                  <a:pt x="6285011" y="358973"/>
+                  <a:pt x="6262290" y="385366"/>
+                  <a:pt x="6246018" y="415528"/>
+                </a:cubicBezTo>
+                <a:lnTo>
+                  <a:pt x="6246018" y="639366"/>
+                </a:lnTo>
+                <a:cubicBezTo>
+                  <a:pt x="6261893" y="669528"/>
+                  <a:pt x="6283324" y="694035"/>
+                  <a:pt x="6310312" y="712887"/>
+                </a:cubicBezTo>
+                <a:cubicBezTo>
+                  <a:pt x="6337299" y="731738"/>
+                  <a:pt x="6370438" y="741164"/>
+                  <a:pt x="6409728" y="741164"/>
+                </a:cubicBezTo>
+                <a:cubicBezTo>
+                  <a:pt x="6462514" y="741164"/>
+                  <a:pt x="6502300" y="722213"/>
+                  <a:pt x="6529089" y="684312"/>
+                </a:cubicBezTo>
+                <a:cubicBezTo>
+                  <a:pt x="6555878" y="646410"/>
+                  <a:pt x="6569272" y="592336"/>
+                  <a:pt x="6569272" y="522089"/>
+                </a:cubicBezTo>
+                <a:cubicBezTo>
+                  <a:pt x="6569272" y="451048"/>
+                  <a:pt x="6556771" y="396677"/>
+                  <a:pt x="6531768" y="358973"/>
+                </a:cubicBezTo>
+                <a:cubicBezTo>
+                  <a:pt x="6506764" y="321270"/>
+                  <a:pt x="6470054" y="302419"/>
+                  <a:pt x="6421635" y="302419"/>
+                </a:cubicBezTo>
+                <a:close/>
+                <a:moveTo>
+                  <a:pt x="1011436" y="302419"/>
+                </a:moveTo>
+                <a:cubicBezTo>
+                  <a:pt x="968970" y="302419"/>
+                  <a:pt x="933152" y="313730"/>
+                  <a:pt x="903982" y="336351"/>
+                </a:cubicBezTo>
+                <a:cubicBezTo>
+                  <a:pt x="874811" y="358973"/>
+                  <a:pt x="852090" y="385366"/>
+                  <a:pt x="835818" y="415528"/>
+                </a:cubicBezTo>
+                <a:lnTo>
+                  <a:pt x="835818" y="639366"/>
+                </a:lnTo>
+                <a:cubicBezTo>
+                  <a:pt x="851693" y="669528"/>
+                  <a:pt x="873125" y="694035"/>
+                  <a:pt x="900112" y="712887"/>
+                </a:cubicBezTo>
+                <a:cubicBezTo>
+                  <a:pt x="927100" y="731738"/>
+                  <a:pt x="960239" y="741164"/>
+                  <a:pt x="999529" y="741164"/>
+                </a:cubicBezTo>
+                <a:cubicBezTo>
+                  <a:pt x="1052313" y="741164"/>
+                  <a:pt x="1092100" y="722213"/>
+                  <a:pt x="1118889" y="684312"/>
+                </a:cubicBezTo>
+                <a:cubicBezTo>
+                  <a:pt x="1145679" y="646410"/>
+                  <a:pt x="1159073" y="592336"/>
+                  <a:pt x="1159073" y="522089"/>
+                </a:cubicBezTo>
+                <a:cubicBezTo>
+                  <a:pt x="1159073" y="451048"/>
+                  <a:pt x="1146572" y="396677"/>
+                  <a:pt x="1121568" y="358973"/>
+                </a:cubicBezTo>
+                <a:cubicBezTo>
+                  <a:pt x="1096565" y="321270"/>
+                  <a:pt x="1059854" y="302419"/>
+                  <a:pt x="1011436" y="302419"/>
+                </a:cubicBezTo>
+                <a:close/>
+                <a:moveTo>
+                  <a:pt x="7061596" y="298251"/>
+                </a:moveTo>
+                <a:cubicBezTo>
+                  <a:pt x="7013178" y="298251"/>
+                  <a:pt x="6975176" y="312440"/>
+                  <a:pt x="6947594" y="340816"/>
+                </a:cubicBezTo>
+                <a:cubicBezTo>
+                  <a:pt x="6920011" y="369193"/>
+                  <a:pt x="6904036" y="410567"/>
+                  <a:pt x="6899671" y="464939"/>
+                </a:cubicBezTo>
+                <a:lnTo>
+                  <a:pt x="7216377" y="464939"/>
+                </a:lnTo>
+                <a:cubicBezTo>
+                  <a:pt x="7215186" y="410964"/>
+                  <a:pt x="7201098" y="369689"/>
+                  <a:pt x="7174110" y="341114"/>
+                </a:cubicBezTo>
+                <a:cubicBezTo>
+                  <a:pt x="7147122" y="312539"/>
+                  <a:pt x="7109618" y="298251"/>
+                  <a:pt x="7061596" y="298251"/>
+                </a:cubicBezTo>
+                <a:close/>
+                <a:moveTo>
+                  <a:pt x="2937271" y="298251"/>
+                </a:moveTo>
+                <a:cubicBezTo>
+                  <a:pt x="2888853" y="298251"/>
+                  <a:pt x="2850852" y="312440"/>
+                  <a:pt x="2823269" y="340816"/>
+                </a:cubicBezTo>
+                <a:cubicBezTo>
+                  <a:pt x="2795686" y="369193"/>
+                  <a:pt x="2779712" y="410567"/>
+                  <a:pt x="2775346" y="464939"/>
+                </a:cubicBezTo>
+                <a:lnTo>
+                  <a:pt x="3092053" y="464939"/>
+                </a:lnTo>
+                <a:cubicBezTo>
+                  <a:pt x="3090862" y="410964"/>
+                  <a:pt x="3076773" y="369689"/>
+                  <a:pt x="3049785" y="341114"/>
+                </a:cubicBezTo>
+                <a:cubicBezTo>
+                  <a:pt x="3022798" y="312539"/>
+                  <a:pt x="2985293" y="298251"/>
+                  <a:pt x="2937271" y="298251"/>
+                </a:cubicBezTo>
+                <a:close/>
+                <a:moveTo>
+                  <a:pt x="7061596" y="222051"/>
+                </a:moveTo>
+                <a:cubicBezTo>
+                  <a:pt x="7140574" y="222051"/>
+                  <a:pt x="7202486" y="245864"/>
+                  <a:pt x="7247334" y="293489"/>
+                </a:cubicBezTo>
+                <a:cubicBezTo>
+                  <a:pt x="7292180" y="341114"/>
+                  <a:pt x="7314604" y="409575"/>
+                  <a:pt x="7314604" y="498872"/>
+                </a:cubicBezTo>
+                <a:cubicBezTo>
+                  <a:pt x="7314604" y="504825"/>
+                  <a:pt x="7314406" y="511869"/>
+                  <a:pt x="7314008" y="520005"/>
+                </a:cubicBezTo>
+                <a:cubicBezTo>
+                  <a:pt x="7313612" y="528141"/>
+                  <a:pt x="7313016" y="533995"/>
+                  <a:pt x="7312222" y="537567"/>
+                </a:cubicBezTo>
+                <a:lnTo>
+                  <a:pt x="6899076" y="537567"/>
+                </a:lnTo>
+                <a:cubicBezTo>
+                  <a:pt x="6899472" y="575270"/>
+                  <a:pt x="6905524" y="609898"/>
+                  <a:pt x="6917232" y="641449"/>
+                </a:cubicBezTo>
+                <a:cubicBezTo>
+                  <a:pt x="6928940" y="673001"/>
+                  <a:pt x="6947494" y="698302"/>
+                  <a:pt x="6972894" y="717352"/>
+                </a:cubicBezTo>
+                <a:cubicBezTo>
+                  <a:pt x="6998294" y="736402"/>
+                  <a:pt x="7031830" y="745927"/>
+                  <a:pt x="7073502" y="745927"/>
+                </a:cubicBezTo>
+                <a:cubicBezTo>
+                  <a:pt x="7117952" y="745927"/>
+                  <a:pt x="7152678" y="735509"/>
+                  <a:pt x="7177682" y="714673"/>
+                </a:cubicBezTo>
+                <a:cubicBezTo>
+                  <a:pt x="7202685" y="693837"/>
+                  <a:pt x="7215782" y="663773"/>
+                  <a:pt x="7216972" y="624483"/>
+                </a:cubicBezTo>
+                <a:lnTo>
+                  <a:pt x="7315199" y="624483"/>
+                </a:lnTo>
+                <a:cubicBezTo>
+                  <a:pt x="7314008" y="665361"/>
+                  <a:pt x="7303491" y="700584"/>
+                  <a:pt x="7283648" y="730151"/>
+                </a:cubicBezTo>
+                <a:cubicBezTo>
+                  <a:pt x="7263804" y="759718"/>
+                  <a:pt x="7236022" y="782538"/>
+                  <a:pt x="7200304" y="798612"/>
+                </a:cubicBezTo>
+                <a:cubicBezTo>
+                  <a:pt x="7164585" y="814685"/>
+                  <a:pt x="7122318" y="822722"/>
+                  <a:pt x="7073502" y="822722"/>
+                </a:cubicBezTo>
+                <a:cubicBezTo>
+                  <a:pt x="7010399" y="822722"/>
+                  <a:pt x="6958706" y="809526"/>
+                  <a:pt x="6918424" y="783134"/>
+                </a:cubicBezTo>
+                <a:cubicBezTo>
+                  <a:pt x="6878140" y="756741"/>
+                  <a:pt x="6848276" y="720824"/>
+                  <a:pt x="6828828" y="675382"/>
+                </a:cubicBezTo>
+                <a:cubicBezTo>
+                  <a:pt x="6809382" y="629940"/>
+                  <a:pt x="6799658" y="578842"/>
+                  <a:pt x="6799658" y="522089"/>
+                </a:cubicBezTo>
+                <a:cubicBezTo>
+                  <a:pt x="6799658" y="462955"/>
+                  <a:pt x="6809084" y="410865"/>
+                  <a:pt x="6827936" y="365819"/>
+                </a:cubicBezTo>
+                <a:cubicBezTo>
+                  <a:pt x="6846788" y="320774"/>
+                  <a:pt x="6875561" y="285552"/>
+                  <a:pt x="6914256" y="260151"/>
+                </a:cubicBezTo>
+                <a:cubicBezTo>
+                  <a:pt x="6952952" y="234751"/>
+                  <a:pt x="7002064" y="222051"/>
+                  <a:pt x="7061596" y="222051"/>
+                </a:cubicBezTo>
+                <a:close/>
+                <a:moveTo>
+                  <a:pt x="6440090" y="222051"/>
+                </a:moveTo>
+                <a:cubicBezTo>
+                  <a:pt x="6487714" y="222051"/>
+                  <a:pt x="6528791" y="233263"/>
+                  <a:pt x="6563320" y="255687"/>
+                </a:cubicBezTo>
+                <a:cubicBezTo>
+                  <a:pt x="6597848" y="278110"/>
+                  <a:pt x="6624537" y="311547"/>
+                  <a:pt x="6643389" y="355997"/>
+                </a:cubicBezTo>
+                <a:cubicBezTo>
+                  <a:pt x="6662240" y="400447"/>
+                  <a:pt x="6671666" y="455811"/>
+                  <a:pt x="6671666" y="522089"/>
+                </a:cubicBezTo>
+                <a:cubicBezTo>
+                  <a:pt x="6671666" y="587573"/>
+                  <a:pt x="6661646" y="642640"/>
+                  <a:pt x="6641603" y="687288"/>
+                </a:cubicBezTo>
+                <a:cubicBezTo>
+                  <a:pt x="6621560" y="731937"/>
+                  <a:pt x="6593283" y="765671"/>
+                  <a:pt x="6556771" y="788491"/>
+                </a:cubicBezTo>
+                <a:cubicBezTo>
+                  <a:pt x="6520258" y="811312"/>
+                  <a:pt x="6477396" y="822722"/>
+                  <a:pt x="6428184" y="822722"/>
+                </a:cubicBezTo>
+                <a:cubicBezTo>
+                  <a:pt x="6386908" y="822722"/>
+                  <a:pt x="6350793" y="814487"/>
+                  <a:pt x="6319836" y="798016"/>
+                </a:cubicBezTo>
+                <a:cubicBezTo>
+                  <a:pt x="6288880" y="781546"/>
+                  <a:pt x="6264076" y="759023"/>
+                  <a:pt x="6245422" y="730448"/>
+                </a:cubicBezTo>
+                <a:lnTo>
+                  <a:pt x="6245422" y="1025128"/>
+                </a:lnTo>
+                <a:lnTo>
+                  <a:pt x="6146600" y="1025128"/>
+                </a:lnTo>
+                <a:lnTo>
+                  <a:pt x="6146600" y="232172"/>
+                </a:lnTo>
+                <a:lnTo>
+                  <a:pt x="6243041" y="232172"/>
+                </a:lnTo>
+                <a:lnTo>
+                  <a:pt x="6246018" y="326826"/>
+                </a:lnTo>
+                <a:cubicBezTo>
+                  <a:pt x="6266656" y="295870"/>
+                  <a:pt x="6293345" y="270669"/>
+                  <a:pt x="6326088" y="251222"/>
+                </a:cubicBezTo>
+                <a:cubicBezTo>
+                  <a:pt x="6358830" y="231775"/>
+                  <a:pt x="6396830" y="222051"/>
+                  <a:pt x="6440090" y="222051"/>
+                </a:cubicBezTo>
+                <a:close/>
+                <a:moveTo>
+                  <a:pt x="5731668" y="222051"/>
+                </a:moveTo>
+                <a:cubicBezTo>
+                  <a:pt x="5761434" y="222051"/>
+                  <a:pt x="5789909" y="224830"/>
+                  <a:pt x="5817095" y="230386"/>
+                </a:cubicBezTo>
+                <a:cubicBezTo>
+                  <a:pt x="5844282" y="235942"/>
+                  <a:pt x="5868689" y="246062"/>
+                  <a:pt x="5890319" y="260747"/>
+                </a:cubicBezTo>
+                <a:cubicBezTo>
+                  <a:pt x="5911948" y="275431"/>
+                  <a:pt x="5929114" y="295969"/>
+                  <a:pt x="5941813" y="322362"/>
+                </a:cubicBezTo>
+                <a:cubicBezTo>
+                  <a:pt x="5954513" y="348754"/>
+                  <a:pt x="5960863" y="382786"/>
+                  <a:pt x="5960863" y="424458"/>
+                </a:cubicBezTo>
+                <a:lnTo>
+                  <a:pt x="5960863" y="812006"/>
+                </a:lnTo>
+                <a:lnTo>
+                  <a:pt x="5867995" y="812006"/>
+                </a:lnTo>
+                <a:lnTo>
+                  <a:pt x="5863827" y="723900"/>
+                </a:lnTo>
+                <a:cubicBezTo>
+                  <a:pt x="5837237" y="753666"/>
+                  <a:pt x="5806380" y="777577"/>
+                  <a:pt x="5771256" y="795635"/>
+                </a:cubicBezTo>
+                <a:cubicBezTo>
+                  <a:pt x="5736133" y="813693"/>
+                  <a:pt x="5695156" y="822722"/>
+                  <a:pt x="5648324" y="822722"/>
+                </a:cubicBezTo>
+                <a:cubicBezTo>
+                  <a:pt x="5614987" y="822722"/>
+                  <a:pt x="5584526" y="816372"/>
+                  <a:pt x="5556944" y="803672"/>
+                </a:cubicBezTo>
+                <a:cubicBezTo>
+                  <a:pt x="5529361" y="790972"/>
+                  <a:pt x="5507335" y="772219"/>
+                  <a:pt x="5490864" y="747415"/>
+                </a:cubicBezTo>
+                <a:cubicBezTo>
+                  <a:pt x="5474394" y="722610"/>
+                  <a:pt x="5466159" y="691951"/>
+                  <a:pt x="5466159" y="655439"/>
+                </a:cubicBezTo>
+                <a:cubicBezTo>
+                  <a:pt x="5466159" y="603448"/>
+                  <a:pt x="5482430" y="563959"/>
+                  <a:pt x="5514974" y="536972"/>
+                </a:cubicBezTo>
+                <a:cubicBezTo>
+                  <a:pt x="5547518" y="509984"/>
+                  <a:pt x="5593556" y="491629"/>
+                  <a:pt x="5653087" y="481905"/>
+                </a:cubicBezTo>
+                <a:cubicBezTo>
+                  <a:pt x="5712618" y="472182"/>
+                  <a:pt x="5782270" y="466923"/>
+                  <a:pt x="5862041" y="466130"/>
+                </a:cubicBezTo>
+                <a:lnTo>
+                  <a:pt x="5862041" y="425648"/>
+                </a:lnTo>
+                <a:cubicBezTo>
+                  <a:pt x="5862041" y="376039"/>
+                  <a:pt x="5849738" y="342007"/>
+                  <a:pt x="5825132" y="323552"/>
+                </a:cubicBezTo>
+                <a:cubicBezTo>
+                  <a:pt x="5800526" y="305098"/>
+                  <a:pt x="5769371" y="295870"/>
+                  <a:pt x="5731668" y="295870"/>
+                </a:cubicBezTo>
+                <a:cubicBezTo>
+                  <a:pt x="5691584" y="295870"/>
+                  <a:pt x="5657849" y="305991"/>
+                  <a:pt x="5630465" y="326231"/>
+                </a:cubicBezTo>
+                <a:cubicBezTo>
+                  <a:pt x="5603081" y="346472"/>
+                  <a:pt x="5589388" y="378420"/>
+                  <a:pt x="5589388" y="422076"/>
+                </a:cubicBezTo>
+                <a:lnTo>
+                  <a:pt x="5492948" y="422076"/>
+                </a:lnTo>
+                <a:cubicBezTo>
+                  <a:pt x="5492948" y="374451"/>
+                  <a:pt x="5503167" y="335955"/>
+                  <a:pt x="5523606" y="306586"/>
+                </a:cubicBezTo>
+                <a:cubicBezTo>
+                  <a:pt x="5544045" y="277217"/>
+                  <a:pt x="5572224" y="255786"/>
+                  <a:pt x="5608141" y="242292"/>
+                </a:cubicBezTo>
+                <a:cubicBezTo>
+                  <a:pt x="5644058" y="228798"/>
+                  <a:pt x="5685234" y="222051"/>
+                  <a:pt x="5731668" y="222051"/>
+                </a:cubicBezTo>
+                <a:close/>
+                <a:moveTo>
+                  <a:pt x="5105995" y="222051"/>
+                </a:moveTo>
+                <a:cubicBezTo>
+                  <a:pt x="5150841" y="222051"/>
+                  <a:pt x="5191224" y="229394"/>
+                  <a:pt x="5227141" y="244078"/>
+                </a:cubicBezTo>
+                <a:cubicBezTo>
+                  <a:pt x="5263058" y="258762"/>
+                  <a:pt x="5291732" y="280888"/>
+                  <a:pt x="5313163" y="310455"/>
+                </a:cubicBezTo>
+                <a:cubicBezTo>
+                  <a:pt x="5334595" y="340023"/>
+                  <a:pt x="5345906" y="377428"/>
+                  <a:pt x="5347096" y="422672"/>
+                </a:cubicBezTo>
+                <a:lnTo>
+                  <a:pt x="5248870" y="422672"/>
+                </a:lnTo>
+                <a:cubicBezTo>
+                  <a:pt x="5246488" y="385366"/>
+                  <a:pt x="5232994" y="355997"/>
+                  <a:pt x="5208388" y="334566"/>
+                </a:cubicBezTo>
+                <a:cubicBezTo>
+                  <a:pt x="5183782" y="313134"/>
+                  <a:pt x="5150246" y="302419"/>
+                  <a:pt x="5107781" y="302419"/>
+                </a:cubicBezTo>
+                <a:cubicBezTo>
+                  <a:pt x="5051424" y="302419"/>
+                  <a:pt x="5009356" y="321766"/>
+                  <a:pt x="4981574" y="360462"/>
+                </a:cubicBezTo>
+                <a:cubicBezTo>
+                  <a:pt x="4953793" y="399157"/>
+                  <a:pt x="4939902" y="453430"/>
+                  <a:pt x="4939902" y="523280"/>
+                </a:cubicBezTo>
+                <a:cubicBezTo>
+                  <a:pt x="4939902" y="569714"/>
+                  <a:pt x="4946054" y="609104"/>
+                  <a:pt x="4958357" y="641449"/>
+                </a:cubicBezTo>
+                <a:cubicBezTo>
+                  <a:pt x="4970660" y="673794"/>
+                  <a:pt x="4989313" y="698599"/>
+                  <a:pt x="5014316" y="715863"/>
+                </a:cubicBezTo>
+                <a:cubicBezTo>
+                  <a:pt x="5039320" y="733127"/>
+                  <a:pt x="5070474" y="741759"/>
+                  <a:pt x="5107781" y="741759"/>
+                </a:cubicBezTo>
+                <a:cubicBezTo>
+                  <a:pt x="5150246" y="741759"/>
+                  <a:pt x="5184774" y="730746"/>
+                  <a:pt x="5211365" y="708719"/>
+                </a:cubicBezTo>
+                <a:cubicBezTo>
+                  <a:pt x="5237956" y="686693"/>
+                  <a:pt x="5251846" y="654447"/>
+                  <a:pt x="5253037" y="611981"/>
+                </a:cubicBezTo>
+                <a:lnTo>
+                  <a:pt x="5351263" y="611981"/>
+                </a:lnTo>
+                <a:cubicBezTo>
+                  <a:pt x="5350073" y="658812"/>
+                  <a:pt x="5338662" y="697805"/>
+                  <a:pt x="5317033" y="728960"/>
+                </a:cubicBezTo>
+                <a:cubicBezTo>
+                  <a:pt x="5295403" y="760115"/>
+                  <a:pt x="5266233" y="783431"/>
+                  <a:pt x="5229522" y="798909"/>
+                </a:cubicBezTo>
+                <a:cubicBezTo>
+                  <a:pt x="5192811" y="814387"/>
+                  <a:pt x="5151635" y="822127"/>
+                  <a:pt x="5105995" y="822127"/>
+                </a:cubicBezTo>
+                <a:cubicBezTo>
+                  <a:pt x="5053607" y="822127"/>
+                  <a:pt x="5007173" y="811113"/>
+                  <a:pt x="4966691" y="789087"/>
+                </a:cubicBezTo>
+                <a:cubicBezTo>
+                  <a:pt x="4926210" y="767060"/>
+                  <a:pt x="4894559" y="733921"/>
+                  <a:pt x="4871739" y="689669"/>
+                </a:cubicBezTo>
+                <a:cubicBezTo>
+                  <a:pt x="4848919" y="645418"/>
+                  <a:pt x="4837509" y="589955"/>
+                  <a:pt x="4837509" y="523280"/>
+                </a:cubicBezTo>
+                <a:cubicBezTo>
+                  <a:pt x="4837509" y="456605"/>
+                  <a:pt x="4848720" y="400943"/>
+                  <a:pt x="4871144" y="356294"/>
+                </a:cubicBezTo>
+                <a:cubicBezTo>
+                  <a:pt x="4893567" y="311646"/>
+                  <a:pt x="4924920" y="278110"/>
+                  <a:pt x="4965203" y="255687"/>
+                </a:cubicBezTo>
+                <a:cubicBezTo>
+                  <a:pt x="5005486" y="233263"/>
+                  <a:pt x="5052416" y="222051"/>
+                  <a:pt x="5105995" y="222051"/>
+                </a:cubicBezTo>
+                <a:close/>
+                <a:moveTo>
+                  <a:pt x="4478535" y="222051"/>
+                </a:moveTo>
+                <a:cubicBezTo>
+                  <a:pt x="4509095" y="222051"/>
+                  <a:pt x="4537769" y="225623"/>
+                  <a:pt x="4564558" y="232767"/>
+                </a:cubicBezTo>
+                <a:cubicBezTo>
+                  <a:pt x="4591347" y="239911"/>
+                  <a:pt x="4614961" y="251023"/>
+                  <a:pt x="4635400" y="266105"/>
+                </a:cubicBezTo>
+                <a:cubicBezTo>
+                  <a:pt x="4655840" y="281186"/>
+                  <a:pt x="4672012" y="300633"/>
+                  <a:pt x="4683918" y="324445"/>
+                </a:cubicBezTo>
+                <a:cubicBezTo>
+                  <a:pt x="4695824" y="348258"/>
+                  <a:pt x="4701777" y="376833"/>
+                  <a:pt x="4701777" y="410170"/>
+                </a:cubicBezTo>
+                <a:lnTo>
+                  <a:pt x="4605337" y="410170"/>
+                </a:lnTo>
+                <a:cubicBezTo>
+                  <a:pt x="4605337" y="368895"/>
+                  <a:pt x="4593034" y="339725"/>
+                  <a:pt x="4568427" y="322659"/>
+                </a:cubicBezTo>
+                <a:cubicBezTo>
+                  <a:pt x="4543821" y="305594"/>
+                  <a:pt x="4513858" y="297061"/>
+                  <a:pt x="4478535" y="297061"/>
+                </a:cubicBezTo>
+                <a:cubicBezTo>
+                  <a:pt x="4442816" y="297061"/>
+                  <a:pt x="4413845" y="303411"/>
+                  <a:pt x="4391620" y="316111"/>
+                </a:cubicBezTo>
+                <a:cubicBezTo>
+                  <a:pt x="4369395" y="328811"/>
+                  <a:pt x="4358282" y="348655"/>
+                  <a:pt x="4358282" y="375642"/>
+                </a:cubicBezTo>
+                <a:cubicBezTo>
+                  <a:pt x="4358282" y="391120"/>
+                  <a:pt x="4363243" y="404217"/>
+                  <a:pt x="4373165" y="414933"/>
+                </a:cubicBezTo>
+                <a:cubicBezTo>
+                  <a:pt x="4383087" y="425648"/>
+                  <a:pt x="4399756" y="435273"/>
+                  <a:pt x="4423171" y="443805"/>
+                </a:cubicBezTo>
+                <a:cubicBezTo>
+                  <a:pt x="4446587" y="452338"/>
+                  <a:pt x="4478139" y="461367"/>
+                  <a:pt x="4517826" y="470892"/>
+                </a:cubicBezTo>
+                <a:cubicBezTo>
+                  <a:pt x="4561085" y="481211"/>
+                  <a:pt x="4597399" y="493514"/>
+                  <a:pt x="4626768" y="507801"/>
+                </a:cubicBezTo>
+                <a:cubicBezTo>
+                  <a:pt x="4656137" y="522089"/>
+                  <a:pt x="4678263" y="540444"/>
+                  <a:pt x="4693145" y="562868"/>
+                </a:cubicBezTo>
+                <a:cubicBezTo>
+                  <a:pt x="4708028" y="585291"/>
+                  <a:pt x="4715470" y="613966"/>
+                  <a:pt x="4715470" y="648891"/>
+                </a:cubicBezTo>
+                <a:cubicBezTo>
+                  <a:pt x="4715470" y="679053"/>
+                  <a:pt x="4709616" y="705148"/>
+                  <a:pt x="4697908" y="727174"/>
+                </a:cubicBezTo>
+                <a:cubicBezTo>
+                  <a:pt x="4686200" y="749201"/>
+                  <a:pt x="4669928" y="767259"/>
+                  <a:pt x="4649092" y="781348"/>
+                </a:cubicBezTo>
+                <a:cubicBezTo>
+                  <a:pt x="4628256" y="795437"/>
+                  <a:pt x="4603849" y="805855"/>
+                  <a:pt x="4575869" y="812602"/>
+                </a:cubicBezTo>
+                <a:cubicBezTo>
+                  <a:pt x="4547889" y="819348"/>
+                  <a:pt x="4517628" y="822722"/>
+                  <a:pt x="4485084" y="822722"/>
+                </a:cubicBezTo>
+                <a:cubicBezTo>
+                  <a:pt x="4452540" y="822722"/>
+                  <a:pt x="4421683" y="819150"/>
+                  <a:pt x="4392513" y="812006"/>
+                </a:cubicBezTo>
+                <a:cubicBezTo>
+                  <a:pt x="4363342" y="804862"/>
+                  <a:pt x="4337645" y="793552"/>
+                  <a:pt x="4315420" y="778073"/>
+                </a:cubicBezTo>
+                <a:cubicBezTo>
+                  <a:pt x="4293195" y="762595"/>
+                  <a:pt x="4275831" y="742255"/>
+                  <a:pt x="4263330" y="717054"/>
+                </a:cubicBezTo>
+                <a:cubicBezTo>
+                  <a:pt x="4250828" y="691852"/>
+                  <a:pt x="4244577" y="661392"/>
+                  <a:pt x="4244577" y="625673"/>
+                </a:cubicBezTo>
+                <a:lnTo>
+                  <a:pt x="4340423" y="625673"/>
+                </a:lnTo>
+                <a:cubicBezTo>
+                  <a:pt x="4340423" y="670917"/>
+                  <a:pt x="4354413" y="702766"/>
+                  <a:pt x="4382392" y="721221"/>
+                </a:cubicBezTo>
+                <a:cubicBezTo>
+                  <a:pt x="4410372" y="739676"/>
+                  <a:pt x="4445397" y="748903"/>
+                  <a:pt x="4487465" y="748903"/>
+                </a:cubicBezTo>
+                <a:cubicBezTo>
+                  <a:pt x="4525168" y="748903"/>
+                  <a:pt x="4556224" y="741660"/>
+                  <a:pt x="4580631" y="727174"/>
+                </a:cubicBezTo>
+                <a:cubicBezTo>
+                  <a:pt x="4605039" y="712688"/>
+                  <a:pt x="4617243" y="688776"/>
+                  <a:pt x="4617243" y="655439"/>
+                </a:cubicBezTo>
+                <a:cubicBezTo>
+                  <a:pt x="4617243" y="626864"/>
+                  <a:pt x="4606230" y="605631"/>
+                  <a:pt x="4584203" y="591741"/>
+                </a:cubicBezTo>
+                <a:cubicBezTo>
+                  <a:pt x="4562177" y="577850"/>
+                  <a:pt x="4523383" y="564356"/>
+                  <a:pt x="4467820" y="551259"/>
+                </a:cubicBezTo>
+                <a:cubicBezTo>
+                  <a:pt x="4422576" y="540544"/>
+                  <a:pt x="4384476" y="528141"/>
+                  <a:pt x="4353520" y="514052"/>
+                </a:cubicBezTo>
+                <a:cubicBezTo>
+                  <a:pt x="4322563" y="499963"/>
+                  <a:pt x="4299346" y="482104"/>
+                  <a:pt x="4283868" y="460474"/>
+                </a:cubicBezTo>
+                <a:cubicBezTo>
+                  <a:pt x="4268390" y="438844"/>
+                  <a:pt x="4260651" y="411559"/>
+                  <a:pt x="4260651" y="378619"/>
+                </a:cubicBezTo>
+                <a:cubicBezTo>
+                  <a:pt x="4260651" y="352822"/>
+                  <a:pt x="4266108" y="330101"/>
+                  <a:pt x="4277022" y="310455"/>
+                </a:cubicBezTo>
+                <a:cubicBezTo>
+                  <a:pt x="4287936" y="290810"/>
+                  <a:pt x="4303216" y="274439"/>
+                  <a:pt x="4322861" y="261342"/>
+                </a:cubicBezTo>
+                <a:cubicBezTo>
+                  <a:pt x="4342506" y="248245"/>
+                  <a:pt x="4365625" y="238423"/>
+                  <a:pt x="4392215" y="231874"/>
+                </a:cubicBezTo>
+                <a:cubicBezTo>
+                  <a:pt x="4418806" y="225326"/>
+                  <a:pt x="4447579" y="222051"/>
+                  <a:pt x="4478535" y="222051"/>
+                </a:cubicBezTo>
+                <a:close/>
+                <a:moveTo>
+                  <a:pt x="2937271" y="222051"/>
+                </a:moveTo>
+                <a:cubicBezTo>
+                  <a:pt x="3016249" y="222051"/>
+                  <a:pt x="3078162" y="245864"/>
+                  <a:pt x="3123009" y="293489"/>
+                </a:cubicBezTo>
+                <a:cubicBezTo>
+                  <a:pt x="3167856" y="341114"/>
+                  <a:pt x="3190279" y="409575"/>
+                  <a:pt x="3190279" y="498872"/>
+                </a:cubicBezTo>
+                <a:cubicBezTo>
+                  <a:pt x="3190279" y="504825"/>
+                  <a:pt x="3190081" y="511869"/>
+                  <a:pt x="3189684" y="520005"/>
+                </a:cubicBezTo>
+                <a:cubicBezTo>
+                  <a:pt x="3189287" y="528141"/>
+                  <a:pt x="3188692" y="533995"/>
+                  <a:pt x="3187898" y="537567"/>
+                </a:cubicBezTo>
+                <a:lnTo>
+                  <a:pt x="2774751" y="537567"/>
+                </a:lnTo>
+                <a:cubicBezTo>
+                  <a:pt x="2775148" y="575270"/>
+                  <a:pt x="2781200" y="609898"/>
+                  <a:pt x="2792908" y="641449"/>
+                </a:cubicBezTo>
+                <a:cubicBezTo>
+                  <a:pt x="2804616" y="673001"/>
+                  <a:pt x="2823170" y="698302"/>
+                  <a:pt x="2848570" y="717352"/>
+                </a:cubicBezTo>
+                <a:cubicBezTo>
+                  <a:pt x="2873970" y="736402"/>
+                  <a:pt x="2907506" y="745927"/>
+                  <a:pt x="2949178" y="745927"/>
+                </a:cubicBezTo>
+                <a:cubicBezTo>
+                  <a:pt x="2993627" y="745927"/>
+                  <a:pt x="3028354" y="735509"/>
+                  <a:pt x="3053357" y="714673"/>
+                </a:cubicBezTo>
+                <a:cubicBezTo>
+                  <a:pt x="3078360" y="693837"/>
+                  <a:pt x="3091457" y="663773"/>
+                  <a:pt x="3092648" y="624483"/>
+                </a:cubicBezTo>
+                <a:lnTo>
+                  <a:pt x="3190874" y="624483"/>
+                </a:lnTo>
+                <a:cubicBezTo>
+                  <a:pt x="3189684" y="665361"/>
+                  <a:pt x="3179167" y="700584"/>
+                  <a:pt x="3159323" y="730151"/>
+                </a:cubicBezTo>
+                <a:cubicBezTo>
+                  <a:pt x="3139479" y="759718"/>
+                  <a:pt x="3111698" y="782538"/>
+                  <a:pt x="3075979" y="798612"/>
+                </a:cubicBezTo>
+                <a:cubicBezTo>
+                  <a:pt x="3040260" y="814685"/>
+                  <a:pt x="2997993" y="822722"/>
+                  <a:pt x="2949178" y="822722"/>
+                </a:cubicBezTo>
+                <a:cubicBezTo>
+                  <a:pt x="2886074" y="822722"/>
+                  <a:pt x="2834382" y="809526"/>
+                  <a:pt x="2794099" y="783134"/>
+                </a:cubicBezTo>
+                <a:cubicBezTo>
+                  <a:pt x="2753816" y="756741"/>
+                  <a:pt x="2723951" y="720824"/>
+                  <a:pt x="2704504" y="675382"/>
+                </a:cubicBezTo>
+                <a:cubicBezTo>
+                  <a:pt x="2685057" y="629940"/>
+                  <a:pt x="2675334" y="578842"/>
+                  <a:pt x="2675334" y="522089"/>
+                </a:cubicBezTo>
+                <a:cubicBezTo>
+                  <a:pt x="2675334" y="462955"/>
+                  <a:pt x="2684760" y="410865"/>
+                  <a:pt x="2703611" y="365819"/>
+                </a:cubicBezTo>
+                <a:cubicBezTo>
+                  <a:pt x="2722463" y="320774"/>
+                  <a:pt x="2751236" y="285552"/>
+                  <a:pt x="2789931" y="260151"/>
+                </a:cubicBezTo>
+                <a:cubicBezTo>
+                  <a:pt x="2828627" y="234751"/>
+                  <a:pt x="2877740" y="222051"/>
+                  <a:pt x="2937271" y="222051"/>
+                </a:cubicBezTo>
+                <a:close/>
+                <a:moveTo>
+                  <a:pt x="2305645" y="222051"/>
+                </a:moveTo>
+                <a:cubicBezTo>
+                  <a:pt x="2350492" y="222051"/>
+                  <a:pt x="2390874" y="229394"/>
+                  <a:pt x="2426791" y="244078"/>
+                </a:cubicBezTo>
+                <a:cubicBezTo>
+                  <a:pt x="2462708" y="258762"/>
+                  <a:pt x="2491382" y="280888"/>
+                  <a:pt x="2512814" y="310455"/>
+                </a:cubicBezTo>
+                <a:cubicBezTo>
+                  <a:pt x="2534245" y="340023"/>
+                  <a:pt x="2545556" y="377428"/>
+                  <a:pt x="2546746" y="422672"/>
+                </a:cubicBezTo>
+                <a:lnTo>
+                  <a:pt x="2448520" y="422672"/>
+                </a:lnTo>
+                <a:cubicBezTo>
+                  <a:pt x="2446139" y="385366"/>
+                  <a:pt x="2432645" y="355997"/>
+                  <a:pt x="2408039" y="334566"/>
+                </a:cubicBezTo>
+                <a:cubicBezTo>
+                  <a:pt x="2383432" y="313134"/>
+                  <a:pt x="2349896" y="302419"/>
+                  <a:pt x="2307431" y="302419"/>
+                </a:cubicBezTo>
+                <a:cubicBezTo>
+                  <a:pt x="2251075" y="302419"/>
+                  <a:pt x="2209006" y="321766"/>
+                  <a:pt x="2181224" y="360462"/>
+                </a:cubicBezTo>
+                <a:cubicBezTo>
+                  <a:pt x="2153443" y="399157"/>
+                  <a:pt x="2139553" y="453430"/>
+                  <a:pt x="2139553" y="523280"/>
+                </a:cubicBezTo>
+                <a:cubicBezTo>
+                  <a:pt x="2139553" y="569714"/>
+                  <a:pt x="2145704" y="609104"/>
+                  <a:pt x="2158007" y="641449"/>
+                </a:cubicBezTo>
+                <a:cubicBezTo>
+                  <a:pt x="2170311" y="673794"/>
+                  <a:pt x="2188964" y="698599"/>
+                  <a:pt x="2213967" y="715863"/>
+                </a:cubicBezTo>
+                <a:cubicBezTo>
+                  <a:pt x="2238970" y="733127"/>
+                  <a:pt x="2270125" y="741759"/>
+                  <a:pt x="2307431" y="741759"/>
+                </a:cubicBezTo>
+                <a:cubicBezTo>
+                  <a:pt x="2349896" y="741759"/>
+                  <a:pt x="2384425" y="730746"/>
+                  <a:pt x="2411015" y="708719"/>
+                </a:cubicBezTo>
+                <a:cubicBezTo>
+                  <a:pt x="2437606" y="686693"/>
+                  <a:pt x="2451496" y="654447"/>
+                  <a:pt x="2452687" y="611981"/>
+                </a:cubicBezTo>
+                <a:lnTo>
+                  <a:pt x="2550914" y="611981"/>
+                </a:lnTo>
+                <a:cubicBezTo>
+                  <a:pt x="2549723" y="658812"/>
+                  <a:pt x="2538313" y="697805"/>
+                  <a:pt x="2516683" y="728960"/>
+                </a:cubicBezTo>
+                <a:cubicBezTo>
+                  <a:pt x="2495054" y="760115"/>
+                  <a:pt x="2465883" y="783431"/>
+                  <a:pt x="2429172" y="798909"/>
+                </a:cubicBezTo>
+                <a:cubicBezTo>
+                  <a:pt x="2392461" y="814387"/>
+                  <a:pt x="2351286" y="822127"/>
+                  <a:pt x="2305645" y="822127"/>
+                </a:cubicBezTo>
+                <a:cubicBezTo>
+                  <a:pt x="2253257" y="822127"/>
+                  <a:pt x="2206823" y="811113"/>
+                  <a:pt x="2166342" y="789087"/>
+                </a:cubicBezTo>
+                <a:cubicBezTo>
+                  <a:pt x="2125860" y="767060"/>
+                  <a:pt x="2094210" y="733921"/>
+                  <a:pt x="2071389" y="689669"/>
+                </a:cubicBezTo>
+                <a:cubicBezTo>
+                  <a:pt x="2048569" y="645418"/>
+                  <a:pt x="2037159" y="589955"/>
+                  <a:pt x="2037159" y="523280"/>
+                </a:cubicBezTo>
+                <a:cubicBezTo>
+                  <a:pt x="2037159" y="456605"/>
+                  <a:pt x="2048371" y="400943"/>
+                  <a:pt x="2070794" y="356294"/>
+                </a:cubicBezTo>
+                <a:cubicBezTo>
+                  <a:pt x="2093218" y="311646"/>
+                  <a:pt x="2124571" y="278110"/>
+                  <a:pt x="2164853" y="255687"/>
+                </a:cubicBezTo>
+                <a:cubicBezTo>
+                  <a:pt x="2205136" y="233263"/>
+                  <a:pt x="2252067" y="222051"/>
+                  <a:pt x="2305645" y="222051"/>
+                </a:cubicBezTo>
+                <a:close/>
+                <a:moveTo>
+                  <a:pt x="1654969" y="222051"/>
+                </a:moveTo>
+                <a:cubicBezTo>
+                  <a:pt x="1684734" y="222051"/>
+                  <a:pt x="1713210" y="224830"/>
+                  <a:pt x="1740396" y="230386"/>
+                </a:cubicBezTo>
+                <a:cubicBezTo>
+                  <a:pt x="1767582" y="235942"/>
+                  <a:pt x="1791990" y="246062"/>
+                  <a:pt x="1813619" y="260747"/>
+                </a:cubicBezTo>
+                <a:cubicBezTo>
+                  <a:pt x="1835249" y="275431"/>
+                  <a:pt x="1852414" y="295969"/>
+                  <a:pt x="1865114" y="322362"/>
+                </a:cubicBezTo>
+                <a:cubicBezTo>
+                  <a:pt x="1877814" y="348754"/>
+                  <a:pt x="1884164" y="382786"/>
+                  <a:pt x="1884164" y="424458"/>
+                </a:cubicBezTo>
+                <a:lnTo>
+                  <a:pt x="1884164" y="812006"/>
+                </a:lnTo>
+                <a:lnTo>
+                  <a:pt x="1791295" y="812006"/>
+                </a:lnTo>
+                <a:lnTo>
+                  <a:pt x="1787128" y="723900"/>
+                </a:lnTo>
+                <a:cubicBezTo>
+                  <a:pt x="1760538" y="753666"/>
+                  <a:pt x="1729680" y="777577"/>
+                  <a:pt x="1694556" y="795635"/>
+                </a:cubicBezTo>
+                <a:cubicBezTo>
+                  <a:pt x="1659433" y="813693"/>
+                  <a:pt x="1618456" y="822722"/>
+                  <a:pt x="1571624" y="822722"/>
+                </a:cubicBezTo>
+                <a:cubicBezTo>
+                  <a:pt x="1538287" y="822722"/>
+                  <a:pt x="1507827" y="816372"/>
+                  <a:pt x="1480244" y="803672"/>
+                </a:cubicBezTo>
+                <a:cubicBezTo>
+                  <a:pt x="1452661" y="790972"/>
+                  <a:pt x="1430635" y="772219"/>
+                  <a:pt x="1414165" y="747415"/>
+                </a:cubicBezTo>
+                <a:cubicBezTo>
+                  <a:pt x="1397694" y="722610"/>
+                  <a:pt x="1389459" y="691951"/>
+                  <a:pt x="1389459" y="655439"/>
+                </a:cubicBezTo>
+                <a:cubicBezTo>
+                  <a:pt x="1389459" y="603448"/>
+                  <a:pt x="1405731" y="563959"/>
+                  <a:pt x="1438274" y="536972"/>
+                </a:cubicBezTo>
+                <a:cubicBezTo>
+                  <a:pt x="1470819" y="509984"/>
+                  <a:pt x="1516856" y="491629"/>
+                  <a:pt x="1576387" y="481905"/>
+                </a:cubicBezTo>
+                <a:cubicBezTo>
+                  <a:pt x="1635918" y="472182"/>
+                  <a:pt x="1705570" y="466923"/>
+                  <a:pt x="1785342" y="466130"/>
+                </a:cubicBezTo>
+                <a:lnTo>
+                  <a:pt x="1785342" y="425648"/>
+                </a:lnTo>
+                <a:cubicBezTo>
+                  <a:pt x="1785342" y="376039"/>
+                  <a:pt x="1773039" y="342007"/>
+                  <a:pt x="1748433" y="323552"/>
+                </a:cubicBezTo>
+                <a:cubicBezTo>
+                  <a:pt x="1723826" y="305098"/>
+                  <a:pt x="1692672" y="295870"/>
+                  <a:pt x="1654969" y="295870"/>
+                </a:cubicBezTo>
+                <a:cubicBezTo>
+                  <a:pt x="1614884" y="295870"/>
+                  <a:pt x="1581149" y="305991"/>
+                  <a:pt x="1553765" y="326231"/>
+                </a:cubicBezTo>
+                <a:cubicBezTo>
+                  <a:pt x="1526381" y="346472"/>
+                  <a:pt x="1512689" y="378420"/>
+                  <a:pt x="1512689" y="422076"/>
+                </a:cubicBezTo>
+                <a:lnTo>
+                  <a:pt x="1416248" y="422076"/>
+                </a:lnTo>
+                <a:cubicBezTo>
+                  <a:pt x="1416248" y="374451"/>
+                  <a:pt x="1426468" y="335955"/>
+                  <a:pt x="1446907" y="306586"/>
+                </a:cubicBezTo>
+                <a:cubicBezTo>
+                  <a:pt x="1467346" y="277217"/>
+                  <a:pt x="1495524" y="255786"/>
+                  <a:pt x="1531441" y="242292"/>
+                </a:cubicBezTo>
+                <a:cubicBezTo>
+                  <a:pt x="1567358" y="228798"/>
+                  <a:pt x="1608534" y="222051"/>
+                  <a:pt x="1654969" y="222051"/>
+                </a:cubicBezTo>
+                <a:close/>
+                <a:moveTo>
+                  <a:pt x="1029890" y="222051"/>
+                </a:moveTo>
+                <a:cubicBezTo>
+                  <a:pt x="1077515" y="222051"/>
+                  <a:pt x="1118592" y="233263"/>
+                  <a:pt x="1153120" y="255687"/>
+                </a:cubicBezTo>
+                <a:cubicBezTo>
+                  <a:pt x="1187648" y="278110"/>
+                  <a:pt x="1214338" y="311547"/>
+                  <a:pt x="1233189" y="355997"/>
+                </a:cubicBezTo>
+                <a:cubicBezTo>
+                  <a:pt x="1252041" y="400447"/>
+                  <a:pt x="1261467" y="455811"/>
+                  <a:pt x="1261467" y="522089"/>
+                </a:cubicBezTo>
+                <a:cubicBezTo>
+                  <a:pt x="1261467" y="587573"/>
+                  <a:pt x="1251446" y="642640"/>
+                  <a:pt x="1231404" y="687288"/>
+                </a:cubicBezTo>
+                <a:cubicBezTo>
+                  <a:pt x="1211361" y="731937"/>
+                  <a:pt x="1183084" y="765671"/>
+                  <a:pt x="1146572" y="788491"/>
+                </a:cubicBezTo>
+                <a:cubicBezTo>
+                  <a:pt x="1110059" y="811312"/>
+                  <a:pt x="1067196" y="822722"/>
+                  <a:pt x="1017984" y="822722"/>
+                </a:cubicBezTo>
+                <a:cubicBezTo>
+                  <a:pt x="976709" y="822722"/>
+                  <a:pt x="940594" y="814487"/>
+                  <a:pt x="909637" y="798016"/>
+                </a:cubicBezTo>
+                <a:cubicBezTo>
+                  <a:pt x="878681" y="781546"/>
+                  <a:pt x="853876" y="759023"/>
+                  <a:pt x="835223" y="730448"/>
+                </a:cubicBezTo>
+                <a:lnTo>
+                  <a:pt x="835223" y="1025128"/>
+                </a:lnTo>
+                <a:lnTo>
+                  <a:pt x="736401" y="1025128"/>
+                </a:lnTo>
+                <a:lnTo>
+                  <a:pt x="736401" y="232172"/>
+                </a:lnTo>
+                <a:lnTo>
+                  <a:pt x="832842" y="232172"/>
+                </a:lnTo>
+                <a:lnTo>
+                  <a:pt x="835818" y="326826"/>
+                </a:lnTo>
+                <a:cubicBezTo>
+                  <a:pt x="856456" y="295870"/>
+                  <a:pt x="883146" y="270669"/>
+                  <a:pt x="915888" y="251222"/>
+                </a:cubicBezTo>
+                <a:cubicBezTo>
+                  <a:pt x="948630" y="231775"/>
+                  <a:pt x="986631" y="222051"/>
+                  <a:pt x="1029890" y="222051"/>
+                </a:cubicBezTo>
+                <a:close/>
+                <a:moveTo>
+                  <a:pt x="3612356" y="10716"/>
+                </a:moveTo>
+                <a:lnTo>
+                  <a:pt x="4123729" y="10716"/>
+                </a:lnTo>
+                <a:lnTo>
+                  <a:pt x="4123729" y="100012"/>
+                </a:lnTo>
+                <a:lnTo>
+                  <a:pt x="3719512" y="100012"/>
+                </a:lnTo>
+                <a:lnTo>
+                  <a:pt x="3719512" y="355401"/>
+                </a:lnTo>
+                <a:lnTo>
+                  <a:pt x="4091582" y="355401"/>
+                </a:lnTo>
+                <a:lnTo>
+                  <a:pt x="4091582" y="443508"/>
+                </a:lnTo>
+                <a:lnTo>
+                  <a:pt x="3719512" y="443508"/>
+                </a:lnTo>
+                <a:lnTo>
+                  <a:pt x="3719512" y="722709"/>
+                </a:lnTo>
+                <a:lnTo>
+                  <a:pt x="4123729" y="722709"/>
+                </a:lnTo>
+                <a:lnTo>
+                  <a:pt x="4123729" y="812006"/>
+                </a:lnTo>
+                <a:lnTo>
+                  <a:pt x="3612356" y="812006"/>
+                </a:lnTo>
+                <a:close/>
+                <a:moveTo>
+                  <a:pt x="290512" y="0"/>
+                </a:moveTo>
+                <a:cubicBezTo>
+                  <a:pt x="342106" y="0"/>
+                  <a:pt x="389334" y="8334"/>
+                  <a:pt x="432196" y="25003"/>
+                </a:cubicBezTo>
+                <a:cubicBezTo>
+                  <a:pt x="475059" y="41672"/>
+                  <a:pt x="509289" y="66675"/>
+                  <a:pt x="534888" y="100012"/>
+                </a:cubicBezTo>
+                <a:cubicBezTo>
+                  <a:pt x="560486" y="133350"/>
+                  <a:pt x="573286" y="174823"/>
+                  <a:pt x="573286" y="224433"/>
+                </a:cubicBezTo>
+                <a:lnTo>
+                  <a:pt x="466129" y="224433"/>
+                </a:lnTo>
+                <a:cubicBezTo>
+                  <a:pt x="466526" y="179189"/>
+                  <a:pt x="449857" y="144958"/>
+                  <a:pt x="416123" y="121741"/>
+                </a:cubicBezTo>
+                <a:cubicBezTo>
+                  <a:pt x="382389" y="98524"/>
+                  <a:pt x="340717" y="86916"/>
+                  <a:pt x="291107" y="86916"/>
+                </a:cubicBezTo>
+                <a:cubicBezTo>
+                  <a:pt x="239911" y="86916"/>
+                  <a:pt x="200124" y="97135"/>
+                  <a:pt x="171747" y="117574"/>
+                </a:cubicBezTo>
+                <a:cubicBezTo>
+                  <a:pt x="143371" y="138013"/>
+                  <a:pt x="129183" y="167878"/>
+                  <a:pt x="129183" y="207169"/>
+                </a:cubicBezTo>
+                <a:cubicBezTo>
+                  <a:pt x="129183" y="230584"/>
+                  <a:pt x="135334" y="250130"/>
+                  <a:pt x="147637" y="265807"/>
+                </a:cubicBezTo>
+                <a:cubicBezTo>
+                  <a:pt x="159940" y="281483"/>
+                  <a:pt x="181074" y="295672"/>
+                  <a:pt x="211038" y="308372"/>
+                </a:cubicBezTo>
+                <a:cubicBezTo>
+                  <a:pt x="241002" y="321072"/>
+                  <a:pt x="282773" y="334367"/>
+                  <a:pt x="336352" y="348258"/>
+                </a:cubicBezTo>
+                <a:cubicBezTo>
+                  <a:pt x="398264" y="364926"/>
+                  <a:pt x="448568" y="382786"/>
+                  <a:pt x="487263" y="401836"/>
+                </a:cubicBezTo>
+                <a:cubicBezTo>
+                  <a:pt x="525958" y="420886"/>
+                  <a:pt x="554434" y="445294"/>
+                  <a:pt x="572690" y="475059"/>
+                </a:cubicBezTo>
+                <a:cubicBezTo>
+                  <a:pt x="590947" y="504825"/>
+                  <a:pt x="600075" y="543917"/>
+                  <a:pt x="600075" y="592336"/>
+                </a:cubicBezTo>
+                <a:cubicBezTo>
+                  <a:pt x="600075" y="643930"/>
+                  <a:pt x="587176" y="686693"/>
+                  <a:pt x="561379" y="720626"/>
+                </a:cubicBezTo>
+                <a:cubicBezTo>
+                  <a:pt x="535583" y="754559"/>
+                  <a:pt x="500459" y="780058"/>
+                  <a:pt x="456009" y="797123"/>
+                </a:cubicBezTo>
+                <a:cubicBezTo>
+                  <a:pt x="411559" y="814189"/>
+                  <a:pt x="361355" y="822722"/>
+                  <a:pt x="305395" y="822722"/>
+                </a:cubicBezTo>
+                <a:cubicBezTo>
+                  <a:pt x="248245" y="822722"/>
+                  <a:pt x="196651" y="813991"/>
+                  <a:pt x="150614" y="796528"/>
+                </a:cubicBezTo>
+                <a:cubicBezTo>
+                  <a:pt x="104577" y="779066"/>
+                  <a:pt x="67965" y="751681"/>
+                  <a:pt x="40779" y="714375"/>
+                </a:cubicBezTo>
+                <a:cubicBezTo>
+                  <a:pt x="13592" y="677069"/>
+                  <a:pt x="0" y="628650"/>
+                  <a:pt x="0" y="569119"/>
+                </a:cubicBezTo>
+                <a:lnTo>
+                  <a:pt x="107752" y="569119"/>
+                </a:lnTo>
+                <a:cubicBezTo>
+                  <a:pt x="107752" y="611584"/>
+                  <a:pt x="116979" y="644922"/>
+                  <a:pt x="135433" y="669131"/>
+                </a:cubicBezTo>
+                <a:cubicBezTo>
+                  <a:pt x="153888" y="693341"/>
+                  <a:pt x="178395" y="710406"/>
+                  <a:pt x="208954" y="720328"/>
+                </a:cubicBezTo>
+                <a:cubicBezTo>
+                  <a:pt x="239514" y="730250"/>
+                  <a:pt x="273050" y="735211"/>
+                  <a:pt x="309562" y="735211"/>
+                </a:cubicBezTo>
+                <a:cubicBezTo>
+                  <a:pt x="343297" y="735211"/>
+                  <a:pt x="374154" y="730151"/>
+                  <a:pt x="402134" y="720030"/>
+                </a:cubicBezTo>
+                <a:cubicBezTo>
+                  <a:pt x="430113" y="709910"/>
+                  <a:pt x="452437" y="694630"/>
+                  <a:pt x="469106" y="674191"/>
+                </a:cubicBezTo>
+                <a:cubicBezTo>
+                  <a:pt x="485775" y="653752"/>
+                  <a:pt x="494109" y="627459"/>
+                  <a:pt x="494109" y="595312"/>
+                </a:cubicBezTo>
+                <a:cubicBezTo>
+                  <a:pt x="494109" y="567531"/>
+                  <a:pt x="487560" y="544711"/>
+                  <a:pt x="474464" y="526851"/>
+                </a:cubicBezTo>
+                <a:cubicBezTo>
+                  <a:pt x="461367" y="508992"/>
+                  <a:pt x="439638" y="493415"/>
+                  <a:pt x="409277" y="480119"/>
+                </a:cubicBezTo>
+                <a:cubicBezTo>
+                  <a:pt x="378916" y="466824"/>
+                  <a:pt x="338137" y="453628"/>
+                  <a:pt x="286940" y="440531"/>
+                </a:cubicBezTo>
+                <a:cubicBezTo>
+                  <a:pt x="226615" y="424656"/>
+                  <a:pt x="177006" y="407293"/>
+                  <a:pt x="138112" y="388441"/>
+                </a:cubicBezTo>
+                <a:cubicBezTo>
+                  <a:pt x="99218" y="369590"/>
+                  <a:pt x="70346" y="346075"/>
+                  <a:pt x="51494" y="317897"/>
+                </a:cubicBezTo>
+                <a:cubicBezTo>
+                  <a:pt x="32642" y="289719"/>
+                  <a:pt x="23217" y="254000"/>
+                  <a:pt x="23217" y="210741"/>
+                </a:cubicBezTo>
+                <a:cubicBezTo>
+                  <a:pt x="23217" y="165100"/>
+                  <a:pt x="33932" y="126702"/>
+                  <a:pt x="55364" y="95548"/>
+                </a:cubicBezTo>
+                <a:cubicBezTo>
+                  <a:pt x="76795" y="64393"/>
+                  <a:pt x="107553" y="40680"/>
+                  <a:pt x="147637" y="24408"/>
+                </a:cubicBezTo>
+                <a:cubicBezTo>
+                  <a:pt x="187722" y="8136"/>
+                  <a:pt x="235346" y="0"/>
+                  <a:pt x="290512" y="0"/>
+                </a:cubicBezTo>
+                <a:close/>
+              </a:path>
+            </a:pathLst>
+          </a:custGeom>
+        </p:spPr>
+      </p:pic>
     </p:spTree>
     <p:extLst>
       <p:ext uri="{BB962C8B-B14F-4D97-AF65-F5344CB8AC3E}">
@@ -9394,7 +12373,7 @@
           <a:lstStyle/>
           <a:p>
             <a:r>
-              <a:rPr lang="en-US" sz="4000" kern="1200">
+              <a:rPr lang="en-US" sz="4000" kern="1200" dirty="0">
                 <a:solidFill>
                   <a:srgbClr val="FFFFFF"/>
                 </a:solidFill>
@@ -9607,29 +12586,139 @@
       </p:grpSpPr>
       <p:sp>
         <p:nvSpPr>
-          <p:cNvPr id="2" name="Titel 1">
+          <p:cNvPr id="4" name="Rechthoek 3">
             <a:extLst>
               <a:ext uri="{FF2B5EF4-FFF2-40B4-BE49-F238E27FC236}">
-                <a16:creationId xmlns:a16="http://schemas.microsoft.com/office/drawing/2014/main" id="{2C871659-2407-9D07-1B28-1EC1330D8C88}"/>
+                <a16:creationId xmlns:a16="http://schemas.microsoft.com/office/drawing/2014/main" id="{6CE0A942-3DB4-D546-1FC6-68AB694CC77A}"/>
               </a:ext>
             </a:extLst>
           </p:cNvPr>
-          <p:cNvSpPr>
-            <a:spLocks noGrp="1"/>
-          </p:cNvSpPr>
-          <p:nvPr>
-            <p:ph type="title"/>
-          </p:nvPr>
+          <p:cNvSpPr/>
+          <p:nvPr/>
         </p:nvSpPr>
-        <p:spPr/>
+        <p:spPr>
+          <a:xfrm>
+            <a:off x="0" y="0"/>
+            <a:ext cx="8621486" cy="1408386"/>
+          </a:xfrm>
+          <a:prstGeom prst="rect">
+            <a:avLst/>
+          </a:prstGeom>
+          <a:gradFill>
+            <a:gsLst>
+              <a:gs pos="0">
+                <a:schemeClr val="accent1">
+                  <a:lumMod val="75000"/>
+                </a:schemeClr>
+              </a:gs>
+              <a:gs pos="51000">
+                <a:schemeClr val="accent1">
+                  <a:lumMod val="75000"/>
+                </a:schemeClr>
+              </a:gs>
+              <a:gs pos="100000">
+                <a:schemeClr val="accent1">
+                  <a:lumMod val="50000"/>
+                </a:schemeClr>
+              </a:gs>
+            </a:gsLst>
+            <a:lin ang="0" scaled="1"/>
+          </a:gradFill>
+          <a:ln>
+            <a:noFill/>
+          </a:ln>
+        </p:spPr>
+        <p:style>
+          <a:lnRef idx="2">
+            <a:schemeClr val="accent1">
+              <a:shade val="15000"/>
+            </a:schemeClr>
+          </a:lnRef>
+          <a:fillRef idx="1">
+            <a:schemeClr val="accent1"/>
+          </a:fillRef>
+          <a:effectRef idx="0">
+            <a:schemeClr val="accent1"/>
+          </a:effectRef>
+          <a:fontRef idx="minor">
+            <a:schemeClr val="lt1"/>
+          </a:fontRef>
+        </p:style>
         <p:txBody>
-          <a:bodyPr/>
+          <a:bodyPr rtlCol="0" anchor="ctr"/>
           <a:lstStyle/>
           <a:p>
-            <a:r>
-              <a:rPr lang="nl-BE" dirty="0"/>
-              <a:t>Conclusie &amp; verbeteringen</a:t>
-            </a:r>
+            <a:pPr algn="ctr"/>
+            <a:endParaRPr lang="nl-BE"/>
+          </a:p>
+        </p:txBody>
+      </p:sp>
+      <p:sp>
+        <p:nvSpPr>
+          <p:cNvPr id="5" name="Rechthoek 4">
+            <a:extLst>
+              <a:ext uri="{FF2B5EF4-FFF2-40B4-BE49-F238E27FC236}">
+                <a16:creationId xmlns:a16="http://schemas.microsoft.com/office/drawing/2014/main" id="{2F3D66CA-25C3-EE58-746D-0409D74F6876}"/>
+              </a:ext>
+            </a:extLst>
+          </p:cNvPr>
+          <p:cNvSpPr/>
+          <p:nvPr/>
+        </p:nvSpPr>
+        <p:spPr>
+          <a:xfrm>
+            <a:off x="8621486" y="-1"/>
+            <a:ext cx="3570514" cy="1408385"/>
+          </a:xfrm>
+          <a:prstGeom prst="rect">
+            <a:avLst/>
+          </a:prstGeom>
+          <a:gradFill>
+            <a:gsLst>
+              <a:gs pos="0">
+                <a:schemeClr val="accent1">
+                  <a:lumMod val="75000"/>
+                </a:schemeClr>
+              </a:gs>
+              <a:gs pos="51000">
+                <a:schemeClr val="accent1">
+                  <a:lumMod val="75000"/>
+                </a:schemeClr>
+              </a:gs>
+              <a:gs pos="100000">
+                <a:schemeClr val="accent1">
+                  <a:lumMod val="50000"/>
+                </a:schemeClr>
+              </a:gs>
+            </a:gsLst>
+            <a:lin ang="0" scaled="1"/>
+          </a:gradFill>
+          <a:ln>
+            <a:noFill/>
+          </a:ln>
+        </p:spPr>
+        <p:style>
+          <a:lnRef idx="2">
+            <a:schemeClr val="accent1">
+              <a:shade val="15000"/>
+            </a:schemeClr>
+          </a:lnRef>
+          <a:fillRef idx="1">
+            <a:schemeClr val="accent1"/>
+          </a:fillRef>
+          <a:effectRef idx="0">
+            <a:schemeClr val="accent1"/>
+          </a:effectRef>
+          <a:fontRef idx="minor">
+            <a:schemeClr val="lt1"/>
+          </a:fontRef>
+        </p:style>
+        <p:txBody>
+          <a:bodyPr rtlCol="0" anchor="ctr"/>
+          <a:lstStyle/>
+          <a:p>
+            <a:pPr algn="ctr"/>
+            <a:endParaRPr lang="nl-BE"/>
           </a:p>
         </p:txBody>
       </p:sp>
@@ -9772,6 +12861,64 @@
           </a:p>
           <a:p>
             <a:endParaRPr lang="nl-BE" dirty="0"/>
+          </a:p>
+        </p:txBody>
+      </p:sp>
+      <p:sp>
+        <p:nvSpPr>
+          <p:cNvPr id="6" name="Titel 1">
+            <a:extLst>
+              <a:ext uri="{FF2B5EF4-FFF2-40B4-BE49-F238E27FC236}">
+                <a16:creationId xmlns:a16="http://schemas.microsoft.com/office/drawing/2014/main" id="{D8A4CDD0-0085-E498-F809-00669EA866B4}"/>
+              </a:ext>
+            </a:extLst>
+          </p:cNvPr>
+          <p:cNvSpPr txBox="1">
+            <a:spLocks/>
+          </p:cNvSpPr>
+          <p:nvPr/>
+        </p:nvSpPr>
+        <p:spPr>
+          <a:xfrm>
+            <a:off x="699713" y="248038"/>
+            <a:ext cx="7063721" cy="1159200"/>
+          </a:xfrm>
+          <a:prstGeom prst="rect">
+            <a:avLst/>
+          </a:prstGeom>
+        </p:spPr>
+        <p:txBody>
+          <a:bodyPr vert="horz" lIns="91440" tIns="45720" rIns="91440" bIns="45720" rtlCol="0" anchor="ctr">
+            <a:normAutofit/>
+          </a:bodyPr>
+          <a:lstStyle>
+            <a:lvl1pPr algn="l" defTabSz="914400" rtl="0" eaLnBrk="1" latinLnBrk="0" hangingPunct="1">
+              <a:lnSpc>
+                <a:spcPct val="90000"/>
+              </a:lnSpc>
+              <a:spcBef>
+                <a:spcPct val="0"/>
+              </a:spcBef>
+              <a:buNone/>
+              <a:defRPr sz="4400" kern="1200">
+                <a:solidFill>
+                  <a:schemeClr val="tx1"/>
+                </a:solidFill>
+                <a:latin typeface="+mj-lt"/>
+                <a:ea typeface="+mj-ea"/>
+                <a:cs typeface="+mj-cs"/>
+              </a:defRPr>
+            </a:lvl1pPr>
+          </a:lstStyle>
+          <a:p>
+            <a:r>
+              <a:rPr lang="nl-BE" sz="4000" noProof="0" dirty="0">
+                <a:solidFill>
+                  <a:srgbClr val="FFFFFF"/>
+                </a:solidFill>
+              </a:rPr>
+              <a:t>Conclusie &amp; verbeteringen</a:t>
+            </a:r>
           </a:p>
         </p:txBody>
       </p:sp>
@@ -9807,6 +12954,75 @@
       </p:grpSpPr>
       <p:sp>
         <p:nvSpPr>
+          <p:cNvPr id="4" name="Rechthoek 3">
+            <a:extLst>
+              <a:ext uri="{FF2B5EF4-FFF2-40B4-BE49-F238E27FC236}">
+                <a16:creationId xmlns:a16="http://schemas.microsoft.com/office/drawing/2014/main" id="{77CB00CB-11A2-C176-864D-4EAD5F7785F9}"/>
+              </a:ext>
+            </a:extLst>
+          </p:cNvPr>
+          <p:cNvSpPr/>
+          <p:nvPr/>
+        </p:nvSpPr>
+        <p:spPr>
+          <a:xfrm>
+            <a:off x="0" y="0"/>
+            <a:ext cx="8621486" cy="1325880"/>
+          </a:xfrm>
+          <a:prstGeom prst="rect">
+            <a:avLst/>
+          </a:prstGeom>
+          <a:gradFill>
+            <a:gsLst>
+              <a:gs pos="0">
+                <a:schemeClr val="accent1">
+                  <a:lumMod val="75000"/>
+                </a:schemeClr>
+              </a:gs>
+              <a:gs pos="51000">
+                <a:schemeClr val="accent1">
+                  <a:lumMod val="75000"/>
+                </a:schemeClr>
+              </a:gs>
+              <a:gs pos="100000">
+                <a:schemeClr val="accent1">
+                  <a:lumMod val="50000"/>
+                </a:schemeClr>
+              </a:gs>
+            </a:gsLst>
+            <a:lin ang="0" scaled="1"/>
+          </a:gradFill>
+          <a:ln>
+            <a:noFill/>
+          </a:ln>
+        </p:spPr>
+        <p:style>
+          <a:lnRef idx="2">
+            <a:schemeClr val="accent1">
+              <a:shade val="15000"/>
+            </a:schemeClr>
+          </a:lnRef>
+          <a:fillRef idx="1">
+            <a:schemeClr val="accent1"/>
+          </a:fillRef>
+          <a:effectRef idx="0">
+            <a:schemeClr val="accent1"/>
+          </a:effectRef>
+          <a:fontRef idx="minor">
+            <a:schemeClr val="lt1"/>
+          </a:fontRef>
+        </p:style>
+        <p:txBody>
+          <a:bodyPr rtlCol="0" anchor="ctr"/>
+          <a:lstStyle/>
+          <a:p>
+            <a:pPr algn="ctr"/>
+            <a:endParaRPr lang="nl-BE"/>
+          </a:p>
+        </p:txBody>
+      </p:sp>
+      <p:sp>
+        <p:nvSpPr>
           <p:cNvPr id="2" name="Titel 1">
             <a:extLst>
               <a:ext uri="{FF2B5EF4-FFF2-40B4-BE49-F238E27FC236}">
@@ -9821,13 +13037,22 @@
             <p:ph type="title"/>
           </p:nvPr>
         </p:nvSpPr>
-        <p:spPr/>
+        <p:spPr>
+          <a:xfrm>
+            <a:off x="838200" y="18255"/>
+            <a:ext cx="10515600" cy="1325563"/>
+          </a:xfrm>
+        </p:spPr>
         <p:txBody>
           <a:bodyPr/>
           <a:lstStyle/>
           <a:p>
             <a:r>
-              <a:rPr lang="nl-BE" dirty="0"/>
+              <a:rPr lang="nl-BE" dirty="0">
+                <a:solidFill>
+                  <a:schemeClr val="bg1"/>
+                </a:solidFill>
+              </a:rPr>
               <a:t>Bronnen</a:t>
             </a:r>
           </a:p>
@@ -9854,6 +13079,118 @@
           <a:bodyPr/>
           <a:lstStyle/>
           <a:p>
+            <a:pPr marL="0" indent="0">
+              <a:buNone/>
+            </a:pPr>
+            <a:r>
+              <a:rPr lang="nl-BE" i="1" dirty="0"/>
+              <a:t>Figuur 1:</a:t>
+            </a:r>
+            <a:r>
+              <a:rPr lang="nl-BE" i="1" dirty="0">
+                <a:hlinkClick r:id="rId2"/>
+              </a:rPr>
+              <a:t>https://stock.adobe.com/</a:t>
+            </a:r>
+            <a:r>
+              <a:rPr lang="nl-BE" i="1" dirty="0" err="1">
+                <a:hlinkClick r:id="rId2"/>
+              </a:rPr>
+              <a:t>be_nl</a:t>
+            </a:r>
+            <a:r>
+              <a:rPr lang="nl-BE" i="1" dirty="0">
+                <a:hlinkClick r:id="rId2"/>
+              </a:rPr>
+              <a:t>/</a:t>
+            </a:r>
+            <a:r>
+              <a:rPr lang="nl-BE" i="1" dirty="0" err="1">
+                <a:hlinkClick r:id="rId2"/>
+              </a:rPr>
+              <a:t>search?k</a:t>
+            </a:r>
+            <a:r>
+              <a:rPr lang="nl-BE" i="1" dirty="0">
+                <a:hlinkClick r:id="rId2"/>
+              </a:rPr>
+              <a:t>=</a:t>
+            </a:r>
+            <a:r>
+              <a:rPr lang="nl-BE" i="1" dirty="0" err="1">
+                <a:hlinkClick r:id="rId2"/>
+              </a:rPr>
+              <a:t>space</a:t>
+            </a:r>
+            <a:endParaRPr lang="nl-BE" i="1" dirty="0"/>
+          </a:p>
+        </p:txBody>
+      </p:sp>
+      <p:sp>
+        <p:nvSpPr>
+          <p:cNvPr id="5" name="Rechthoek 4">
+            <a:extLst>
+              <a:ext uri="{FF2B5EF4-FFF2-40B4-BE49-F238E27FC236}">
+                <a16:creationId xmlns:a16="http://schemas.microsoft.com/office/drawing/2014/main" id="{F59C6B92-5D36-E7D9-67AF-2A2974F7A538}"/>
+              </a:ext>
+            </a:extLst>
+          </p:cNvPr>
+          <p:cNvSpPr/>
+          <p:nvPr/>
+        </p:nvSpPr>
+        <p:spPr>
+          <a:xfrm>
+            <a:off x="8621486" y="0"/>
+            <a:ext cx="3570514" cy="1325880"/>
+          </a:xfrm>
+          <a:prstGeom prst="rect">
+            <a:avLst/>
+          </a:prstGeom>
+          <a:gradFill>
+            <a:gsLst>
+              <a:gs pos="0">
+                <a:schemeClr val="accent1">
+                  <a:lumMod val="75000"/>
+                </a:schemeClr>
+              </a:gs>
+              <a:gs pos="51000">
+                <a:schemeClr val="accent1">
+                  <a:lumMod val="75000"/>
+                </a:schemeClr>
+              </a:gs>
+              <a:gs pos="100000">
+                <a:schemeClr val="accent1">
+                  <a:lumMod val="50000"/>
+                </a:schemeClr>
+              </a:gs>
+            </a:gsLst>
+            <a:lin ang="0" scaled="1"/>
+          </a:gradFill>
+          <a:ln>
+            <a:noFill/>
+          </a:ln>
+        </p:spPr>
+        <p:style>
+          <a:lnRef idx="2">
+            <a:schemeClr val="accent1">
+              <a:shade val="15000"/>
+            </a:schemeClr>
+          </a:lnRef>
+          <a:fillRef idx="1">
+            <a:schemeClr val="accent1"/>
+          </a:fillRef>
+          <a:effectRef idx="0">
+            <a:schemeClr val="accent1"/>
+          </a:effectRef>
+          <a:fontRef idx="minor">
+            <a:schemeClr val="lt1"/>
+          </a:fontRef>
+        </p:style>
+        <p:txBody>
+          <a:bodyPr rtlCol="0" anchor="ctr"/>
+          <a:lstStyle/>
+          <a:p>
+            <a:pPr algn="ctr"/>
             <a:endParaRPr lang="nl-BE"/>
           </a:p>
         </p:txBody>
@@ -9871,7 +13208,7 @@
 </p:sld>
 </file>
 
-<file path=ppt/slides/slide2.xml><?xml version="1.0" encoding="utf-8"?>
+<file path=ppt/slides/slide18.xml><?xml version="1.0" encoding="utf-8"?>
 <p:sld xmlns:a="http://schemas.openxmlformats.org/drawingml/2006/main" xmlns:r="http://schemas.openxmlformats.org/officeDocument/2006/relationships" xmlns:p="http://schemas.openxmlformats.org/presentationml/2006/main">
   <p:cSld>
     <p:bg>
@@ -9898,10 +13235,10 @@
       </p:grpSpPr>
       <p:sp useBgFill="1">
         <p:nvSpPr>
-          <p:cNvPr id="8" name="Rectangle 7">
+          <p:cNvPr id="23" name="Rectangle 6">
             <a:extLst>
               <a:ext uri="{FF2B5EF4-FFF2-40B4-BE49-F238E27FC236}">
-                <a16:creationId xmlns:a16="http://schemas.microsoft.com/office/drawing/2014/main" id="{1B15ED52-F352-441B-82BF-E0EA34836D08}"/>
+                <a16:creationId xmlns:a16="http://schemas.microsoft.com/office/drawing/2014/main" id="{6F5A5072-7B47-4D32-B52A-4EBBF590B8A5}"/>
               </a:ext>
               <a:ext uri="{C183D7F6-B498-43B3-948B-1728B52AA6E4}">
                 <adec:decorative xmlns:adec="http://schemas.microsoft.com/office/drawing/2017/decorative" val="1"/>
@@ -9974,6 +13311,606 @@
       </p:sp>
       <p:sp>
         <p:nvSpPr>
+          <p:cNvPr id="24" name="Rectangle 8">
+            <a:extLst>
+              <a:ext uri="{FF2B5EF4-FFF2-40B4-BE49-F238E27FC236}">
+                <a16:creationId xmlns:a16="http://schemas.microsoft.com/office/drawing/2014/main" id="{9715DAF0-AE1B-46C9-8A6B-DB2AA05AB91D}"/>
+              </a:ext>
+              <a:ext uri="{C183D7F6-B498-43B3-948B-1728B52AA6E4}">
+                <adec:decorative xmlns:adec="http://schemas.microsoft.com/office/drawing/2017/decorative" val="1"/>
+              </a:ext>
+            </a:extLst>
+          </p:cNvPr>
+          <p:cNvSpPr>
+            <a:spLocks noGrp="1" noRot="1" noChangeAspect="1" noMove="1" noResize="1" noEditPoints="1" noAdjustHandles="1" noChangeArrowheads="1" noChangeShapeType="1" noTextEdit="1"/>
+          </p:cNvSpPr>
+          <p:nvPr>
+            <p:extLst>
+              <p:ext uri="{386F3935-93C4-4BCD-93E2-E3B085C9AB24}">
+                <p16:designElem xmlns:p16="http://schemas.microsoft.com/office/powerpoint/2015/main" val="1"/>
+              </p:ext>
+            </p:extLst>
+          </p:nvPr>
+        </p:nvSpPr>
+        <p:spPr>
+          <a:xfrm rot="10800000">
+            <a:off x="-2" y="-22693"/>
+            <a:ext cx="12191999" cy="4374129"/>
+          </a:xfrm>
+          <a:prstGeom prst="rect">
+            <a:avLst/>
+          </a:prstGeom>
+          <a:gradFill>
+            <a:gsLst>
+              <a:gs pos="0">
+                <a:schemeClr val="accent1">
+                  <a:lumMod val="75000"/>
+                </a:schemeClr>
+              </a:gs>
+              <a:gs pos="100000">
+                <a:srgbClr val="000000"/>
+              </a:gs>
+            </a:gsLst>
+            <a:lin ang="15000000" scaled="0"/>
+          </a:gradFill>
+          <a:ln>
+            <a:noFill/>
+          </a:ln>
+        </p:spPr>
+        <p:style>
+          <a:lnRef idx="2">
+            <a:schemeClr val="accent1">
+              <a:shade val="50000"/>
+            </a:schemeClr>
+          </a:lnRef>
+          <a:fillRef idx="1">
+            <a:schemeClr val="accent1"/>
+          </a:fillRef>
+          <a:effectRef idx="0">
+            <a:schemeClr val="accent1"/>
+          </a:effectRef>
+          <a:fontRef idx="minor">
+            <a:schemeClr val="lt1"/>
+          </a:fontRef>
+        </p:style>
+        <p:txBody>
+          <a:bodyPr rtlCol="0" anchor="ctr"/>
+          <a:lstStyle/>
+          <a:p>
+            <a:pPr algn="ctr"/>
+            <a:endParaRPr lang="en-US"/>
+          </a:p>
+        </p:txBody>
+      </p:sp>
+      <p:sp>
+        <p:nvSpPr>
+          <p:cNvPr id="25" name="Rectangle 10">
+            <a:extLst>
+              <a:ext uri="{FF2B5EF4-FFF2-40B4-BE49-F238E27FC236}">
+                <a16:creationId xmlns:a16="http://schemas.microsoft.com/office/drawing/2014/main" id="{6016219D-510E-4184-9090-6D5578A87BD1}"/>
+              </a:ext>
+              <a:ext uri="{C183D7F6-B498-43B3-948B-1728B52AA6E4}">
+                <adec:decorative xmlns:adec="http://schemas.microsoft.com/office/drawing/2017/decorative" val="1"/>
+              </a:ext>
+            </a:extLst>
+          </p:cNvPr>
+          <p:cNvSpPr>
+            <a:spLocks noGrp="1" noRot="1" noChangeAspect="1" noMove="1" noResize="1" noEditPoints="1" noAdjustHandles="1" noChangeArrowheads="1" noChangeShapeType="1" noTextEdit="1"/>
+          </p:cNvSpPr>
+          <p:nvPr>
+            <p:extLst>
+              <p:ext uri="{386F3935-93C4-4BCD-93E2-E3B085C9AB24}">
+                <p16:designElem xmlns:p16="http://schemas.microsoft.com/office/powerpoint/2015/main" val="1"/>
+              </p:ext>
+            </p:extLst>
+          </p:nvPr>
+        </p:nvSpPr>
+        <p:spPr>
+          <a:xfrm rot="5400000">
+            <a:off x="3908719" y="-3931841"/>
+            <a:ext cx="4374557" cy="12192000"/>
+          </a:xfrm>
+          <a:prstGeom prst="rect">
+            <a:avLst/>
+          </a:prstGeom>
+          <a:gradFill>
+            <a:gsLst>
+              <a:gs pos="40000">
+                <a:schemeClr val="accent1">
+                  <a:alpha val="0"/>
+                </a:schemeClr>
+              </a:gs>
+              <a:gs pos="100000">
+                <a:schemeClr val="accent1">
+                  <a:lumMod val="75000"/>
+                  <a:alpha val="52000"/>
+                </a:schemeClr>
+              </a:gs>
+            </a:gsLst>
+            <a:lin ang="2400000" scaled="0"/>
+          </a:gradFill>
+          <a:ln>
+            <a:noFill/>
+          </a:ln>
+        </p:spPr>
+        <p:style>
+          <a:lnRef idx="2">
+            <a:schemeClr val="accent1">
+              <a:shade val="50000"/>
+            </a:schemeClr>
+          </a:lnRef>
+          <a:fillRef idx="1">
+            <a:schemeClr val="accent1"/>
+          </a:fillRef>
+          <a:effectRef idx="0">
+            <a:schemeClr val="accent1"/>
+          </a:effectRef>
+          <a:fontRef idx="minor">
+            <a:schemeClr val="lt1"/>
+          </a:fontRef>
+        </p:style>
+        <p:txBody>
+          <a:bodyPr rtlCol="0" anchor="ctr"/>
+          <a:lstStyle/>
+          <a:p>
+            <a:pPr algn="ctr"/>
+            <a:endParaRPr lang="en-US"/>
+          </a:p>
+        </p:txBody>
+      </p:sp>
+      <p:sp>
+        <p:nvSpPr>
+          <p:cNvPr id="26" name="Rectangle 12">
+            <a:extLst>
+              <a:ext uri="{FF2B5EF4-FFF2-40B4-BE49-F238E27FC236}">
+                <a16:creationId xmlns:a16="http://schemas.microsoft.com/office/drawing/2014/main" id="{AFF4A713-7B75-4B21-90D7-5AB19547C728}"/>
+              </a:ext>
+              <a:ext uri="{C183D7F6-B498-43B3-948B-1728B52AA6E4}">
+                <adec:decorative xmlns:adec="http://schemas.microsoft.com/office/drawing/2017/decorative" val="1"/>
+              </a:ext>
+            </a:extLst>
+          </p:cNvPr>
+          <p:cNvSpPr>
+            <a:spLocks noGrp="1" noRot="1" noChangeAspect="1" noMove="1" noResize="1" noEditPoints="1" noAdjustHandles="1" noChangeArrowheads="1" noChangeShapeType="1" noTextEdit="1"/>
+          </p:cNvSpPr>
+          <p:nvPr>
+            <p:extLst>
+              <p:ext uri="{386F3935-93C4-4BCD-93E2-E3B085C9AB24}">
+                <p16:designElem xmlns:p16="http://schemas.microsoft.com/office/powerpoint/2015/main" val="1"/>
+              </p:ext>
+            </p:extLst>
+          </p:nvPr>
+        </p:nvSpPr>
+        <p:spPr>
+          <a:xfrm rot="5400000">
+            <a:off x="4136696" y="-3703868"/>
+            <a:ext cx="4374128" cy="11736479"/>
+          </a:xfrm>
+          <a:prstGeom prst="rect">
+            <a:avLst/>
+          </a:prstGeom>
+          <a:gradFill>
+            <a:gsLst>
+              <a:gs pos="17000">
+                <a:schemeClr val="accent1">
+                  <a:alpha val="0"/>
+                </a:schemeClr>
+              </a:gs>
+              <a:gs pos="100000">
+                <a:srgbClr val="000000">
+                  <a:alpha val="37000"/>
+                </a:srgbClr>
+              </a:gs>
+            </a:gsLst>
+            <a:lin ang="7800000" scaled="0"/>
+          </a:gradFill>
+          <a:ln>
+            <a:noFill/>
+          </a:ln>
+        </p:spPr>
+        <p:style>
+          <a:lnRef idx="2">
+            <a:schemeClr val="accent1">
+              <a:shade val="50000"/>
+            </a:schemeClr>
+          </a:lnRef>
+          <a:fillRef idx="1">
+            <a:schemeClr val="accent1"/>
+          </a:fillRef>
+          <a:effectRef idx="0">
+            <a:schemeClr val="accent1"/>
+          </a:effectRef>
+          <a:fontRef idx="minor">
+            <a:schemeClr val="lt1"/>
+          </a:fontRef>
+        </p:style>
+        <p:txBody>
+          <a:bodyPr rtlCol="0" anchor="ctr"/>
+          <a:lstStyle/>
+          <a:p>
+            <a:pPr algn="ctr"/>
+            <a:endParaRPr lang="en-US"/>
+          </a:p>
+        </p:txBody>
+      </p:sp>
+      <p:sp>
+        <p:nvSpPr>
+          <p:cNvPr id="27" name="Rectangle 14">
+            <a:extLst>
+              <a:ext uri="{FF2B5EF4-FFF2-40B4-BE49-F238E27FC236}">
+                <a16:creationId xmlns:a16="http://schemas.microsoft.com/office/drawing/2014/main" id="{DC631C0B-6DA6-4E57-8231-CE32B3434A7E}"/>
+              </a:ext>
+              <a:ext uri="{C183D7F6-B498-43B3-948B-1728B52AA6E4}">
+                <adec:decorative xmlns:adec="http://schemas.microsoft.com/office/drawing/2017/decorative" val="1"/>
+              </a:ext>
+            </a:extLst>
+          </p:cNvPr>
+          <p:cNvSpPr>
+            <a:spLocks noGrp="1" noRot="1" noChangeAspect="1" noMove="1" noResize="1" noEditPoints="1" noAdjustHandles="1" noChangeArrowheads="1" noChangeShapeType="1" noTextEdit="1"/>
+          </p:cNvSpPr>
+          <p:nvPr>
+            <p:extLst>
+              <p:ext uri="{386F3935-93C4-4BCD-93E2-E3B085C9AB24}">
+                <p16:designElem xmlns:p16="http://schemas.microsoft.com/office/powerpoint/2015/main" val="1"/>
+              </p:ext>
+            </p:extLst>
+          </p:nvPr>
+        </p:nvSpPr>
+        <p:spPr>
+          <a:xfrm>
+            <a:off x="-5" y="-22690"/>
+            <a:ext cx="8542485" cy="4374126"/>
+          </a:xfrm>
+          <a:prstGeom prst="rect">
+            <a:avLst/>
+          </a:prstGeom>
+          <a:gradFill>
+            <a:gsLst>
+              <a:gs pos="0">
+                <a:schemeClr val="accent1">
+                  <a:lumMod val="50000"/>
+                  <a:alpha val="0"/>
+                </a:schemeClr>
+              </a:gs>
+              <a:gs pos="100000">
+                <a:srgbClr val="000000">
+                  <a:alpha val="25000"/>
+                </a:srgbClr>
+              </a:gs>
+            </a:gsLst>
+            <a:lin ang="18600000" scaled="0"/>
+          </a:gradFill>
+          <a:ln>
+            <a:noFill/>
+          </a:ln>
+        </p:spPr>
+        <p:style>
+          <a:lnRef idx="2">
+            <a:schemeClr val="accent1">
+              <a:shade val="50000"/>
+            </a:schemeClr>
+          </a:lnRef>
+          <a:fillRef idx="1">
+            <a:schemeClr val="accent1"/>
+          </a:fillRef>
+          <a:effectRef idx="0">
+            <a:schemeClr val="accent1"/>
+          </a:effectRef>
+          <a:fontRef idx="minor">
+            <a:schemeClr val="lt1"/>
+          </a:fontRef>
+        </p:style>
+        <p:txBody>
+          <a:bodyPr rtlCol="0" anchor="ctr"/>
+          <a:lstStyle/>
+          <a:p>
+            <a:pPr algn="ctr"/>
+            <a:endParaRPr lang="en-US"/>
+          </a:p>
+        </p:txBody>
+      </p:sp>
+      <p:sp>
+        <p:nvSpPr>
+          <p:cNvPr id="28" name="Freeform: Shape 16">
+            <a:extLst>
+              <a:ext uri="{FF2B5EF4-FFF2-40B4-BE49-F238E27FC236}">
+                <a16:creationId xmlns:a16="http://schemas.microsoft.com/office/drawing/2014/main" id="{C29501E6-A978-4A61-9689-9085AF97A53A}"/>
+              </a:ext>
+              <a:ext uri="{C183D7F6-B498-43B3-948B-1728B52AA6E4}">
+                <adec:decorative xmlns:adec="http://schemas.microsoft.com/office/drawing/2017/decorative" val="1"/>
+              </a:ext>
+            </a:extLst>
+          </p:cNvPr>
+          <p:cNvSpPr>
+            <a:spLocks noGrp="1" noRot="1" noChangeAspect="1" noMove="1" noResize="1" noEditPoints="1" noAdjustHandles="1" noChangeArrowheads="1" noChangeShapeType="1" noTextEdit="1"/>
+          </p:cNvSpPr>
+          <p:nvPr>
+            <p:extLst>
+              <p:ext uri="{386F3935-93C4-4BCD-93E2-E3B085C9AB24}">
+                <p16:designElem xmlns:p16="http://schemas.microsoft.com/office/powerpoint/2015/main" val="1"/>
+              </p:ext>
+            </p:extLst>
+          </p:nvPr>
+        </p:nvSpPr>
+        <p:spPr>
+          <a:xfrm rot="12508972">
+            <a:off x="5945431" y="-1032053"/>
+            <a:ext cx="4990147" cy="4439131"/>
+          </a:xfrm>
+          <a:custGeom>
+            <a:avLst/>
+            <a:gdLst>
+              <a:gd name="connsiteX0" fmla="*/ 4990147 w 4990147"/>
+              <a:gd name="connsiteY0" fmla="*/ 2229378 h 4439131"/>
+              <a:gd name="connsiteX1" fmla="*/ 917384 w 4990147"/>
+              <a:gd name="connsiteY1" fmla="*/ 4439131 h 4439131"/>
+              <a:gd name="connsiteX2" fmla="*/ 910814 w 4990147"/>
+              <a:gd name="connsiteY2" fmla="*/ 4434219 h 4439131"/>
+              <a:gd name="connsiteX3" fmla="*/ 0 w 4990147"/>
+              <a:gd name="connsiteY3" fmla="*/ 2502877 h 4439131"/>
+              <a:gd name="connsiteX4" fmla="*/ 2502877 w 4990147"/>
+              <a:gd name="connsiteY4" fmla="*/ 0 h 4439131"/>
+              <a:gd name="connsiteX5" fmla="*/ 4954904 w 4990147"/>
+              <a:gd name="connsiteY5" fmla="*/ 1998460 h 4439131"/>
+            </a:gdLst>
+            <a:ahLst/>
+            <a:cxnLst>
+              <a:cxn ang="0">
+                <a:pos x="connsiteX0" y="connsiteY0"/>
+              </a:cxn>
+              <a:cxn ang="0">
+                <a:pos x="connsiteX1" y="connsiteY1"/>
+              </a:cxn>
+              <a:cxn ang="0">
+                <a:pos x="connsiteX2" y="connsiteY2"/>
+              </a:cxn>
+              <a:cxn ang="0">
+                <a:pos x="connsiteX3" y="connsiteY3"/>
+              </a:cxn>
+              <a:cxn ang="0">
+                <a:pos x="connsiteX4" y="connsiteY4"/>
+              </a:cxn>
+              <a:cxn ang="0">
+                <a:pos x="connsiteX5" y="connsiteY5"/>
+              </a:cxn>
+            </a:cxnLst>
+            <a:rect l="l" t="t" r="r" b="b"/>
+            <a:pathLst>
+              <a:path w="4990147" h="4439131">
+                <a:moveTo>
+                  <a:pt x="4990147" y="2229378"/>
+                </a:moveTo>
+                <a:lnTo>
+                  <a:pt x="917384" y="4439131"/>
+                </a:lnTo>
+                <a:lnTo>
+                  <a:pt x="910814" y="4434219"/>
+                </a:lnTo>
+                <a:cubicBezTo>
+                  <a:pt x="354557" y="3975154"/>
+                  <a:pt x="0" y="3280421"/>
+                  <a:pt x="0" y="2502877"/>
+                </a:cubicBezTo>
+                <a:cubicBezTo>
+                  <a:pt x="0" y="1120576"/>
+                  <a:pt x="1120576" y="0"/>
+                  <a:pt x="2502877" y="0"/>
+                </a:cubicBezTo>
+                <a:cubicBezTo>
+                  <a:pt x="3712390" y="0"/>
+                  <a:pt x="4721520" y="857941"/>
+                  <a:pt x="4954904" y="1998460"/>
+                </a:cubicBezTo>
+                <a:close/>
+              </a:path>
+            </a:pathLst>
+          </a:custGeom>
+          <a:gradFill>
+            <a:gsLst>
+              <a:gs pos="0">
+                <a:schemeClr val="accent1">
+                  <a:alpha val="22000"/>
+                </a:schemeClr>
+              </a:gs>
+              <a:gs pos="87000">
+                <a:schemeClr val="accent1">
+                  <a:lumMod val="60000"/>
+                  <a:lumOff val="40000"/>
+                  <a:alpha val="2000"/>
+                </a:schemeClr>
+              </a:gs>
+            </a:gsLst>
+            <a:lin ang="8400000" scaled="0"/>
+          </a:gradFill>
+          <a:ln>
+            <a:noFill/>
+          </a:ln>
+        </p:spPr>
+        <p:style>
+          <a:lnRef idx="2">
+            <a:schemeClr val="accent1">
+              <a:shade val="50000"/>
+            </a:schemeClr>
+          </a:lnRef>
+          <a:fillRef idx="1">
+            <a:schemeClr val="accent1"/>
+          </a:fillRef>
+          <a:effectRef idx="0">
+            <a:schemeClr val="accent1"/>
+          </a:effectRef>
+          <a:fontRef idx="minor">
+            <a:schemeClr val="lt1"/>
+          </a:fontRef>
+        </p:style>
+        <p:txBody>
+          <a:bodyPr wrap="square" rtlCol="0" anchor="ctr">
+            <a:noAutofit/>
+          </a:bodyPr>
+          <a:lstStyle/>
+          <a:p>
+            <a:pPr algn="ctr"/>
+            <a:endParaRPr lang="en-US" dirty="0"/>
+          </a:p>
+        </p:txBody>
+      </p:sp>
+      <p:sp>
+        <p:nvSpPr>
+          <p:cNvPr id="2" name="Titel 1">
+            <a:extLst>
+              <a:ext uri="{FF2B5EF4-FFF2-40B4-BE49-F238E27FC236}">
+                <a16:creationId xmlns:a16="http://schemas.microsoft.com/office/drawing/2014/main" id="{B2AC7737-E7AF-A6FA-67E2-FAA7542135BF}"/>
+              </a:ext>
+            </a:extLst>
+          </p:cNvPr>
+          <p:cNvSpPr>
+            <a:spLocks noGrp="1"/>
+          </p:cNvSpPr>
+          <p:nvPr>
+            <p:ph type="title"/>
+          </p:nvPr>
+        </p:nvSpPr>
+        <p:spPr>
+          <a:xfrm>
+            <a:off x="1314824" y="735106"/>
+            <a:ext cx="10053763" cy="2928470"/>
+          </a:xfrm>
+        </p:spPr>
+        <p:txBody>
+          <a:bodyPr vert="horz" lIns="91440" tIns="45720" rIns="91440" bIns="45720" rtlCol="0" anchor="b">
+            <a:normAutofit/>
+          </a:bodyPr>
+          <a:lstStyle/>
+          <a:p>
+            <a:r>
+              <a:rPr lang="nl-BE" sz="6600" kern="1200" noProof="0" dirty="0">
+                <a:solidFill>
+                  <a:srgbClr val="FFFFFF"/>
+                </a:solidFill>
+                <a:latin typeface="+mj-lt"/>
+                <a:ea typeface="+mj-ea"/>
+                <a:cs typeface="+mj-cs"/>
+              </a:rPr>
+              <a:t>Einde</a:t>
+            </a:r>
+          </a:p>
+        </p:txBody>
+      </p:sp>
+    </p:spTree>
+    <p:extLst>
+      <p:ext uri="{BB962C8B-B14F-4D97-AF65-F5344CB8AC3E}">
+        <p14:creationId xmlns:p14="http://schemas.microsoft.com/office/powerpoint/2010/main" val="3179017027"/>
+      </p:ext>
+    </p:extLst>
+  </p:cSld>
+  <p:clrMapOvr>
+    <a:masterClrMapping/>
+  </p:clrMapOvr>
+</p:sld>
+</file>
+
+<file path=ppt/slides/slide2.xml><?xml version="1.0" encoding="utf-8"?>
+<p:sld xmlns:a="http://schemas.openxmlformats.org/drawingml/2006/main" xmlns:r="http://schemas.openxmlformats.org/officeDocument/2006/relationships" xmlns:p="http://schemas.openxmlformats.org/presentationml/2006/main">
+  <p:cSld>
+    <p:bg>
+      <p:bgPr>
+        <a:solidFill>
+          <a:schemeClr val="bg1"/>
+        </a:solidFill>
+        <a:effectLst/>
+      </p:bgPr>
+    </p:bg>
+    <p:spTree>
+      <p:nvGrpSpPr>
+        <p:cNvPr id="1" name=""/>
+        <p:cNvGrpSpPr/>
+        <p:nvPr/>
+      </p:nvGrpSpPr>
+      <p:grpSpPr>
+        <a:xfrm>
+          <a:off x="0" y="0"/>
+          <a:ext cx="0" cy="0"/>
+          <a:chOff x="0" y="0"/>
+          <a:chExt cx="0" cy="0"/>
+        </a:xfrm>
+      </p:grpSpPr>
+      <p:sp useBgFill="1">
+        <p:nvSpPr>
+          <p:cNvPr id="8" name="Rectangle 7">
+            <a:extLst>
+              <a:ext uri="{FF2B5EF4-FFF2-40B4-BE49-F238E27FC236}">
+                <a16:creationId xmlns:a16="http://schemas.microsoft.com/office/drawing/2014/main" id="{1B15ED52-F352-441B-82BF-E0EA34836D08}"/>
+              </a:ext>
+              <a:ext uri="{C183D7F6-B498-43B3-948B-1728B52AA6E4}">
+                <adec:decorative xmlns:adec="http://schemas.microsoft.com/office/drawing/2017/decorative" val="1"/>
+              </a:ext>
+            </a:extLst>
+          </p:cNvPr>
+          <p:cNvSpPr>
+            <a:spLocks noGrp="1" noRot="1" noChangeAspect="1" noMove="1" noResize="1" noEditPoints="1" noAdjustHandles="1" noChangeArrowheads="1" noChangeShapeType="1" noTextEdit="1"/>
+          </p:cNvSpPr>
+          <p:nvPr>
+            <p:extLst>
+              <p:ext uri="{386F3935-93C4-4BCD-93E2-E3B085C9AB24}">
+                <p16:designElem xmlns:p16="http://schemas.microsoft.com/office/powerpoint/2015/main" val="1"/>
+              </p:ext>
+            </p:extLst>
+          </p:nvPr>
+        </p:nvSpPr>
+        <p:spPr>
+          <a:xfrm>
+            <a:off x="0" y="0"/>
+            <a:ext cx="12192000" cy="6858000"/>
+          </a:xfrm>
+          <a:prstGeom prst="rect">
+            <a:avLst/>
+          </a:prstGeom>
+          <a:ln w="12700" cap="flat" cmpd="sng" algn="ctr">
+            <a:noFill/>
+            <a:prstDash val="solid"/>
+            <a:miter lim="800000"/>
+          </a:ln>
+          <a:effectLst/>
+          <a:extLst>
+            <a:ext uri="{91240B29-F687-4F45-9708-019B960494DF}">
+              <a14:hiddenLine xmlns:a14="http://schemas.microsoft.com/office/drawing/2010/main" w="12700" cap="flat" cmpd="sng" algn="ctr">
+                <a:solidFill>
+                  <a:schemeClr val="accent1">
+                    <a:shade val="50000"/>
+                  </a:schemeClr>
+                </a:solidFill>
+                <a:prstDash val="solid"/>
+                <a:miter lim="800000"/>
+              </a14:hiddenLine>
+            </a:ext>
+          </a:extLst>
+        </p:spPr>
+        <p:style>
+          <a:lnRef idx="2">
+            <a:schemeClr val="accent1">
+              <a:shade val="50000"/>
+            </a:schemeClr>
+          </a:lnRef>
+          <a:fillRef idx="1">
+            <a:schemeClr val="accent1"/>
+          </a:fillRef>
+          <a:effectRef idx="0">
+            <a:schemeClr val="accent1"/>
+          </a:effectRef>
+          <a:fontRef idx="minor">
+            <a:schemeClr val="lt1"/>
+          </a:fontRef>
+        </p:style>
+        <p:txBody>
+          <a:bodyPr rtlCol="0" anchor="ctr"/>
+          <a:lstStyle/>
+          <a:p>
+            <a:pPr algn="ctr"/>
+            <a:endParaRPr lang="en-US"/>
+          </a:p>
+        </p:txBody>
+      </p:sp>
+      <p:sp>
+        <p:nvSpPr>
           <p:cNvPr id="10" name="Rectangle 9">
             <a:extLst>
               <a:ext uri="{FF2B5EF4-FFF2-40B4-BE49-F238E27FC236}">
@@ -10301,7 +14238,7 @@
           <a:lstStyle/>
           <a:p>
             <a:r>
-              <a:rPr lang="nl-BE" sz="4000">
+              <a:rPr lang="nl-BE" sz="4000" dirty="0">
                 <a:solidFill>
                   <a:srgbClr val="FFFFFF"/>
                 </a:solidFill>
@@ -10340,17 +14277,30 @@
           <a:lstStyle/>
           <a:p>
             <a:r>
-              <a:rPr lang="nl-BE" sz="2000"/>
-              <a:t>Sci-fi horror</a:t>
+              <a:rPr lang="nl-BE" sz="2000" dirty="0" err="1"/>
+              <a:t>Sci-fi</a:t>
             </a:r>
-          </a:p>
-          <a:p>
-            <a:endParaRPr lang="nl-BE" sz="2000"/>
-          </a:p>
-          <a:p>
             <a:r>
-              <a:rPr lang="nl-BE" sz="2000"/>
-              <a:t>Onrust, monster kan er elke moment aankomen</a:t>
+              <a:rPr lang="nl-BE" sz="2000" dirty="0"/>
+              <a:t> horror</a:t>
+            </a:r>
+          </a:p>
+          <a:p>
+            <a:endParaRPr lang="nl-BE" sz="2000" dirty="0"/>
+          </a:p>
+          <a:p>
+            <a:r>
+              <a:rPr lang="nl-BE" sz="2000" dirty="0"/>
+              <a:t>Onrust</a:t>
+            </a:r>
+          </a:p>
+          <a:p>
+            <a:endParaRPr lang="nl-BE" sz="2000" dirty="0"/>
+          </a:p>
+          <a:p>
+            <a:r>
+              <a:rPr lang="nl-BE" sz="2000" dirty="0"/>
+              <a:t>Gevoel tot achtervolging</a:t>
             </a:r>
           </a:p>
         </p:txBody>
@@ -11306,6 +15256,14 @@
 <file path=ppt/slides/slide5.xml><?xml version="1.0" encoding="utf-8"?>
 <p:sld xmlns:a="http://schemas.openxmlformats.org/drawingml/2006/main" xmlns:r="http://schemas.openxmlformats.org/officeDocument/2006/relationships" xmlns:p="http://schemas.openxmlformats.org/presentationml/2006/main">
   <p:cSld>
+    <p:bg>
+      <p:bgPr>
+        <a:solidFill>
+          <a:schemeClr val="bg1"/>
+        </a:solidFill>
+        <a:effectLst/>
+      </p:bgPr>
+    </p:bg>
     <p:spTree>
       <p:nvGrpSpPr>
         <p:cNvPr id="1" name=""/>
@@ -11320,6 +15278,308 @@
           <a:chExt cx="0" cy="0"/>
         </a:xfrm>
       </p:grpSpPr>
+      <p:sp useBgFill="1">
+        <p:nvSpPr>
+          <p:cNvPr id="9" name="Rectangle 8">
+            <a:extLst>
+              <a:ext uri="{FF2B5EF4-FFF2-40B4-BE49-F238E27FC236}">
+                <a16:creationId xmlns:a16="http://schemas.microsoft.com/office/drawing/2014/main" id="{BACC6370-2D7E-4714-9D71-7542949D7D5D}"/>
+              </a:ext>
+              <a:ext uri="{C183D7F6-B498-43B3-948B-1728B52AA6E4}">
+                <adec:decorative xmlns:adec="http://schemas.microsoft.com/office/drawing/2017/decorative" val="1"/>
+              </a:ext>
+            </a:extLst>
+          </p:cNvPr>
+          <p:cNvSpPr>
+            <a:spLocks noGrp="1" noRot="1" noChangeAspect="1" noMove="1" noResize="1" noEditPoints="1" noAdjustHandles="1" noChangeArrowheads="1" noChangeShapeType="1" noTextEdit="1"/>
+          </p:cNvSpPr>
+          <p:nvPr>
+            <p:extLst>
+              <p:ext uri="{386F3935-93C4-4BCD-93E2-E3B085C9AB24}">
+                <p16:designElem xmlns:p16="http://schemas.microsoft.com/office/powerpoint/2015/main" val="1"/>
+              </p:ext>
+            </p:extLst>
+          </p:nvPr>
+        </p:nvSpPr>
+        <p:spPr>
+          <a:xfrm>
+            <a:off x="0" y="0"/>
+            <a:ext cx="12192000" cy="6858000"/>
+          </a:xfrm>
+          <a:prstGeom prst="rect">
+            <a:avLst/>
+          </a:prstGeom>
+          <a:ln w="12700" cap="flat" cmpd="sng" algn="ctr">
+            <a:noFill/>
+            <a:prstDash val="solid"/>
+            <a:miter lim="800000"/>
+          </a:ln>
+          <a:effectLst/>
+          <a:extLst>
+            <a:ext uri="{91240B29-F687-4F45-9708-019B960494DF}">
+              <a14:hiddenLine xmlns:a14="http://schemas.microsoft.com/office/drawing/2010/main" w="12700" cap="flat" cmpd="sng" algn="ctr">
+                <a:solidFill>
+                  <a:schemeClr val="accent1">
+                    <a:shade val="50000"/>
+                  </a:schemeClr>
+                </a:solidFill>
+                <a:prstDash val="solid"/>
+                <a:miter lim="800000"/>
+              </a14:hiddenLine>
+            </a:ext>
+          </a:extLst>
+        </p:spPr>
+        <p:style>
+          <a:lnRef idx="2">
+            <a:schemeClr val="accent1">
+              <a:shade val="50000"/>
+            </a:schemeClr>
+          </a:lnRef>
+          <a:fillRef idx="1">
+            <a:schemeClr val="accent1"/>
+          </a:fillRef>
+          <a:effectRef idx="0">
+            <a:schemeClr val="accent1"/>
+          </a:effectRef>
+          <a:fontRef idx="minor">
+            <a:schemeClr val="lt1"/>
+          </a:fontRef>
+        </p:style>
+        <p:txBody>
+          <a:bodyPr rtlCol="0" anchor="ctr"/>
+          <a:lstStyle/>
+          <a:p>
+            <a:pPr algn="ctr"/>
+            <a:endParaRPr lang="en-US"/>
+          </a:p>
+        </p:txBody>
+      </p:sp>
+      <p:sp>
+        <p:nvSpPr>
+          <p:cNvPr id="11" name="Rectangle 10">
+            <a:extLst>
+              <a:ext uri="{FF2B5EF4-FFF2-40B4-BE49-F238E27FC236}">
+                <a16:creationId xmlns:a16="http://schemas.microsoft.com/office/drawing/2014/main" id="{F68B3F68-107C-434F-AA38-110D5EA91B85}"/>
+              </a:ext>
+              <a:ext uri="{C183D7F6-B498-43B3-948B-1728B52AA6E4}">
+                <adec:decorative xmlns:adec="http://schemas.microsoft.com/office/drawing/2017/decorative" val="1"/>
+              </a:ext>
+            </a:extLst>
+          </p:cNvPr>
+          <p:cNvSpPr>
+            <a:spLocks noGrp="1" noRot="1" noChangeAspect="1" noMove="1" noResize="1" noEditPoints="1" noAdjustHandles="1" noChangeArrowheads="1" noChangeShapeType="1" noTextEdit="1"/>
+          </p:cNvSpPr>
+          <p:nvPr>
+            <p:extLst>
+              <p:ext uri="{386F3935-93C4-4BCD-93E2-E3B085C9AB24}">
+                <p16:designElem xmlns:p16="http://schemas.microsoft.com/office/powerpoint/2015/main" val="1"/>
+              </p:ext>
+            </p:extLst>
+          </p:nvPr>
+        </p:nvSpPr>
+        <p:spPr>
+          <a:xfrm flipH="1">
+            <a:off x="2" y="0"/>
+            <a:ext cx="12191998" cy="1575955"/>
+          </a:xfrm>
+          <a:prstGeom prst="rect">
+            <a:avLst/>
+          </a:prstGeom>
+          <a:gradFill>
+            <a:gsLst>
+              <a:gs pos="0">
+                <a:srgbClr val="000000">
+                  <a:alpha val="96000"/>
+                </a:srgbClr>
+              </a:gs>
+              <a:gs pos="100000">
+                <a:schemeClr val="accent1">
+                  <a:lumMod val="75000"/>
+                </a:schemeClr>
+              </a:gs>
+            </a:gsLst>
+            <a:lin ang="8400000" scaled="0"/>
+          </a:gradFill>
+          <a:ln>
+            <a:noFill/>
+          </a:ln>
+        </p:spPr>
+        <p:style>
+          <a:lnRef idx="2">
+            <a:schemeClr val="accent1">
+              <a:shade val="50000"/>
+            </a:schemeClr>
+          </a:lnRef>
+          <a:fillRef idx="1">
+            <a:schemeClr val="accent1"/>
+          </a:fillRef>
+          <a:effectRef idx="0">
+            <a:schemeClr val="accent1"/>
+          </a:effectRef>
+          <a:fontRef idx="minor">
+            <a:schemeClr val="lt1"/>
+          </a:fontRef>
+        </p:style>
+        <p:txBody>
+          <a:bodyPr rtlCol="0" anchor="ctr"/>
+          <a:lstStyle/>
+          <a:p>
+            <a:pPr algn="ctr"/>
+            <a:endParaRPr lang="en-US"/>
+          </a:p>
+        </p:txBody>
+      </p:sp>
+      <p:sp>
+        <p:nvSpPr>
+          <p:cNvPr id="13" name="Rectangle 12">
+            <a:extLst>
+              <a:ext uri="{FF2B5EF4-FFF2-40B4-BE49-F238E27FC236}">
+                <a16:creationId xmlns:a16="http://schemas.microsoft.com/office/drawing/2014/main" id="{AAD0DBB9-1A4B-4391-81D4-CB19F9AB918A}"/>
+              </a:ext>
+              <a:ext uri="{C183D7F6-B498-43B3-948B-1728B52AA6E4}">
+                <adec:decorative xmlns:adec="http://schemas.microsoft.com/office/drawing/2017/decorative" val="1"/>
+              </a:ext>
+            </a:extLst>
+          </p:cNvPr>
+          <p:cNvSpPr>
+            <a:spLocks noGrp="1" noRot="1" noChangeAspect="1" noMove="1" noResize="1" noEditPoints="1" noAdjustHandles="1" noChangeArrowheads="1" noChangeShapeType="1" noTextEdit="1"/>
+          </p:cNvSpPr>
+          <p:nvPr>
+            <p:extLst>
+              <p:ext uri="{386F3935-93C4-4BCD-93E2-E3B085C9AB24}">
+                <p16:designElem xmlns:p16="http://schemas.microsoft.com/office/powerpoint/2015/main" val="1"/>
+              </p:ext>
+            </p:extLst>
+          </p:nvPr>
+        </p:nvSpPr>
+        <p:spPr>
+          <a:xfrm rot="10800000" flipH="1">
+            <a:off x="8128857" y="0"/>
+            <a:ext cx="4063143" cy="1576412"/>
+          </a:xfrm>
+          <a:prstGeom prst="rect">
+            <a:avLst/>
+          </a:prstGeom>
+          <a:gradFill>
+            <a:gsLst>
+              <a:gs pos="19000">
+                <a:schemeClr val="accent1">
+                  <a:lumMod val="50000"/>
+                  <a:alpha val="68000"/>
+                </a:schemeClr>
+              </a:gs>
+              <a:gs pos="100000">
+                <a:schemeClr val="accent1">
+                  <a:alpha val="79000"/>
+                </a:schemeClr>
+              </a:gs>
+            </a:gsLst>
+            <a:lin ang="19200000" scaled="0"/>
+          </a:gradFill>
+          <a:ln>
+            <a:noFill/>
+          </a:ln>
+        </p:spPr>
+        <p:style>
+          <a:lnRef idx="2">
+            <a:schemeClr val="accent1">
+              <a:shade val="50000"/>
+            </a:schemeClr>
+          </a:lnRef>
+          <a:fillRef idx="1">
+            <a:schemeClr val="accent1"/>
+          </a:fillRef>
+          <a:effectRef idx="0">
+            <a:schemeClr val="accent1"/>
+          </a:effectRef>
+          <a:fontRef idx="minor">
+            <a:schemeClr val="lt1"/>
+          </a:fontRef>
+        </p:style>
+        <p:txBody>
+          <a:bodyPr rtlCol="0" anchor="ctr"/>
+          <a:lstStyle/>
+          <a:p>
+            <a:pPr algn="ctr"/>
+            <a:endParaRPr lang="en-US"/>
+          </a:p>
+        </p:txBody>
+      </p:sp>
+      <p:sp>
+        <p:nvSpPr>
+          <p:cNvPr id="15" name="Rectangle 14">
+            <a:extLst>
+              <a:ext uri="{FF2B5EF4-FFF2-40B4-BE49-F238E27FC236}">
+                <a16:creationId xmlns:a16="http://schemas.microsoft.com/office/drawing/2014/main" id="{063BBA22-50EA-4C4D-BE05-F1CE4E63AA56}"/>
+              </a:ext>
+              <a:ext uri="{C183D7F6-B498-43B3-948B-1728B52AA6E4}">
+                <adec:decorative xmlns:adec="http://schemas.microsoft.com/office/drawing/2017/decorative" val="1"/>
+              </a:ext>
+            </a:extLst>
+          </p:cNvPr>
+          <p:cNvSpPr>
+            <a:spLocks noGrp="1" noRot="1" noChangeAspect="1" noMove="1" noResize="1" noEditPoints="1" noAdjustHandles="1" noChangeArrowheads="1" noChangeShapeType="1" noTextEdit="1"/>
+          </p:cNvSpPr>
+          <p:nvPr>
+            <p:extLst>
+              <p:ext uri="{386F3935-93C4-4BCD-93E2-E3B085C9AB24}">
+                <p16:designElem xmlns:p16="http://schemas.microsoft.com/office/powerpoint/2015/main" val="1"/>
+              </p:ext>
+            </p:extLst>
+          </p:nvPr>
+        </p:nvSpPr>
+        <p:spPr>
+          <a:xfrm rot="5400000">
+            <a:off x="5307777" y="-5307778"/>
+            <a:ext cx="1576446" cy="12192002"/>
+          </a:xfrm>
+          <a:prstGeom prst="rect">
+            <a:avLst/>
+          </a:prstGeom>
+          <a:gradFill>
+            <a:gsLst>
+              <a:gs pos="23000">
+                <a:schemeClr val="accent1">
+                  <a:alpha val="0"/>
+                </a:schemeClr>
+              </a:gs>
+              <a:gs pos="99000">
+                <a:srgbClr val="000000">
+                  <a:alpha val="74000"/>
+                </a:srgbClr>
+              </a:gs>
+            </a:gsLst>
+            <a:lin ang="20400000" scaled="0"/>
+          </a:gradFill>
+          <a:ln>
+            <a:noFill/>
+          </a:ln>
+        </p:spPr>
+        <p:style>
+          <a:lnRef idx="2">
+            <a:schemeClr val="accent1">
+              <a:shade val="50000"/>
+            </a:schemeClr>
+          </a:lnRef>
+          <a:fillRef idx="1">
+            <a:schemeClr val="accent1"/>
+          </a:fillRef>
+          <a:effectRef idx="0">
+            <a:schemeClr val="accent1"/>
+          </a:effectRef>
+          <a:fontRef idx="minor">
+            <a:schemeClr val="lt1"/>
+          </a:fontRef>
+        </p:style>
+        <p:txBody>
+          <a:bodyPr rtlCol="0" anchor="ctr"/>
+          <a:lstStyle/>
+          <a:p>
+            <a:pPr algn="ctr"/>
+            <a:endParaRPr lang="en-US" dirty="0"/>
+          </a:p>
+        </p:txBody>
+      </p:sp>
       <p:sp>
         <p:nvSpPr>
           <p:cNvPr id="2" name="Titel 1">
@@ -11336,13 +15596,24 @@
             <p:ph type="title"/>
           </p:nvPr>
         </p:nvSpPr>
-        <p:spPr/>
+        <p:spPr>
+          <a:xfrm>
+            <a:off x="1371597" y="348865"/>
+            <a:ext cx="10044023" cy="877729"/>
+          </a:xfrm>
+        </p:spPr>
         <p:txBody>
-          <a:bodyPr/>
+          <a:bodyPr anchor="ctr">
+            <a:normAutofit/>
+          </a:bodyPr>
           <a:lstStyle/>
           <a:p>
             <a:r>
-              <a:rPr lang="nl-BE" dirty="0"/>
+              <a:rPr lang="nl-BE" sz="4000">
+                <a:solidFill>
+                  <a:srgbClr val="FFFFFF"/>
+                </a:solidFill>
+              </a:rPr>
               <a:t>De Agent</a:t>
             </a:r>
           </a:p>
@@ -11364,14 +15635,14 @@
             <p:ph idx="1"/>
             <p:extLst>
               <p:ext uri="{D42A27DB-BD31-4B8C-83A1-F6EECF244321}">
-                <p14:modId xmlns:p14="http://schemas.microsoft.com/office/powerpoint/2010/main" val="1632433482"/>
+                <p14:modId xmlns:p14="http://schemas.microsoft.com/office/powerpoint/2010/main" val="699049240"/>
               </p:ext>
             </p:extLst>
           </p:nvPr>
         </p:nvGraphicFramePr>
         <p:xfrm>
-          <a:off x="838200" y="1825625"/>
-          <a:ext cx="10515597" cy="4246880"/>
+          <a:off x="644056" y="2229428"/>
+          <a:ext cx="10927830" cy="3959109"/>
         </p:xfrm>
         <a:graphic>
           <a:graphicData uri="http://schemas.openxmlformats.org/drawingml/2006/table">
@@ -11380,21 +15651,21 @@
                 <a:tableStyleId>{5C22544A-7EE6-4342-B048-85BDC9FD1C3A}</a:tableStyleId>
               </a:tblPr>
               <a:tblGrid>
-                <a:gridCol w="3505199">
+                <a:gridCol w="2680684">
                   <a:extLst>
                     <a:ext uri="{9D8B030D-6E8A-4147-A177-3AD203B41FA5}">
                       <a16:colId xmlns:a16="http://schemas.microsoft.com/office/drawing/2014/main" val="1903447574"/>
                     </a:ext>
                   </a:extLst>
                 </a:gridCol>
-                <a:gridCol w="3505199">
+                <a:gridCol w="4123573">
                   <a:extLst>
                     <a:ext uri="{9D8B030D-6E8A-4147-A177-3AD203B41FA5}">
                       <a16:colId xmlns:a16="http://schemas.microsoft.com/office/drawing/2014/main" val="653708874"/>
                     </a:ext>
                   </a:extLst>
                 </a:gridCol>
-                <a:gridCol w="3505199">
+                <a:gridCol w="4123573">
                   <a:extLst>
                     <a:ext uri="{9D8B030D-6E8A-4147-A177-3AD203B41FA5}">
                       <a16:colId xmlns:a16="http://schemas.microsoft.com/office/drawing/2014/main" val="2366129927"/>
@@ -11402,19 +15673,19 @@
                   </a:extLst>
                 </a:gridCol>
               </a:tblGrid>
-              <a:tr h="370840">
+              <a:tr h="370640">
                 <a:tc>
                   <a:txBody>
                     <a:bodyPr/>
                     <a:lstStyle/>
                     <a:p>
                       <a:r>
-                        <a:rPr lang="nl-BE" dirty="0"/>
+                        <a:rPr lang="nl-BE" sz="1700"/>
                         <a:t>type</a:t>
                       </a:r>
                     </a:p>
                   </a:txBody>
-                  <a:tcPr/>
+                  <a:tcPr marL="84236" marR="84236" marT="42118" marB="42118"/>
                 </a:tc>
                 <a:tc>
                   <a:txBody>
@@ -11422,12 +15693,12 @@
                     <a:lstStyle/>
                     <a:p>
                       <a:r>
-                        <a:rPr lang="nl-BE" dirty="0"/>
+                        <a:rPr lang="nl-BE" sz="1700"/>
                         <a:t>Beschrijving</a:t>
                       </a:r>
                     </a:p>
                   </a:txBody>
-                  <a:tcPr/>
+                  <a:tcPr marL="84236" marR="84236" marT="42118" marB="42118"/>
                 </a:tc>
                 <a:tc>
                   <a:txBody>
@@ -11435,12 +15706,12 @@
                     <a:lstStyle/>
                     <a:p>
                       <a:r>
-                        <a:rPr lang="nl-BE" dirty="0"/>
+                        <a:rPr lang="nl-BE" sz="1700"/>
                         <a:t>Waarde</a:t>
                       </a:r>
                     </a:p>
                   </a:txBody>
-                  <a:tcPr/>
+                  <a:tcPr marL="84236" marR="84236" marT="42118" marB="42118"/>
                 </a:tc>
                 <a:extLst>
                   <a:ext uri="{0D108BD9-81ED-4DB2-BD59-A6C34878D82A}">
@@ -11448,19 +15719,19 @@
                   </a:ext>
                 </a:extLst>
               </a:tr>
-              <a:tr h="370840">
+              <a:tr h="370640">
                 <a:tc>
                   <a:txBody>
                     <a:bodyPr/>
                     <a:lstStyle/>
                     <a:p>
                       <a:r>
-                        <a:rPr lang="nl-BE" dirty="0"/>
+                        <a:rPr lang="nl-BE" sz="1700"/>
                         <a:t>Observatie</a:t>
                       </a:r>
                     </a:p>
                   </a:txBody>
-                  <a:tcPr/>
+                  <a:tcPr marL="84236" marR="84236" marT="42118" marB="42118"/>
                 </a:tc>
                 <a:tc>
                   <a:txBody>
@@ -11468,25 +15739,12 @@
                     <a:lstStyle/>
                     <a:p>
                       <a:r>
-                        <a:rPr lang="nl-BE" dirty="0"/>
-                        <a:t>3D </a:t>
+                        <a:rPr lang="nl-BE" sz="1700"/>
+                        <a:t>3D ray perception</a:t>
                       </a:r>
-                      <a:r>
-                        <a:rPr lang="nl-BE" dirty="0" err="1"/>
-                        <a:t>ray</a:t>
-                      </a:r>
-                      <a:r>
-                        <a:rPr lang="nl-BE" dirty="0"/>
-                        <a:t> </a:t>
-                      </a:r>
-                      <a:r>
-                        <a:rPr lang="nl-BE" dirty="0" err="1"/>
-                        <a:t>perception</a:t>
-                      </a:r>
-                      <a:endParaRPr lang="nl-BE" dirty="0"/>
                     </a:p>
                   </a:txBody>
-                  <a:tcPr/>
+                  <a:tcPr marL="84236" marR="84236" marT="42118" marB="42118"/>
                 </a:tc>
                 <a:tc>
                   <a:txBody>
@@ -11494,12 +15752,12 @@
                     <a:lstStyle/>
                     <a:p>
                       <a:r>
-                        <a:rPr lang="nl-BE" dirty="0"/>
+                        <a:rPr lang="nl-BE" sz="1700"/>
                         <a:t>-</a:t>
                       </a:r>
                     </a:p>
                   </a:txBody>
-                  <a:tcPr/>
+                  <a:tcPr marL="84236" marR="84236" marT="42118" marB="42118"/>
                 </a:tc>
                 <a:extLst>
                   <a:ext uri="{0D108BD9-81ED-4DB2-BD59-A6C34878D82A}">
@@ -11507,19 +15765,19 @@
                   </a:ext>
                 </a:extLst>
               </a:tr>
-              <a:tr h="370840">
+              <a:tr h="370640">
                 <a:tc>
                   <a:txBody>
                     <a:bodyPr/>
                     <a:lstStyle/>
                     <a:p>
                       <a:r>
-                        <a:rPr lang="nl-BE" dirty="0"/>
+                        <a:rPr lang="nl-BE" sz="1700"/>
                         <a:t>Observatie</a:t>
                       </a:r>
                     </a:p>
                   </a:txBody>
-                  <a:tcPr/>
+                  <a:tcPr marL="84236" marR="84236" marT="42118" marB="42118"/>
                 </a:tc>
                 <a:tc>
                   <a:txBody>
@@ -11527,17 +15785,12 @@
                     <a:lstStyle/>
                     <a:p>
                       <a:r>
-                        <a:rPr lang="nl-BE" dirty="0"/>
-                        <a:t>Agent </a:t>
+                        <a:rPr lang="nl-BE" sz="1700"/>
+                        <a:t>Agent volicity</a:t>
                       </a:r>
-                      <a:r>
-                        <a:rPr lang="nl-BE" dirty="0" err="1"/>
-                        <a:t>volicity</a:t>
-                      </a:r>
-                      <a:endParaRPr lang="nl-BE" dirty="0"/>
                     </a:p>
                   </a:txBody>
-                  <a:tcPr/>
+                  <a:tcPr marL="84236" marR="84236" marT="42118" marB="42118"/>
                 </a:tc>
                 <a:tc>
                   <a:txBody>
@@ -11545,12 +15798,12 @@
                     <a:lstStyle/>
                     <a:p>
                       <a:r>
-                        <a:rPr lang="nl-BE" dirty="0"/>
+                        <a:rPr lang="nl-BE" sz="1700"/>
                         <a:t>-</a:t>
                       </a:r>
                     </a:p>
                   </a:txBody>
-                  <a:tcPr/>
+                  <a:tcPr marL="84236" marR="84236" marT="42118" marB="42118"/>
                 </a:tc>
                 <a:extLst>
                   <a:ext uri="{0D108BD9-81ED-4DB2-BD59-A6C34878D82A}">
@@ -11558,19 +15811,19 @@
                   </a:ext>
                 </a:extLst>
               </a:tr>
-              <a:tr h="370840">
+              <a:tr h="370640">
                 <a:tc>
                   <a:txBody>
                     <a:bodyPr/>
                     <a:lstStyle/>
                     <a:p>
                       <a:r>
-                        <a:rPr lang="nl-BE" dirty="0"/>
+                        <a:rPr lang="nl-BE" sz="1700"/>
                         <a:t>Acties</a:t>
                       </a:r>
                     </a:p>
                   </a:txBody>
-                  <a:tcPr/>
+                  <a:tcPr marL="84236" marR="84236" marT="42118" marB="42118"/>
                 </a:tc>
                 <a:tc>
                   <a:txBody>
@@ -11578,12 +15831,12 @@
                     <a:lstStyle/>
                     <a:p>
                       <a:r>
-                        <a:rPr lang="nl-BE" dirty="0"/>
+                        <a:rPr lang="nl-BE" sz="1700"/>
                         <a:t>Draaien</a:t>
                       </a:r>
                     </a:p>
                   </a:txBody>
-                  <a:tcPr/>
+                  <a:tcPr marL="84236" marR="84236" marT="42118" marB="42118"/>
                 </a:tc>
                 <a:tc>
                   <a:txBody>
@@ -11591,12 +15844,12 @@
                     <a:lstStyle/>
                     <a:p>
                       <a:r>
-                        <a:rPr lang="nl-BE" dirty="0"/>
+                        <a:rPr lang="nl-BE" sz="1700"/>
                         <a:t>-</a:t>
                       </a:r>
                     </a:p>
                   </a:txBody>
-                  <a:tcPr/>
+                  <a:tcPr marL="84236" marR="84236" marT="42118" marB="42118"/>
                 </a:tc>
                 <a:extLst>
                   <a:ext uri="{0D108BD9-81ED-4DB2-BD59-A6C34878D82A}">
@@ -11604,19 +15857,19 @@
                   </a:ext>
                 </a:extLst>
               </a:tr>
-              <a:tr h="370840">
+              <a:tr h="370640">
                 <a:tc>
                   <a:txBody>
                     <a:bodyPr/>
                     <a:lstStyle/>
                     <a:p>
                       <a:r>
-                        <a:rPr lang="nl-BE" dirty="0"/>
+                        <a:rPr lang="nl-BE" sz="1700"/>
                         <a:t>Acties</a:t>
                       </a:r>
                     </a:p>
                   </a:txBody>
-                  <a:tcPr/>
+                  <a:tcPr marL="84236" marR="84236" marT="42118" marB="42118"/>
                 </a:tc>
                 <a:tc>
                   <a:txBody>
@@ -11624,12 +15877,12 @@
                     <a:lstStyle/>
                     <a:p>
                       <a:r>
-                        <a:rPr lang="nl-BE" dirty="0"/>
+                        <a:rPr lang="nl-BE" sz="1700"/>
                         <a:t>Voorwaarts  &amp; achterwaarts bewegen</a:t>
                       </a:r>
                     </a:p>
                   </a:txBody>
-                  <a:tcPr/>
+                  <a:tcPr marL="84236" marR="84236" marT="42118" marB="42118"/>
                 </a:tc>
                 <a:tc>
                   <a:txBody>
@@ -11637,12 +15890,12 @@
                     <a:lstStyle/>
                     <a:p>
                       <a:r>
-                        <a:rPr lang="nl-BE" dirty="0"/>
+                        <a:rPr lang="nl-BE" sz="1700"/>
                         <a:t>-</a:t>
                       </a:r>
                     </a:p>
                   </a:txBody>
-                  <a:tcPr/>
+                  <a:tcPr marL="84236" marR="84236" marT="42118" marB="42118"/>
                 </a:tc>
                 <a:extLst>
                   <a:ext uri="{0D108BD9-81ED-4DB2-BD59-A6C34878D82A}">
@@ -11650,19 +15903,19 @@
                   </a:ext>
                 </a:extLst>
               </a:tr>
-              <a:tr h="370840">
+              <a:tr h="370640">
                 <a:tc>
                   <a:txBody>
                     <a:bodyPr/>
                     <a:lstStyle/>
                     <a:p>
                       <a:r>
-                        <a:rPr lang="nl-BE" dirty="0"/>
+                        <a:rPr lang="nl-BE" sz="1700"/>
                         <a:t>Beloning</a:t>
                       </a:r>
                     </a:p>
                   </a:txBody>
-                  <a:tcPr/>
+                  <a:tcPr marL="84236" marR="84236" marT="42118" marB="42118"/>
                 </a:tc>
                 <a:tc>
                   <a:txBody>
@@ -11670,16 +15923,12 @@
                     <a:lstStyle/>
                     <a:p>
                       <a:r>
-                        <a:rPr lang="nl-BE" dirty="0" err="1"/>
-                        <a:t>Hider</a:t>
-                      </a:r>
-                      <a:r>
-                        <a:rPr lang="nl-BE" dirty="0"/>
-                        <a:t> vinden</a:t>
+                        <a:rPr lang="nl-BE" sz="1700"/>
+                        <a:t>Hider vinden</a:t>
                       </a:r>
                     </a:p>
                   </a:txBody>
-                  <a:tcPr/>
+                  <a:tcPr marL="84236" marR="84236" marT="42118" marB="42118"/>
                 </a:tc>
                 <a:tc>
                   <a:txBody>
@@ -11687,12 +15936,12 @@
                     <a:lstStyle/>
                     <a:p>
                       <a:r>
-                        <a:rPr lang="nl-BE" dirty="0"/>
+                        <a:rPr lang="nl-BE" sz="1700"/>
                         <a:t>+10</a:t>
                       </a:r>
                     </a:p>
                   </a:txBody>
-                  <a:tcPr/>
+                  <a:tcPr marL="84236" marR="84236" marT="42118" marB="42118"/>
                 </a:tc>
                 <a:extLst>
                   <a:ext uri="{0D108BD9-81ED-4DB2-BD59-A6C34878D82A}">
@@ -11700,19 +15949,19 @@
                   </a:ext>
                 </a:extLst>
               </a:tr>
-              <a:tr h="370840">
+              <a:tr h="370640">
                 <a:tc>
                   <a:txBody>
                     <a:bodyPr/>
                     <a:lstStyle/>
                     <a:p>
                       <a:r>
-                        <a:rPr lang="nl-BE" dirty="0"/>
+                        <a:rPr lang="nl-BE" sz="1700"/>
                         <a:t>Beloning</a:t>
                       </a:r>
                     </a:p>
                   </a:txBody>
-                  <a:tcPr/>
+                  <a:tcPr marL="84236" marR="84236" marT="42118" marB="42118"/>
                 </a:tc>
                 <a:tc>
                   <a:txBody>
@@ -11720,20 +15969,12 @@
                     <a:lstStyle/>
                     <a:p>
                       <a:r>
-                        <a:rPr lang="nl-BE" dirty="0"/>
-                        <a:t>Dichter bij </a:t>
-                      </a:r>
-                      <a:r>
-                        <a:rPr lang="nl-BE" dirty="0" err="1"/>
-                        <a:t>hider</a:t>
-                      </a:r>
-                      <a:r>
-                        <a:rPr lang="nl-BE" dirty="0"/>
-                        <a:t> komen</a:t>
+                        <a:rPr lang="nl-BE" sz="1700"/>
+                        <a:t>Dichter bij hider komen</a:t>
                       </a:r>
                     </a:p>
                   </a:txBody>
-                  <a:tcPr/>
+                  <a:tcPr marL="84236" marR="84236" marT="42118" marB="42118"/>
                 </a:tc>
                 <a:tc>
                   <a:txBody>
@@ -11741,17 +15982,12 @@
                     <a:lstStyle/>
                     <a:p>
                       <a:r>
-                        <a:rPr lang="nl-BE" dirty="0"/>
-                        <a:t>+0.05 * afstand tot </a:t>
+                        <a:rPr lang="nl-BE" sz="1700"/>
+                        <a:t>+0.05 * afstand tot hider</a:t>
                       </a:r>
-                      <a:r>
-                        <a:rPr lang="nl-BE" dirty="0" err="1"/>
-                        <a:t>hider</a:t>
-                      </a:r>
-                      <a:endParaRPr lang="nl-BE" dirty="0"/>
                     </a:p>
                   </a:txBody>
-                  <a:tcPr/>
+                  <a:tcPr marL="84236" marR="84236" marT="42118" marB="42118"/>
                 </a:tc>
                 <a:extLst>
                   <a:ext uri="{0D108BD9-81ED-4DB2-BD59-A6C34878D82A}">
@@ -11759,19 +15995,19 @@
                   </a:ext>
                 </a:extLst>
               </a:tr>
-              <a:tr h="370840">
+              <a:tr h="370640">
                 <a:tc>
                   <a:txBody>
                     <a:bodyPr/>
                     <a:lstStyle/>
                     <a:p>
                       <a:r>
-                        <a:rPr lang="nl-BE" dirty="0"/>
+                        <a:rPr lang="nl-BE" sz="1700"/>
                         <a:t>Afstraffing</a:t>
                       </a:r>
                     </a:p>
                   </a:txBody>
-                  <a:tcPr/>
+                  <a:tcPr marL="84236" marR="84236" marT="42118" marB="42118"/>
                 </a:tc>
                 <a:tc>
                   <a:txBody>
@@ -11779,12 +16015,12 @@
                     <a:lstStyle/>
                     <a:p>
                       <a:r>
-                        <a:rPr lang="nl-BE" dirty="0"/>
+                        <a:rPr lang="nl-BE" sz="1700"/>
                         <a:t>Tijd nemen</a:t>
                       </a:r>
                     </a:p>
                   </a:txBody>
-                  <a:tcPr/>
+                  <a:tcPr marL="84236" marR="84236" marT="42118" marB="42118"/>
                 </a:tc>
                 <a:tc>
                   <a:txBody>
@@ -11792,12 +16028,12 @@
                     <a:lstStyle/>
                     <a:p>
                       <a:r>
-                        <a:rPr lang="nl-BE" dirty="0"/>
+                        <a:rPr lang="nl-BE" sz="1700"/>
                         <a:t>-0.001 (variërend door training -)</a:t>
                       </a:r>
                     </a:p>
                   </a:txBody>
-                  <a:tcPr/>
+                  <a:tcPr marL="84236" marR="84236" marT="42118" marB="42118"/>
                 </a:tc>
                 <a:extLst>
                   <a:ext uri="{0D108BD9-81ED-4DB2-BD59-A6C34878D82A}">
@@ -11805,19 +16041,19 @@
                   </a:ext>
                 </a:extLst>
               </a:tr>
-              <a:tr h="370840">
+              <a:tr h="370640">
                 <a:tc>
                   <a:txBody>
                     <a:bodyPr/>
                     <a:lstStyle/>
                     <a:p>
                       <a:r>
-                        <a:rPr lang="nl-BE" dirty="0"/>
+                        <a:rPr lang="nl-BE" sz="1700"/>
                         <a:t>Afstraffing</a:t>
                       </a:r>
                     </a:p>
                   </a:txBody>
-                  <a:tcPr/>
+                  <a:tcPr marL="84236" marR="84236" marT="42118" marB="42118"/>
                 </a:tc>
                 <a:tc>
                   <a:txBody>
@@ -11825,12 +16061,12 @@
                     <a:lstStyle/>
                     <a:p>
                       <a:r>
-                        <a:rPr lang="nl-BE" dirty="0"/>
+                        <a:rPr lang="nl-BE" sz="1700"/>
                         <a:t>Muur contact</a:t>
                       </a:r>
                     </a:p>
                   </a:txBody>
-                  <a:tcPr/>
+                  <a:tcPr marL="84236" marR="84236" marT="42118" marB="42118"/>
                 </a:tc>
                 <a:tc>
                   <a:txBody>
@@ -11838,12 +16074,12 @@
                     <a:lstStyle/>
                     <a:p>
                       <a:r>
-                        <a:rPr lang="nl-BE" dirty="0"/>
+                        <a:rPr lang="nl-BE" sz="1700"/>
                         <a:t>-0.5 </a:t>
                       </a:r>
                     </a:p>
                   </a:txBody>
-                  <a:tcPr/>
+                  <a:tcPr marL="84236" marR="84236" marT="42118" marB="42118"/>
                 </a:tc>
                 <a:extLst>
                   <a:ext uri="{0D108BD9-81ED-4DB2-BD59-A6C34878D82A}">
@@ -11851,19 +16087,19 @@
                   </a:ext>
                 </a:extLst>
               </a:tr>
-              <a:tr h="370840">
+              <a:tr h="623349">
                 <a:tc>
                   <a:txBody>
                     <a:bodyPr/>
                     <a:lstStyle/>
                     <a:p>
                       <a:r>
-                        <a:rPr lang="nl-BE" dirty="0"/>
+                        <a:rPr lang="nl-BE" sz="1700"/>
                         <a:t>Afstraffing</a:t>
                       </a:r>
                     </a:p>
                   </a:txBody>
-                  <a:tcPr/>
+                  <a:tcPr marL="84236" marR="84236" marT="42118" marB="42118"/>
                 </a:tc>
                 <a:tc>
                   <a:txBody>
@@ -11871,12 +16107,12 @@
                     <a:lstStyle/>
                     <a:p>
                       <a:r>
-                        <a:rPr lang="nl-BE" dirty="0"/>
+                        <a:rPr lang="nl-BE" sz="1700"/>
                         <a:t>Obstakel contact</a:t>
                       </a:r>
                     </a:p>
                   </a:txBody>
-                  <a:tcPr/>
+                  <a:tcPr marL="84236" marR="84236" marT="42118" marB="42118"/>
                 </a:tc>
                 <a:tc>
                   <a:txBody>
@@ -11884,12 +16120,12 @@
                     <a:lstStyle/>
                     <a:p>
                       <a:r>
-                        <a:rPr lang="nl-BE" dirty="0"/>
+                        <a:rPr lang="nl-BE" sz="1700"/>
                         <a:t>Negatief evenredig met contact duur obstakel</a:t>
                       </a:r>
                     </a:p>
                   </a:txBody>
-                  <a:tcPr/>
+                  <a:tcPr marL="84236" marR="84236" marT="42118" marB="42118"/>
                 </a:tc>
                 <a:extLst>
                   <a:ext uri="{0D108BD9-81ED-4DB2-BD59-A6C34878D82A}">
@@ -14328,4 +18564,319 @@
     </a:ext>
   </a:extLst>
 </a:theme>
+</file>
+
+<file path=ppt/theme/theme2.xml><?xml version="1.0" encoding="utf-8"?>
+<a:theme xmlns:a="http://schemas.openxmlformats.org/drawingml/2006/main" name="Kantoorthema">
+  <a:themeElements>
+    <a:clrScheme name="Office">
+      <a:dk1>
+        <a:sysClr val="windowText" lastClr="000000"/>
+      </a:dk1>
+      <a:lt1>
+        <a:sysClr val="window" lastClr="FFFFFF"/>
+      </a:lt1>
+      <a:dk2>
+        <a:srgbClr val="0E2841"/>
+      </a:dk2>
+      <a:lt2>
+        <a:srgbClr val="E8E8E8"/>
+      </a:lt2>
+      <a:accent1>
+        <a:srgbClr val="156082"/>
+      </a:accent1>
+      <a:accent2>
+        <a:srgbClr val="E97132"/>
+      </a:accent2>
+      <a:accent3>
+        <a:srgbClr val="196B24"/>
+      </a:accent3>
+      <a:accent4>
+        <a:srgbClr val="0F9ED5"/>
+      </a:accent4>
+      <a:accent5>
+        <a:srgbClr val="A02B93"/>
+      </a:accent5>
+      <a:accent6>
+        <a:srgbClr val="4EA72E"/>
+      </a:accent6>
+      <a:hlink>
+        <a:srgbClr val="467886"/>
+      </a:hlink>
+      <a:folHlink>
+        <a:srgbClr val="96607D"/>
+      </a:folHlink>
+    </a:clrScheme>
+    <a:fontScheme name="Office">
+      <a:majorFont>
+        <a:latin typeface="Aptos Display" panose="02110004020202020204"/>
+        <a:ea typeface=""/>
+        <a:cs typeface=""/>
+        <a:font script="Jpan" typeface="游ゴシック Light"/>
+        <a:font script="Hang" typeface="맑은 고딕"/>
+        <a:font script="Hans" typeface="等线 Light"/>
+        <a:font script="Hant" typeface="新細明體"/>
+        <a:font script="Arab" typeface="Times New Roman"/>
+        <a:font script="Hebr" typeface="Times New Roman"/>
+        <a:font script="Thai" typeface="Angsana New"/>
+        <a:font script="Ethi" typeface="Nyala"/>
+        <a:font script="Beng" typeface="Vrinda"/>
+        <a:font script="Gujr" typeface="Shruti"/>
+        <a:font script="Khmr" typeface="MoolBoran"/>
+        <a:font script="Knda" typeface="Tunga"/>
+        <a:font script="Guru" typeface="Raavi"/>
+        <a:font script="Cans" typeface="Euphemia"/>
+        <a:font script="Cher" typeface="Plantagenet Cherokee"/>
+        <a:font script="Yiii" typeface="Microsoft Yi Baiti"/>
+        <a:font script="Tibt" typeface="Microsoft Himalaya"/>
+        <a:font script="Thaa" typeface="MV Boli"/>
+        <a:font script="Deva" typeface="Mangal"/>
+        <a:font script="Telu" typeface="Gautami"/>
+        <a:font script="Taml" typeface="Latha"/>
+        <a:font script="Syrc" typeface="Estrangelo Edessa"/>
+        <a:font script="Orya" typeface="Kalinga"/>
+        <a:font script="Mlym" typeface="Kartika"/>
+        <a:font script="Laoo" typeface="DokChampa"/>
+        <a:font script="Sinh" typeface="Iskoola Pota"/>
+        <a:font script="Mong" typeface="Mongolian Baiti"/>
+        <a:font script="Viet" typeface="Times New Roman"/>
+        <a:font script="Uigh" typeface="Microsoft Uighur"/>
+        <a:font script="Geor" typeface="Sylfaen"/>
+        <a:font script="Armn" typeface="Arial"/>
+        <a:font script="Bugi" typeface="Leelawadee UI"/>
+        <a:font script="Bopo" typeface="Microsoft JhengHei"/>
+        <a:font script="Java" typeface="Javanese Text"/>
+        <a:font script="Lisu" typeface="Segoe UI"/>
+        <a:font script="Mymr" typeface="Myanmar Text"/>
+        <a:font script="Nkoo" typeface="Ebrima"/>
+        <a:font script="Olck" typeface="Nirmala UI"/>
+        <a:font script="Osma" typeface="Ebrima"/>
+        <a:font script="Phag" typeface="Phagspa"/>
+        <a:font script="Syrn" typeface="Estrangelo Edessa"/>
+        <a:font script="Syrj" typeface="Estrangelo Edessa"/>
+        <a:font script="Syre" typeface="Estrangelo Edessa"/>
+        <a:font script="Sora" typeface="Nirmala UI"/>
+        <a:font script="Tale" typeface="Microsoft Tai Le"/>
+        <a:font script="Talu" typeface="Microsoft New Tai Lue"/>
+        <a:font script="Tfng" typeface="Ebrima"/>
+      </a:majorFont>
+      <a:minorFont>
+        <a:latin typeface="Aptos" panose="02110004020202020204"/>
+        <a:ea typeface=""/>
+        <a:cs typeface=""/>
+        <a:font script="Jpan" typeface="游ゴシック"/>
+        <a:font script="Hang" typeface="맑은 고딕"/>
+        <a:font script="Hans" typeface="等线"/>
+        <a:font script="Hant" typeface="新細明體"/>
+        <a:font script="Arab" typeface="Arial"/>
+        <a:font script="Hebr" typeface="Arial"/>
+        <a:font script="Thai" typeface="Cordia New"/>
+        <a:font script="Ethi" typeface="Nyala"/>
+        <a:font script="Beng" typeface="Vrinda"/>
+        <a:font script="Gujr" typeface="Shruti"/>
+        <a:font script="Khmr" typeface="DaunPenh"/>
+        <a:font script="Knda" typeface="Tunga"/>
+        <a:font script="Guru" typeface="Raavi"/>
+        <a:font script="Cans" typeface="Euphemia"/>
+        <a:font script="Cher" typeface="Plantagenet Cherokee"/>
+        <a:font script="Yiii" typeface="Microsoft Yi Baiti"/>
+        <a:font script="Tibt" typeface="Microsoft Himalaya"/>
+        <a:font script="Thaa" typeface="MV Boli"/>
+        <a:font script="Deva" typeface="Mangal"/>
+        <a:font script="Telu" typeface="Gautami"/>
+        <a:font script="Taml" typeface="Latha"/>
+        <a:font script="Syrc" typeface="Estrangelo Edessa"/>
+        <a:font script="Orya" typeface="Kalinga"/>
+        <a:font script="Mlym" typeface="Kartika"/>
+        <a:font script="Laoo" typeface="DokChampa"/>
+        <a:font script="Sinh" typeface="Iskoola Pota"/>
+        <a:font script="Mong" typeface="Mongolian Baiti"/>
+        <a:font script="Viet" typeface="Arial"/>
+        <a:font script="Uigh" typeface="Microsoft Uighur"/>
+        <a:font script="Geor" typeface="Sylfaen"/>
+        <a:font script="Armn" typeface="Arial"/>
+        <a:font script="Bugi" typeface="Leelawadee UI"/>
+        <a:font script="Bopo" typeface="Microsoft JhengHei"/>
+        <a:font script="Java" typeface="Javanese Text"/>
+        <a:font script="Lisu" typeface="Segoe UI"/>
+        <a:font script="Mymr" typeface="Myanmar Text"/>
+        <a:font script="Nkoo" typeface="Ebrima"/>
+        <a:font script="Olck" typeface="Nirmala UI"/>
+        <a:font script="Osma" typeface="Ebrima"/>
+        <a:font script="Phag" typeface="Phagspa"/>
+        <a:font script="Syrn" typeface="Estrangelo Edessa"/>
+        <a:font script="Syrj" typeface="Estrangelo Edessa"/>
+        <a:font script="Syre" typeface="Estrangelo Edessa"/>
+        <a:font script="Sora" typeface="Nirmala UI"/>
+        <a:font script="Tale" typeface="Microsoft Tai Le"/>
+        <a:font script="Talu" typeface="Microsoft New Tai Lue"/>
+        <a:font script="Tfng" typeface="Ebrima"/>
+      </a:minorFont>
+    </a:fontScheme>
+    <a:fmtScheme name="Office">
+      <a:fillStyleLst>
+        <a:solidFill>
+          <a:schemeClr val="phClr"/>
+        </a:solidFill>
+        <a:gradFill rotWithShape="1">
+          <a:gsLst>
+            <a:gs pos="0">
+              <a:schemeClr val="phClr">
+                <a:lumMod val="110000"/>
+                <a:satMod val="105000"/>
+                <a:tint val="67000"/>
+              </a:schemeClr>
+            </a:gs>
+            <a:gs pos="50000">
+              <a:schemeClr val="phClr">
+                <a:lumMod val="105000"/>
+                <a:satMod val="103000"/>
+                <a:tint val="73000"/>
+              </a:schemeClr>
+            </a:gs>
+            <a:gs pos="100000">
+              <a:schemeClr val="phClr">
+                <a:lumMod val="105000"/>
+                <a:satMod val="109000"/>
+                <a:tint val="81000"/>
+              </a:schemeClr>
+            </a:gs>
+          </a:gsLst>
+          <a:lin ang="5400000" scaled="0"/>
+        </a:gradFill>
+        <a:gradFill rotWithShape="1">
+          <a:gsLst>
+            <a:gs pos="0">
+              <a:schemeClr val="phClr">
+                <a:satMod val="103000"/>
+                <a:lumMod val="102000"/>
+                <a:tint val="94000"/>
+              </a:schemeClr>
+            </a:gs>
+            <a:gs pos="50000">
+              <a:schemeClr val="phClr">
+                <a:satMod val="110000"/>
+                <a:lumMod val="100000"/>
+                <a:shade val="100000"/>
+              </a:schemeClr>
+            </a:gs>
+            <a:gs pos="100000">
+              <a:schemeClr val="phClr">
+                <a:lumMod val="99000"/>
+                <a:satMod val="120000"/>
+                <a:shade val="78000"/>
+              </a:schemeClr>
+            </a:gs>
+          </a:gsLst>
+          <a:lin ang="5400000" scaled="0"/>
+        </a:gradFill>
+      </a:fillStyleLst>
+      <a:lnStyleLst>
+        <a:ln w="12700" cap="flat" cmpd="sng" algn="ctr">
+          <a:solidFill>
+            <a:schemeClr val="phClr"/>
+          </a:solidFill>
+          <a:prstDash val="solid"/>
+          <a:miter lim="800000"/>
+        </a:ln>
+        <a:ln w="19050" cap="flat" cmpd="sng" algn="ctr">
+          <a:solidFill>
+            <a:schemeClr val="phClr"/>
+          </a:solidFill>
+          <a:prstDash val="solid"/>
+          <a:miter lim="800000"/>
+        </a:ln>
+        <a:ln w="25400" cap="flat" cmpd="sng" algn="ctr">
+          <a:solidFill>
+            <a:schemeClr val="phClr"/>
+          </a:solidFill>
+          <a:prstDash val="solid"/>
+          <a:miter lim="800000"/>
+        </a:ln>
+      </a:lnStyleLst>
+      <a:effectStyleLst>
+        <a:effectStyle>
+          <a:effectLst/>
+        </a:effectStyle>
+        <a:effectStyle>
+          <a:effectLst/>
+        </a:effectStyle>
+        <a:effectStyle>
+          <a:effectLst>
+            <a:outerShdw blurRad="57150" dist="19050" dir="5400000" algn="ctr" rotWithShape="0">
+              <a:srgbClr val="000000">
+                <a:alpha val="63000"/>
+              </a:srgbClr>
+            </a:outerShdw>
+          </a:effectLst>
+        </a:effectStyle>
+      </a:effectStyleLst>
+      <a:bgFillStyleLst>
+        <a:solidFill>
+          <a:schemeClr val="phClr"/>
+        </a:solidFill>
+        <a:solidFill>
+          <a:schemeClr val="phClr">
+            <a:tint val="95000"/>
+            <a:satMod val="170000"/>
+          </a:schemeClr>
+        </a:solidFill>
+        <a:gradFill rotWithShape="1">
+          <a:gsLst>
+            <a:gs pos="0">
+              <a:schemeClr val="phClr">
+                <a:tint val="93000"/>
+                <a:satMod val="150000"/>
+                <a:shade val="98000"/>
+                <a:lumMod val="102000"/>
+              </a:schemeClr>
+            </a:gs>
+            <a:gs pos="50000">
+              <a:schemeClr val="phClr">
+                <a:tint val="98000"/>
+                <a:satMod val="130000"/>
+                <a:shade val="90000"/>
+                <a:lumMod val="103000"/>
+              </a:schemeClr>
+            </a:gs>
+            <a:gs pos="100000">
+              <a:schemeClr val="phClr">
+                <a:shade val="63000"/>
+                <a:satMod val="120000"/>
+              </a:schemeClr>
+            </a:gs>
+          </a:gsLst>
+          <a:lin ang="5400000" scaled="0"/>
+        </a:gradFill>
+      </a:bgFillStyleLst>
+    </a:fmtScheme>
+  </a:themeElements>
+  <a:objectDefaults>
+    <a:lnDef>
+      <a:spPr/>
+      <a:bodyPr/>
+      <a:lstStyle/>
+      <a:style>
+        <a:lnRef idx="2">
+          <a:schemeClr val="accent1"/>
+        </a:lnRef>
+        <a:fillRef idx="0">
+          <a:schemeClr val="accent1"/>
+        </a:fillRef>
+        <a:effectRef idx="1">
+          <a:schemeClr val="accent1"/>
+        </a:effectRef>
+        <a:fontRef idx="minor">
+          <a:schemeClr val="tx1"/>
+        </a:fontRef>
+      </a:style>
+    </a:lnDef>
+  </a:objectDefaults>
+  <a:extraClrSchemeLst/>
+  <a:extLst>
+    <a:ext uri="{05A4C25C-085E-4340-85A3-A5531E510DB2}">
+      <thm15:themeFamily xmlns:thm15="http://schemas.microsoft.com/office/thememl/2012/main" name="Office Theme" id="{2E142A2C-CD16-42D6-873A-C26D2A0506FA}" vid="{1BDDFF52-6CD6-40A5-AB3C-68EB2F1E4D0A}"/>
+    </a:ext>
+  </a:extLst>
+</a:theme>
 </file>
--- a/ProjectVREXP.pptx
+++ b/ProjectVREXP.pptx
@@ -3233,7 +3233,7 @@
           <a:p>
             <a:fld id="{964CB4EC-9112-42CF-A1F4-24A2A9075661}" type="slidenum">
               <a:rPr lang="nl-BE" smtClean="0"/>
-              <a:t>‹nr.›</a:t>
+              <a:t>‹#›</a:t>
             </a:fld>
             <a:endParaRPr lang="nl-BE"/>
           </a:p>
@@ -3629,7 +3629,7 @@
           <a:p>
             <a:fld id="{C9F69AD1-187A-4B61-99AC-2ACB9F96EC97}" type="slidenum">
               <a:rPr lang="nl-BE" smtClean="0"/>
-              <a:t>‹nr.›</a:t>
+              <a:t>‹#›</a:t>
             </a:fld>
             <a:endParaRPr lang="nl-BE"/>
           </a:p>
@@ -3829,7 +3829,7 @@
           <a:p>
             <a:fld id="{C9F69AD1-187A-4B61-99AC-2ACB9F96EC97}" type="slidenum">
               <a:rPr lang="nl-BE" smtClean="0"/>
-              <a:t>‹nr.›</a:t>
+              <a:t>‹#›</a:t>
             </a:fld>
             <a:endParaRPr lang="nl-BE"/>
           </a:p>
@@ -4039,7 +4039,7 @@
           <a:p>
             <a:fld id="{C9F69AD1-187A-4B61-99AC-2ACB9F96EC97}" type="slidenum">
               <a:rPr lang="nl-BE" smtClean="0"/>
-              <a:t>‹nr.›</a:t>
+              <a:t>‹#›</a:t>
             </a:fld>
             <a:endParaRPr lang="nl-BE"/>
           </a:p>
@@ -4239,7 +4239,7 @@
           <a:p>
             <a:fld id="{C9F69AD1-187A-4B61-99AC-2ACB9F96EC97}" type="slidenum">
               <a:rPr lang="nl-BE" smtClean="0"/>
-              <a:t>‹nr.›</a:t>
+              <a:t>‹#›</a:t>
             </a:fld>
             <a:endParaRPr lang="nl-BE"/>
           </a:p>
@@ -4515,7 +4515,7 @@
           <a:p>
             <a:fld id="{C9F69AD1-187A-4B61-99AC-2ACB9F96EC97}" type="slidenum">
               <a:rPr lang="nl-BE" smtClean="0"/>
-              <a:t>‹nr.›</a:t>
+              <a:t>‹#›</a:t>
             </a:fld>
             <a:endParaRPr lang="nl-BE"/>
           </a:p>
@@ -4783,7 +4783,7 @@
           <a:p>
             <a:fld id="{C9F69AD1-187A-4B61-99AC-2ACB9F96EC97}" type="slidenum">
               <a:rPr lang="nl-BE" smtClean="0"/>
-              <a:t>‹nr.›</a:t>
+              <a:t>‹#›</a:t>
             </a:fld>
             <a:endParaRPr lang="nl-BE"/>
           </a:p>
@@ -5198,7 +5198,7 @@
           <a:p>
             <a:fld id="{C9F69AD1-187A-4B61-99AC-2ACB9F96EC97}" type="slidenum">
               <a:rPr lang="nl-BE" smtClean="0"/>
-              <a:t>‹nr.›</a:t>
+              <a:t>‹#›</a:t>
             </a:fld>
             <a:endParaRPr lang="nl-BE"/>
           </a:p>
@@ -5340,7 +5340,7 @@
           <a:p>
             <a:fld id="{C9F69AD1-187A-4B61-99AC-2ACB9F96EC97}" type="slidenum">
               <a:rPr lang="nl-BE" smtClean="0"/>
-              <a:t>‹nr.›</a:t>
+              <a:t>‹#›</a:t>
             </a:fld>
             <a:endParaRPr lang="nl-BE"/>
           </a:p>
@@ -5453,7 +5453,7 @@
           <a:p>
             <a:fld id="{C9F69AD1-187A-4B61-99AC-2ACB9F96EC97}" type="slidenum">
               <a:rPr lang="nl-BE" smtClean="0"/>
-              <a:t>‹nr.›</a:t>
+              <a:t>‹#›</a:t>
             </a:fld>
             <a:endParaRPr lang="nl-BE"/>
           </a:p>
@@ -5766,7 +5766,7 @@
           <a:p>
             <a:fld id="{C9F69AD1-187A-4B61-99AC-2ACB9F96EC97}" type="slidenum">
               <a:rPr lang="nl-BE" smtClean="0"/>
-              <a:t>‹nr.›</a:t>
+              <a:t>‹#›</a:t>
             </a:fld>
             <a:endParaRPr lang="nl-BE"/>
           </a:p>
@@ -6055,7 +6055,7 @@
           <a:p>
             <a:fld id="{C9F69AD1-187A-4B61-99AC-2ACB9F96EC97}" type="slidenum">
               <a:rPr lang="nl-BE" smtClean="0"/>
-              <a:t>‹nr.›</a:t>
+              <a:t>‹#›</a:t>
             </a:fld>
             <a:endParaRPr lang="nl-BE"/>
           </a:p>
@@ -6334,7 +6334,7 @@
           <a:p>
             <a:fld id="{C9F69AD1-187A-4B61-99AC-2ACB9F96EC97}" type="slidenum">
               <a:rPr lang="nl-BE" smtClean="0"/>
-              <a:t>‹nr.›</a:t>
+              <a:t>‹#›</a:t>
             </a:fld>
             <a:endParaRPr lang="nl-BE"/>
           </a:p>
@@ -10403,7 +10403,7 @@
         </p:blipFill>
         <p:spPr>
           <a:xfrm>
-            <a:off x="1367692" y="2181426"/>
+            <a:off x="6475862" y="2048076"/>
             <a:ext cx="4479144" cy="3997637"/>
           </a:xfrm>
           <a:prstGeom prst="rect">
@@ -10439,7 +10439,7 @@
         </p:blipFill>
         <p:spPr>
           <a:xfrm>
-            <a:off x="6345165" y="2217815"/>
+            <a:off x="1249290" y="2048076"/>
             <a:ext cx="4466850" cy="3997831"/>
           </a:xfrm>
           <a:prstGeom prst="rect">
@@ -15635,7 +15635,7 @@
             <p:ph idx="1"/>
             <p:extLst>
               <p:ext uri="{D42A27DB-BD31-4B8C-83A1-F6EECF244321}">
-                <p14:modId xmlns:p14="http://schemas.microsoft.com/office/powerpoint/2010/main" val="699049240"/>
+                <p14:modId xmlns:p14="http://schemas.microsoft.com/office/powerpoint/2010/main" val="1477361240"/>
               </p:ext>
             </p:extLst>
           </p:nvPr>
@@ -15785,9 +15785,14 @@
                     <a:lstStyle/>
                     <a:p>
                       <a:r>
-                        <a:rPr lang="nl-BE" sz="1700"/>
-                        <a:t>Agent volicity</a:t>
+                        <a:rPr lang="nl-BE" sz="1700" dirty="0"/>
+                        <a:t>Agent </a:t>
                       </a:r>
+                      <a:r>
+                        <a:rPr lang="nl-BE" sz="1700" dirty="0" err="1"/>
+                        <a:t>volicity</a:t>
+                      </a:r>
+                      <a:endParaRPr lang="nl-BE" sz="1700" dirty="0"/>
                     </a:p>
                   </a:txBody>
                   <a:tcPr marL="84236" marR="84236" marT="42118" marB="42118"/>
@@ -16120,7 +16125,7 @@
                     <a:lstStyle/>
                     <a:p>
                       <a:r>
-                        <a:rPr lang="nl-BE" sz="1700"/>
+                        <a:rPr lang="nl-BE" sz="1700" dirty="0"/>
                         <a:t>Negatief evenredig met contact duur obstakel</a:t>
                       </a:r>
                     </a:p>
